--- a/exports/pptx/lessons/middle-module-08-yoga/day-04-sun-salutation-1.pptx
+++ b/exports/pptx/lessons/middle-module-08-yoga/day-04-sun-salutation-1.pptx
@@ -17,9 +17,14 @@
     <p:sldId id="265" r:id="rId11"/>
     <p:sldId id="266" r:id="rId12"/>
     <p:sldId id="267" r:id="rId13"/>
+    <p:sldId id="268" r:id="rId14"/>
+    <p:sldId id="269" r:id="rId15"/>
+    <p:sldId id="270" r:id="rId16"/>
+    <p:sldId id="271" r:id="rId17"/>
+    <p:sldId id="272" r:id="rId18"/>
   </p:sldIdLst>
   <p:notesMasterIdLst>
-    <p:notesMasterId r:id="rId14"/>
+    <p:notesMasterId r:id="rId19"/>
   </p:notesMasterIdLst>
   <p:sldSz cx="9144000" cy="5143500"/>
   <p:notesSz cx="5143500" cy="9144000"/>
@@ -801,6 +806,446 @@
             <a:fld id="{F7021451-1387-4CA6-816F-3879F97B5CBC}" type="slidenum">
               <a:rPr lang="en-US"/>
               <a:t>12</a:t>
+            </a:fld>
+            <a:endParaRPr lang="en-US"/>
+          </a:p>
+        </p:txBody>
+      </p:sp>
+    </p:spTree>
+    <p:extLst>
+      <p:ext uri="{BB962C8B-B14F-4D97-AF65-F5344CB8AC3E}">
+        <p14:creationId xmlns:p14="http://schemas.microsoft.com/office/powerpoint/2010/main" val="1024086991"/>
+      </p:ext>
+    </p:extLst>
+  </p:cSld>
+  <p:clrMapOvr>
+    <a:masterClrMapping/>
+  </p:clrMapOvr>
+</p:notes>
+</file>
+
+<file path=ppt/notesSlides/notesSlide13.xml><?xml version="1.0" encoding="utf-8"?>
+<p:notes xmlns:a="http://schemas.openxmlformats.org/drawingml/2006/main" xmlns:r="http://schemas.openxmlformats.org/officeDocument/2006/relationships" xmlns:p="http://schemas.openxmlformats.org/presentationml/2006/main">
+  <p:cSld>
+    <p:spTree>
+      <p:nvGrpSpPr>
+        <p:cNvPr id="1" name=""/>
+        <p:cNvGrpSpPr/>
+        <p:nvPr/>
+      </p:nvGrpSpPr>
+      <p:grpSpPr>
+        <a:xfrm>
+          <a:off x="0" y="0"/>
+          <a:ext cx="0" cy="0"/>
+          <a:chOff x="0" y="0"/>
+          <a:chExt cx="0" cy="0"/>
+        </a:xfrm>
+      </p:grpSpPr>
+      <p:sp>
+        <p:nvSpPr>
+          <p:cNvPr id="2" name="Slide Image Placeholder 1"/>
+          <p:cNvSpPr>
+            <a:spLocks noGrp="1" noRot="1" noChangeAspect="1"/>
+          </p:cNvSpPr>
+          <p:nvPr>
+            <p:ph type="sldImg"/>
+          </p:nvPr>
+        </p:nvSpPr>
+        <p:spPr/>
+      </p:sp>
+      <p:sp>
+        <p:nvSpPr>
+          <p:cNvPr id="3" name="Notes Placeholder 2"/>
+          <p:cNvSpPr>
+            <a:spLocks noGrp="1"/>
+          </p:cNvSpPr>
+          <p:nvPr>
+            <p:ph type="body" idx="1"/>
+          </p:nvPr>
+        </p:nvSpPr>
+        <p:spPr/>
+        <p:txBody>
+          <a:bodyPr/>
+          <a:lstStyle/>
+          <a:p>
+            <a:r>
+              <a:rPr lang="en-US" dirty="0"/>
+              <a:t/>
+            </a:r>
+            <a:endParaRPr lang="en-US" dirty="0"/>
+          </a:p>
+        </p:txBody>
+      </p:sp>
+      <p:sp>
+        <p:nvSpPr>
+          <p:cNvPr id="4" name="Slide Number Placeholder 3"/>
+          <p:cNvSpPr>
+            <a:spLocks noGrp="1"/>
+          </p:cNvSpPr>
+          <p:nvPr>
+            <p:ph type="sldNum" sz="quarter" idx="10"/>
+          </p:nvPr>
+        </p:nvSpPr>
+        <p:spPr/>
+        <p:txBody>
+          <a:bodyPr/>
+          <a:lstStyle/>
+          <a:p>
+            <a:fld id="{F7021451-1387-4CA6-816F-3879F97B5CBC}" type="slidenum">
+              <a:rPr lang="en-US"/>
+              <a:t>13</a:t>
+            </a:fld>
+            <a:endParaRPr lang="en-US"/>
+          </a:p>
+        </p:txBody>
+      </p:sp>
+    </p:spTree>
+    <p:extLst>
+      <p:ext uri="{BB962C8B-B14F-4D97-AF65-F5344CB8AC3E}">
+        <p14:creationId xmlns:p14="http://schemas.microsoft.com/office/powerpoint/2010/main" val="1024086991"/>
+      </p:ext>
+    </p:extLst>
+  </p:cSld>
+  <p:clrMapOvr>
+    <a:masterClrMapping/>
+  </p:clrMapOvr>
+</p:notes>
+</file>
+
+<file path=ppt/notesSlides/notesSlide14.xml><?xml version="1.0" encoding="utf-8"?>
+<p:notes xmlns:a="http://schemas.openxmlformats.org/drawingml/2006/main" xmlns:r="http://schemas.openxmlformats.org/officeDocument/2006/relationships" xmlns:p="http://schemas.openxmlformats.org/presentationml/2006/main">
+  <p:cSld>
+    <p:spTree>
+      <p:nvGrpSpPr>
+        <p:cNvPr id="1" name=""/>
+        <p:cNvGrpSpPr/>
+        <p:nvPr/>
+      </p:nvGrpSpPr>
+      <p:grpSpPr>
+        <a:xfrm>
+          <a:off x="0" y="0"/>
+          <a:ext cx="0" cy="0"/>
+          <a:chOff x="0" y="0"/>
+          <a:chExt cx="0" cy="0"/>
+        </a:xfrm>
+      </p:grpSpPr>
+      <p:sp>
+        <p:nvSpPr>
+          <p:cNvPr id="2" name="Slide Image Placeholder 1"/>
+          <p:cNvSpPr>
+            <a:spLocks noGrp="1" noRot="1" noChangeAspect="1"/>
+          </p:cNvSpPr>
+          <p:nvPr>
+            <p:ph type="sldImg"/>
+          </p:nvPr>
+        </p:nvSpPr>
+        <p:spPr/>
+      </p:sp>
+      <p:sp>
+        <p:nvSpPr>
+          <p:cNvPr id="3" name="Notes Placeholder 2"/>
+          <p:cNvSpPr>
+            <a:spLocks noGrp="1"/>
+          </p:cNvSpPr>
+          <p:nvPr>
+            <p:ph type="body" idx="1"/>
+          </p:nvPr>
+        </p:nvSpPr>
+        <p:spPr/>
+        <p:txBody>
+          <a:bodyPr/>
+          <a:lstStyle/>
+          <a:p>
+            <a:r>
+              <a:rPr lang="en-US" dirty="0"/>
+              <a:t/>
+            </a:r>
+            <a:endParaRPr lang="en-US" dirty="0"/>
+          </a:p>
+        </p:txBody>
+      </p:sp>
+      <p:sp>
+        <p:nvSpPr>
+          <p:cNvPr id="4" name="Slide Number Placeholder 3"/>
+          <p:cNvSpPr>
+            <a:spLocks noGrp="1"/>
+          </p:cNvSpPr>
+          <p:nvPr>
+            <p:ph type="sldNum" sz="quarter" idx="10"/>
+          </p:nvPr>
+        </p:nvSpPr>
+        <p:spPr/>
+        <p:txBody>
+          <a:bodyPr/>
+          <a:lstStyle/>
+          <a:p>
+            <a:fld id="{F7021451-1387-4CA6-816F-3879F97B5CBC}" type="slidenum">
+              <a:rPr lang="en-US"/>
+              <a:t>14</a:t>
+            </a:fld>
+            <a:endParaRPr lang="en-US"/>
+          </a:p>
+        </p:txBody>
+      </p:sp>
+    </p:spTree>
+    <p:extLst>
+      <p:ext uri="{BB962C8B-B14F-4D97-AF65-F5344CB8AC3E}">
+        <p14:creationId xmlns:p14="http://schemas.microsoft.com/office/powerpoint/2010/main" val="1024086991"/>
+      </p:ext>
+    </p:extLst>
+  </p:cSld>
+  <p:clrMapOvr>
+    <a:masterClrMapping/>
+  </p:clrMapOvr>
+</p:notes>
+</file>
+
+<file path=ppt/notesSlides/notesSlide15.xml><?xml version="1.0" encoding="utf-8"?>
+<p:notes xmlns:a="http://schemas.openxmlformats.org/drawingml/2006/main" xmlns:r="http://schemas.openxmlformats.org/officeDocument/2006/relationships" xmlns:p="http://schemas.openxmlformats.org/presentationml/2006/main">
+  <p:cSld>
+    <p:spTree>
+      <p:nvGrpSpPr>
+        <p:cNvPr id="1" name=""/>
+        <p:cNvGrpSpPr/>
+        <p:nvPr/>
+      </p:nvGrpSpPr>
+      <p:grpSpPr>
+        <a:xfrm>
+          <a:off x="0" y="0"/>
+          <a:ext cx="0" cy="0"/>
+          <a:chOff x="0" y="0"/>
+          <a:chExt cx="0" cy="0"/>
+        </a:xfrm>
+      </p:grpSpPr>
+      <p:sp>
+        <p:nvSpPr>
+          <p:cNvPr id="2" name="Slide Image Placeholder 1"/>
+          <p:cNvSpPr>
+            <a:spLocks noGrp="1" noRot="1" noChangeAspect="1"/>
+          </p:cNvSpPr>
+          <p:nvPr>
+            <p:ph type="sldImg"/>
+          </p:nvPr>
+        </p:nvSpPr>
+        <p:spPr/>
+      </p:sp>
+      <p:sp>
+        <p:nvSpPr>
+          <p:cNvPr id="3" name="Notes Placeholder 2"/>
+          <p:cNvSpPr>
+            <a:spLocks noGrp="1"/>
+          </p:cNvSpPr>
+          <p:nvPr>
+            <p:ph type="body" idx="1"/>
+          </p:nvPr>
+        </p:nvSpPr>
+        <p:spPr/>
+        <p:txBody>
+          <a:bodyPr/>
+          <a:lstStyle/>
+          <a:p>
+            <a:r>
+              <a:rPr lang="en-US" dirty="0"/>
+              <a:t/>
+            </a:r>
+            <a:endParaRPr lang="en-US" dirty="0"/>
+          </a:p>
+        </p:txBody>
+      </p:sp>
+      <p:sp>
+        <p:nvSpPr>
+          <p:cNvPr id="4" name="Slide Number Placeholder 3"/>
+          <p:cNvSpPr>
+            <a:spLocks noGrp="1"/>
+          </p:cNvSpPr>
+          <p:nvPr>
+            <p:ph type="sldNum" sz="quarter" idx="10"/>
+          </p:nvPr>
+        </p:nvSpPr>
+        <p:spPr/>
+        <p:txBody>
+          <a:bodyPr/>
+          <a:lstStyle/>
+          <a:p>
+            <a:fld id="{F7021451-1387-4CA6-816F-3879F97B5CBC}" type="slidenum">
+              <a:rPr lang="en-US"/>
+              <a:t>15</a:t>
+            </a:fld>
+            <a:endParaRPr lang="en-US"/>
+          </a:p>
+        </p:txBody>
+      </p:sp>
+    </p:spTree>
+    <p:extLst>
+      <p:ext uri="{BB962C8B-B14F-4D97-AF65-F5344CB8AC3E}">
+        <p14:creationId xmlns:p14="http://schemas.microsoft.com/office/powerpoint/2010/main" val="1024086991"/>
+      </p:ext>
+    </p:extLst>
+  </p:cSld>
+  <p:clrMapOvr>
+    <a:masterClrMapping/>
+  </p:clrMapOvr>
+</p:notes>
+</file>
+
+<file path=ppt/notesSlides/notesSlide16.xml><?xml version="1.0" encoding="utf-8"?>
+<p:notes xmlns:a="http://schemas.openxmlformats.org/drawingml/2006/main" xmlns:r="http://schemas.openxmlformats.org/officeDocument/2006/relationships" xmlns:p="http://schemas.openxmlformats.org/presentationml/2006/main">
+  <p:cSld>
+    <p:spTree>
+      <p:nvGrpSpPr>
+        <p:cNvPr id="1" name=""/>
+        <p:cNvGrpSpPr/>
+        <p:nvPr/>
+      </p:nvGrpSpPr>
+      <p:grpSpPr>
+        <a:xfrm>
+          <a:off x="0" y="0"/>
+          <a:ext cx="0" cy="0"/>
+          <a:chOff x="0" y="0"/>
+          <a:chExt cx="0" cy="0"/>
+        </a:xfrm>
+      </p:grpSpPr>
+      <p:sp>
+        <p:nvSpPr>
+          <p:cNvPr id="2" name="Slide Image Placeholder 1"/>
+          <p:cNvSpPr>
+            <a:spLocks noGrp="1" noRot="1" noChangeAspect="1"/>
+          </p:cNvSpPr>
+          <p:nvPr>
+            <p:ph type="sldImg"/>
+          </p:nvPr>
+        </p:nvSpPr>
+        <p:spPr/>
+      </p:sp>
+      <p:sp>
+        <p:nvSpPr>
+          <p:cNvPr id="3" name="Notes Placeholder 2"/>
+          <p:cNvSpPr>
+            <a:spLocks noGrp="1"/>
+          </p:cNvSpPr>
+          <p:nvPr>
+            <p:ph type="body" idx="1"/>
+          </p:nvPr>
+        </p:nvSpPr>
+        <p:spPr/>
+        <p:txBody>
+          <a:bodyPr/>
+          <a:lstStyle/>
+          <a:p>
+            <a:r>
+              <a:rPr lang="en-US" dirty="0"/>
+              <a:t/>
+            </a:r>
+            <a:endParaRPr lang="en-US" dirty="0"/>
+          </a:p>
+        </p:txBody>
+      </p:sp>
+      <p:sp>
+        <p:nvSpPr>
+          <p:cNvPr id="4" name="Slide Number Placeholder 3"/>
+          <p:cNvSpPr>
+            <a:spLocks noGrp="1"/>
+          </p:cNvSpPr>
+          <p:nvPr>
+            <p:ph type="sldNum" sz="quarter" idx="10"/>
+          </p:nvPr>
+        </p:nvSpPr>
+        <p:spPr/>
+        <p:txBody>
+          <a:bodyPr/>
+          <a:lstStyle/>
+          <a:p>
+            <a:fld id="{F7021451-1387-4CA6-816F-3879F97B5CBC}" type="slidenum">
+              <a:rPr lang="en-US"/>
+              <a:t>16</a:t>
+            </a:fld>
+            <a:endParaRPr lang="en-US"/>
+          </a:p>
+        </p:txBody>
+      </p:sp>
+    </p:spTree>
+    <p:extLst>
+      <p:ext uri="{BB962C8B-B14F-4D97-AF65-F5344CB8AC3E}">
+        <p14:creationId xmlns:p14="http://schemas.microsoft.com/office/powerpoint/2010/main" val="1024086991"/>
+      </p:ext>
+    </p:extLst>
+  </p:cSld>
+  <p:clrMapOvr>
+    <a:masterClrMapping/>
+  </p:clrMapOvr>
+</p:notes>
+</file>
+
+<file path=ppt/notesSlides/notesSlide17.xml><?xml version="1.0" encoding="utf-8"?>
+<p:notes xmlns:a="http://schemas.openxmlformats.org/drawingml/2006/main" xmlns:r="http://schemas.openxmlformats.org/officeDocument/2006/relationships" xmlns:p="http://schemas.openxmlformats.org/presentationml/2006/main">
+  <p:cSld>
+    <p:spTree>
+      <p:nvGrpSpPr>
+        <p:cNvPr id="1" name=""/>
+        <p:cNvGrpSpPr/>
+        <p:nvPr/>
+      </p:nvGrpSpPr>
+      <p:grpSpPr>
+        <a:xfrm>
+          <a:off x="0" y="0"/>
+          <a:ext cx="0" cy="0"/>
+          <a:chOff x="0" y="0"/>
+          <a:chExt cx="0" cy="0"/>
+        </a:xfrm>
+      </p:grpSpPr>
+      <p:sp>
+        <p:nvSpPr>
+          <p:cNvPr id="2" name="Slide Image Placeholder 1"/>
+          <p:cNvSpPr>
+            <a:spLocks noGrp="1" noRot="1" noChangeAspect="1"/>
+          </p:cNvSpPr>
+          <p:nvPr>
+            <p:ph type="sldImg"/>
+          </p:nvPr>
+        </p:nvSpPr>
+        <p:spPr/>
+      </p:sp>
+      <p:sp>
+        <p:nvSpPr>
+          <p:cNvPr id="3" name="Notes Placeholder 2"/>
+          <p:cNvSpPr>
+            <a:spLocks noGrp="1"/>
+          </p:cNvSpPr>
+          <p:nvPr>
+            <p:ph type="body" idx="1"/>
+          </p:nvPr>
+        </p:nvSpPr>
+        <p:spPr/>
+        <p:txBody>
+          <a:bodyPr/>
+          <a:lstStyle/>
+          <a:p>
+            <a:r>
+              <a:rPr lang="en-US" dirty="0"/>
+              <a:t/>
+            </a:r>
+            <a:endParaRPr lang="en-US" dirty="0"/>
+          </a:p>
+        </p:txBody>
+      </p:sp>
+      <p:sp>
+        <p:nvSpPr>
+          <p:cNvPr id="4" name="Slide Number Placeholder 3"/>
+          <p:cNvSpPr>
+            <a:spLocks noGrp="1"/>
+          </p:cNvSpPr>
+          <p:nvPr>
+            <p:ph type="sldNum" sz="quarter" idx="10"/>
+          </p:nvPr>
+        </p:nvSpPr>
+        <p:spPr/>
+        <p:txBody>
+          <a:bodyPr/>
+          <a:lstStyle/>
+          <a:p>
+            <a:fld id="{F7021451-1387-4CA6-816F-3879F97B5CBC}" type="slidenum">
+              <a:rPr lang="en-US"/>
+              <a:t>17</a:t>
             </a:fld>
             <a:endParaRPr lang="en-US"/>
           </a:p>
@@ -2100,102 +2545,6 @@
         </p:nvSpPr>
         <p:spPr>
           <a:xfrm>
-            <a:off x="406301" y="1574453"/>
-            <a:ext cx="8498026" cy="274290"/>
-          </a:xfrm>
-          <a:prstGeom prst="rect">
-            <a:avLst/>
-          </a:prstGeom>
-          <a:noFill/>
-          <a:ln/>
-        </p:spPr>
-        <p:txBody>
-          <a:bodyPr wrap="square" lIns="0" tIns="0" rIns="0" bIns="0" rtlCol="0" anchor="t"/>
-          <a:lstStyle/>
-          <a:p>
-            <a:pPr algn="l" indent="0" marL="0">
-              <a:lnSpc>
-                <a:spcPts val="2160"/>
-              </a:lnSpc>
-              <a:spcBef>
-                <a:spcPts val="600"/>
-              </a:spcBef>
-              <a:spcAft>
-                <a:spcPts val="800"/>
-              </a:spcAft>
-              <a:buNone/>
-            </a:pPr>
-            <a:r>
-              <a:rPr lang="en-US" sz="1800" b="1" dirty="0">
-                <a:solidFill>
-                  <a:srgbClr val="FE4447"/>
-                </a:solidFill>
-                <a:latin typeface="Georgia" pitchFamily="34" charset="0"/>
-                <a:ea typeface="Georgia" pitchFamily="34" charset="-122"/>
-                <a:cs typeface="Georgia" pitchFamily="34" charset="-120"/>
-              </a:rPr>
-              <a:t>Learning objective</a:t>
-            </a:r>
-            <a:endParaRPr lang="en-US" sz="1800" dirty="0"/>
-          </a:p>
-        </p:txBody>
-      </p:sp>
-      <p:sp>
-        <p:nvSpPr>
-          <p:cNvPr id="6" name="Text 4"/>
-          <p:cNvSpPr/>
-          <p:nvPr/>
-        </p:nvSpPr>
-        <p:spPr>
-          <a:xfrm>
-            <a:off x="406301" y="1988344"/>
-            <a:ext cx="8498026" cy="426541"/>
-          </a:xfrm>
-          <a:prstGeom prst="rect">
-            <a:avLst/>
-          </a:prstGeom>
-          <a:noFill/>
-          <a:ln/>
-        </p:spPr>
-        <p:txBody>
-          <a:bodyPr wrap="square" lIns="0" tIns="0" rIns="0" bIns="0" rtlCol="0" anchor="t"/>
-          <a:lstStyle/>
-          <a:p>
-            <a:pPr algn="l" indent="0" marL="0">
-              <a:lnSpc>
-                <a:spcPts val="1680"/>
-              </a:lnSpc>
-              <a:spcBef>
-                <a:spcPts val="300"/>
-              </a:spcBef>
-              <a:spcAft>
-                <a:spcPts val="300"/>
-              </a:spcAft>
-              <a:buNone/>
-            </a:pPr>
-            <a:r>
-              <a:rPr lang="en-US" sz="1200" dirty="0">
-                <a:solidFill>
-                  <a:srgbClr val="1C2833"/>
-                </a:solidFill>
-                <a:latin typeface="Arial" pitchFamily="34" charset="0"/>
-                <a:ea typeface="Arial" pitchFamily="34" charset="-122"/>
-                <a:cs typeface="Arial" pitchFamily="34" charset="-120"/>
-              </a:rPr>
-              <a:t>By the end of this lesson, students will name and demonstrate the 12 poses of Sūrya Namaskāra in order, performed slowly without breath co-ordination yet.</a:t>
-            </a:r>
-            <a:endParaRPr lang="en-US" sz="1200" dirty="0"/>
-          </a:p>
-        </p:txBody>
-      </p:sp>
-      <p:sp>
-        <p:nvSpPr>
-          <p:cNvPr id="7" name="Text 5"/>
-          <p:cNvSpPr/>
-          <p:nvPr/>
-        </p:nvSpPr>
-        <p:spPr>
-          <a:xfrm>
             <a:off x="406301" y="4434929"/>
             <a:ext cx="8498026" cy="213271"/>
           </a:xfrm>
@@ -2340,7 +2689,7 @@
                 <a:ea typeface="Georgia" pitchFamily="34" charset="-122"/>
                 <a:cs typeface="Georgia" pitchFamily="34" charset="-120"/>
               </a:rPr>
-              <a:t>Differentiation</a:t>
+              <a:t>Practice (30 min) — Walk through all 12 poses (cont.)</a:t>
             </a:r>
             <a:endParaRPr lang="en-US" sz="1800" dirty="0"/>
           </a:p>
@@ -2386,7 +2735,7 @@
                 <a:ea typeface="Arial" pitchFamily="34" charset="-122"/>
                 <a:cs typeface="Arial" pitchFamily="34" charset="-120"/>
               </a:rPr>
-              <a:t>Tier up:</a:t>
+              <a:t>Hasta-uttānāsana</a:t>
             </a:r>
             <a:pPr algn="l" indent="0" marL="0">
               <a:lnSpc>
@@ -2406,7 +2755,7 @@
                 <a:ea typeface="Arial" pitchFamily="34" charset="-122"/>
                 <a:cs typeface="Arial" pitchFamily="34" charset="-120"/>
               </a:rPr>
-              <a:t> Attempt 2 rounds (alternating leg) at home.</a:t>
+              <a:t> — rise, sweep arms overhead.</a:t>
             </a:r>
             <a:endParaRPr lang="en-US" sz="1200" dirty="0"/>
           </a:p>
@@ -2430,7 +2779,7 @@
                 <a:ea typeface="Arial" pitchFamily="34" charset="-122"/>
                 <a:cs typeface="Arial" pitchFamily="34" charset="-120"/>
               </a:rPr>
-              <a:t>Tier down:</a:t>
+              <a:t>Praṇāmāsana</a:t>
             </a:r>
             <a:pPr algn="l" indent="0" marL="0">
               <a:lnSpc>
@@ -2450,7 +2799,7 @@
                 <a:ea typeface="Arial" pitchFamily="34" charset="-122"/>
                 <a:cs typeface="Arial" pitchFamily="34" charset="-120"/>
               </a:rPr>
-              <a:t> Practise only the first 6 poses today; complete the rest tomorrow.</a:t>
+              <a:t> — palms together at heart centre. Pause.</a:t>
             </a:r>
             <a:endParaRPr lang="en-US" sz="1200" dirty="0"/>
           </a:p>
@@ -2459,6 +2808,99 @@
       <p:sp>
         <p:nvSpPr>
           <p:cNvPr id="5" name="Text 3"/>
+          <p:cNvSpPr/>
+          <p:nvPr/>
+        </p:nvSpPr>
+        <p:spPr>
+          <a:xfrm>
+            <a:off x="406301" y="1498104"/>
+            <a:ext cx="8498026" cy="213271"/>
+          </a:xfrm>
+          <a:prstGeom prst="rect">
+            <a:avLst/>
+          </a:prstGeom>
+          <a:noFill/>
+          <a:ln/>
+        </p:spPr>
+        <p:txBody>
+          <a:bodyPr wrap="square" lIns="0" tIns="0" rIns="0" bIns="0" rtlCol="0" anchor="t"/>
+          <a:lstStyle/>
+          <a:p>
+            <a:pPr algn="l" indent="0" marL="0">
+              <a:lnSpc>
+                <a:spcPts val="1680"/>
+              </a:lnSpc>
+              <a:spcBef>
+                <a:spcPts val="300"/>
+              </a:spcBef>
+              <a:spcAft>
+                <a:spcPts val="300"/>
+              </a:spcAft>
+              <a:buNone/>
+            </a:pPr>
+            <a:r>
+              <a:rPr lang="en-US" sz="1200" i="1" dirty="0">
+                <a:solidFill>
+                  <a:srgbClr val="1C2833"/>
+                </a:solidFill>
+                <a:latin typeface="Arial" pitchFamily="34" charset="0"/>
+                <a:ea typeface="Arial" pitchFamily="34" charset="-122"/>
+                <a:cs typeface="Arial" pitchFamily="34" charset="-120"/>
+              </a:rPr>
+              <a:t>Note: the legs alternate across rounds. Round 1 uses right leg back first; Round 2 uses left.</a:t>
+            </a:r>
+            <a:endParaRPr lang="en-US" sz="1200" dirty="0"/>
+          </a:p>
+        </p:txBody>
+      </p:sp>
+      <p:sp>
+        <p:nvSpPr>
+          <p:cNvPr id="6" name="Text 4"/>
+          <p:cNvSpPr/>
+          <p:nvPr/>
+        </p:nvSpPr>
+        <p:spPr>
+          <a:xfrm>
+            <a:off x="406301" y="1825675"/>
+            <a:ext cx="8498026" cy="209550"/>
+          </a:xfrm>
+          <a:prstGeom prst="rect">
+            <a:avLst/>
+          </a:prstGeom>
+          <a:noFill/>
+          <a:ln/>
+        </p:spPr>
+        <p:txBody>
+          <a:bodyPr wrap="square" lIns="0" tIns="0" rIns="0" bIns="0" rtlCol="0" anchor="t"/>
+          <a:lstStyle/>
+          <a:p>
+            <a:pPr algn="l" indent="0" marL="0">
+              <a:spcBef>
+                <a:spcPts val="600"/>
+              </a:spcBef>
+              <a:spcAft>
+                <a:spcPts val="400"/>
+              </a:spcAft>
+              <a:buNone/>
+            </a:pPr>
+            <a:r>
+              <a:rPr lang="en-US" sz="1400" b="1" dirty="0">
+                <a:solidFill>
+                  <a:srgbClr val="1C2833"/>
+                </a:solidFill>
+                <a:latin typeface="Arial" pitchFamily="34" charset="0"/>
+                <a:ea typeface="Arial" pitchFamily="34" charset="-122"/>
+                <a:cs typeface="Arial" pitchFamily="34" charset="-120"/>
+              </a:rPr>
+              <a:t>Teaching sequence</a:t>
+            </a:r>
+            <a:endParaRPr lang="en-US" sz="1400" dirty="0"/>
+          </a:p>
+        </p:txBody>
+      </p:sp>
+      <p:sp>
+        <p:nvSpPr>
+          <p:cNvPr id="7" name="Text 5"/>
           <p:cNvSpPr/>
           <p:nvPr/>
         </p:nvSpPr>
@@ -2608,7 +3050,7 @@
                 <a:ea typeface="Georgia" pitchFamily="34" charset="-122"/>
                 <a:cs typeface="Georgia" pitchFamily="34" charset="-120"/>
               </a:rPr>
-              <a:t>Teacher notes</a:t>
+              <a:t>Practice (30 min) — Walk through all 12 poses (cont.)</a:t>
             </a:r>
             <a:endParaRPr lang="en-US" sz="1800" dirty="0"/>
           </a:p>
@@ -2622,8 +3064,8 @@
         </p:nvSpPr>
         <p:spPr>
           <a:xfrm>
-            <a:off x="406301" y="870942"/>
-            <a:ext cx="8498026" cy="853083"/>
+            <a:off x="634901" y="883593"/>
+            <a:ext cx="8102798" cy="1013222"/>
           </a:xfrm>
           <a:prstGeom prst="rect">
             <a:avLst/>
@@ -2635,17 +3077,15 @@
           <a:bodyPr wrap="square" lIns="0" tIns="0" rIns="0" bIns="0" rtlCol="0" anchor="t"/>
           <a:lstStyle/>
           <a:p>
-            <a:pPr algn="l" indent="0" marL="0">
-              <a:lnSpc>
-                <a:spcPts val="1680"/>
-              </a:lnSpc>
-              <a:spcBef>
-                <a:spcPts val="300"/>
-              </a:spcBef>
-              <a:spcAft>
-                <a:spcPts val="300"/>
-              </a:spcAft>
-              <a:buNone/>
+            <a:pPr algn="l" marL="342900" indent="-342900">
+              <a:lnSpc>
+                <a:spcPts val="1620"/>
+              </a:lnSpc>
+              <a:spcAft>
+                <a:spcPts val="300"/>
+              </a:spcAft>
+              <a:buSzPct val="100000"/>
+              <a:buChar char="•"/>
             </a:pPr>
             <a:r>
               <a:rPr lang="en-US" sz="1200" dirty="0">
@@ -2656,42 +3096,20 @@
                 <a:ea typeface="Arial" pitchFamily="34" charset="-122"/>
                 <a:cs typeface="Arial" pitchFamily="34" charset="-120"/>
               </a:rPr>
-              <a:t>– The hardest pose for beginners is usually #6 (</a:t>
-            </a:r>
-            <a:pPr algn="l" indent="0" marL="0">
-              <a:lnSpc>
-                <a:spcPts val="1680"/>
-              </a:lnSpc>
-              <a:spcBef>
-                <a:spcPts val="300"/>
-              </a:spcBef>
-              <a:spcAft>
-                <a:spcPts val="300"/>
-              </a:spcAft>
-              <a:buNone/>
-            </a:pPr>
-            <a:r>
-              <a:rPr lang="en-US" sz="1200" i="1" dirty="0">
-                <a:solidFill>
-                  <a:srgbClr val="1C2833"/>
-                </a:solidFill>
-                <a:latin typeface="Arial" pitchFamily="34" charset="0"/>
-                <a:ea typeface="Arial" pitchFamily="34" charset="-122"/>
-                <a:cs typeface="Arial" pitchFamily="34" charset="-120"/>
-              </a:rPr>
-              <a:t>aṣṭāṅga-namaskāra</a:t>
-            </a:r>
-            <a:pPr algn="l" indent="0" marL="0">
-              <a:lnSpc>
-                <a:spcPts val="1680"/>
-              </a:lnSpc>
-              <a:spcBef>
-                <a:spcPts val="300"/>
-              </a:spcBef>
-              <a:spcAft>
-                <a:spcPts val="300"/>
-              </a:spcAft>
-              <a:buNone/>
+              <a:t>Teacher demonstrates the full round once slowly, naming each pose (5 min).</a:t>
+            </a:r>
+            <a:endParaRPr lang="en-US" sz="1200" dirty="0"/>
+          </a:p>
+          <a:p>
+            <a:pPr algn="l" marL="342900" indent="-342900">
+              <a:lnSpc>
+                <a:spcPts val="1620"/>
+              </a:lnSpc>
+              <a:spcAft>
+                <a:spcPts val="300"/>
+              </a:spcAft>
+              <a:buSzPct val="100000"/>
+              <a:buChar char="•"/>
             </a:pPr>
             <a:r>
               <a:rPr lang="en-US" sz="1200" dirty="0">
@@ -2702,42 +3120,20 @@
                 <a:ea typeface="Arial" pitchFamily="34" charset="-122"/>
                 <a:cs typeface="Arial" pitchFamily="34" charset="-120"/>
               </a:rPr>
-              <a:t> — knees, chest, chin to mat). Common error: chest plank-down instead of dropping knees first. Cue "knees down FIRST, then chest, then chin." – In </a:t>
-            </a:r>
-            <a:pPr algn="l" indent="0" marL="0">
-              <a:lnSpc>
-                <a:spcPts val="1680"/>
-              </a:lnSpc>
-              <a:spcBef>
-                <a:spcPts val="300"/>
-              </a:spcBef>
-              <a:spcAft>
-                <a:spcPts val="300"/>
-              </a:spcAft>
-              <a:buNone/>
-            </a:pPr>
-            <a:r>
-              <a:rPr lang="en-US" sz="1200" i="1" dirty="0">
-                <a:solidFill>
-                  <a:srgbClr val="1C2833"/>
-                </a:solidFill>
-                <a:latin typeface="Arial" pitchFamily="34" charset="0"/>
-                <a:ea typeface="Arial" pitchFamily="34" charset="-122"/>
-                <a:cs typeface="Arial" pitchFamily="34" charset="-120"/>
-              </a:rPr>
-              <a:t>bhujaṅgāsana</a:t>
-            </a:r>
-            <a:pPr algn="l" indent="0" marL="0">
-              <a:lnSpc>
-                <a:spcPts val="1680"/>
-              </a:lnSpc>
-              <a:spcBef>
-                <a:spcPts val="300"/>
-              </a:spcBef>
-              <a:spcAft>
-                <a:spcPts val="300"/>
-              </a:spcAft>
-              <a:buNone/>
+              <a:t>Class practises pose-by-pose, holding each for 5 seconds, with teacher walking around (15 min).</a:t>
+            </a:r>
+            <a:endParaRPr lang="en-US" sz="1200" dirty="0"/>
+          </a:p>
+          <a:p>
+            <a:pPr algn="l" marL="342900" indent="-342900">
+              <a:lnSpc>
+                <a:spcPts val="1620"/>
+              </a:lnSpc>
+              <a:spcAft>
+                <a:spcPts val="300"/>
+              </a:spcAft>
+              <a:buSzPct val="100000"/>
+              <a:buChar char="•"/>
             </a:pPr>
             <a:r>
               <a:rPr lang="en-US" sz="1200" dirty="0">
@@ -2748,42 +3144,20 @@
                 <a:ea typeface="Arial" pitchFamily="34" charset="-122"/>
                 <a:cs typeface="Arial" pitchFamily="34" charset="-120"/>
               </a:rPr>
-              <a:t>, keep the elbows bent and close to the body. Don't push to full backbend. – For students with wrist issues, modify </a:t>
-            </a:r>
-            <a:pPr algn="l" indent="0" marL="0">
-              <a:lnSpc>
-                <a:spcPts val="1680"/>
-              </a:lnSpc>
-              <a:spcBef>
-                <a:spcPts val="300"/>
-              </a:spcBef>
-              <a:spcAft>
-                <a:spcPts val="300"/>
-              </a:spcAft>
-              <a:buNone/>
-            </a:pPr>
-            <a:r>
-              <a:rPr lang="en-US" sz="1200" i="1" dirty="0">
-                <a:solidFill>
-                  <a:srgbClr val="1C2833"/>
-                </a:solidFill>
-                <a:latin typeface="Arial" pitchFamily="34" charset="0"/>
-                <a:ea typeface="Arial" pitchFamily="34" charset="-122"/>
-                <a:cs typeface="Arial" pitchFamily="34" charset="-120"/>
-              </a:rPr>
-              <a:t>adho-mukha-śvānāsana</a:t>
-            </a:r>
-            <a:pPr algn="l" indent="0" marL="0">
-              <a:lnSpc>
-                <a:spcPts val="1680"/>
-              </a:lnSpc>
-              <a:spcBef>
-                <a:spcPts val="300"/>
-              </a:spcBef>
-              <a:spcAft>
-                <a:spcPts val="300"/>
-              </a:spcAft>
-              <a:buNone/>
+              <a:t>Class attempts one full round together at slow pace, teacher calling each pose (5 min).</a:t>
+            </a:r>
+            <a:endParaRPr lang="en-US" sz="1200" dirty="0"/>
+          </a:p>
+          <a:p>
+            <a:pPr algn="l" marL="342900" indent="-342900">
+              <a:lnSpc>
+                <a:spcPts val="1620"/>
+              </a:lnSpc>
+              <a:spcAft>
+                <a:spcPts val="300"/>
+              </a:spcAft>
+              <a:buSzPct val="100000"/>
+              <a:buChar char="•"/>
             </a:pPr>
             <a:r>
               <a:rPr lang="en-US" sz="1200" dirty="0">
@@ -2794,7 +3168,7 @@
                 <a:ea typeface="Arial" pitchFamily="34" charset="-122"/>
                 <a:cs typeface="Arial" pitchFamily="34" charset="-120"/>
               </a:rPr>
-              <a:t> by going to forearms (dolphin pose) or skipping.</a:t>
+              <a:t>One more attempt, slightly faster (5 min).</a:t>
             </a:r>
             <a:endParaRPr lang="en-US" sz="1200" dirty="0"/>
           </a:p>
@@ -2952,7 +3326,7 @@
                 <a:ea typeface="Georgia" pitchFamily="34" charset="-122"/>
                 <a:cs typeface="Georgia" pitchFamily="34" charset="-120"/>
               </a:rPr>
-              <a:t>Citation(s) used in this lesson</a:t>
+              <a:t>Wrap-up (3 min)</a:t>
             </a:r>
             <a:endParaRPr lang="en-US" sz="1800" dirty="0"/>
           </a:p>
@@ -2966,8 +3340,8 @@
         </p:nvSpPr>
         <p:spPr>
           <a:xfrm>
-            <a:off x="406301" y="870942"/>
-            <a:ext cx="8498026" cy="426541"/>
+            <a:off x="634901" y="883593"/>
+            <a:ext cx="8102798" cy="731341"/>
           </a:xfrm>
           <a:prstGeom prst="rect">
             <a:avLst/>
@@ -2979,6 +3353,96 @@
           <a:bodyPr wrap="square" lIns="0" tIns="0" rIns="0" bIns="0" rtlCol="0" anchor="t"/>
           <a:lstStyle/>
           <a:p>
+            <a:pPr algn="l" marL="342900" indent="-342900">
+              <a:lnSpc>
+                <a:spcPts val="1620"/>
+              </a:lnSpc>
+              <a:spcAft>
+                <a:spcPts val="300"/>
+              </a:spcAft>
+              <a:buSzPct val="100000"/>
+              <a:buChar char="•"/>
+            </a:pPr>
+            <a:r>
+              <a:rPr lang="en-US" sz="1200" dirty="0">
+                <a:solidFill>
+                  <a:srgbClr val="1C2833"/>
+                </a:solidFill>
+                <a:latin typeface="Arial" pitchFamily="34" charset="0"/>
+                <a:ea typeface="Arial" pitchFamily="34" charset="-122"/>
+                <a:cs typeface="Arial" pitchFamily="34" charset="-120"/>
+              </a:rPr>
+              <a:t>Quick recap: students chorus the 12 pose names in order (with teacher prompting).</a:t>
+            </a:r>
+            <a:endParaRPr lang="en-US" sz="1200" dirty="0"/>
+          </a:p>
+          <a:p>
+            <a:pPr algn="l" marL="342900" indent="-342900">
+              <a:lnSpc>
+                <a:spcPts val="1620"/>
+              </a:lnSpc>
+              <a:spcAft>
+                <a:spcPts val="300"/>
+              </a:spcAft>
+              <a:buSzPct val="100000"/>
+              <a:buChar char="•"/>
+            </a:pPr>
+            <a:r>
+              <a:rPr lang="en-US" sz="1200" dirty="0">
+                <a:solidFill>
+                  <a:srgbClr val="1C2833"/>
+                </a:solidFill>
+                <a:latin typeface="Arial" pitchFamily="34" charset="0"/>
+                <a:ea typeface="Arial" pitchFamily="34" charset="-122"/>
+                <a:cs typeface="Arial" pitchFamily="34" charset="-120"/>
+              </a:rPr>
+              <a:t>Preview Day 5: </a:t>
+            </a:r>
+            <a:pPr algn="l" indent="0" marL="0">
+              <a:lnSpc>
+                <a:spcPts val="1620"/>
+              </a:lnSpc>
+              <a:spcAft>
+                <a:spcPts val="300"/>
+              </a:spcAft>
+              <a:buNone/>
+            </a:pPr>
+            <a:r>
+              <a:rPr lang="en-US" sz="1200" i="1" dirty="0">
+                <a:solidFill>
+                  <a:srgbClr val="1C2833"/>
+                </a:solidFill>
+                <a:latin typeface="Arial" pitchFamily="34" charset="0"/>
+                <a:ea typeface="Arial" pitchFamily="34" charset="-122"/>
+                <a:cs typeface="Arial" pitchFamily="34" charset="-120"/>
+              </a:rPr>
+              <a:t>"Tomorrow we add the breath — each pose has an inhale or exhale assigned. That's where it becomes a real flow."</a:t>
+            </a:r>
+            <a:endParaRPr lang="en-US" sz="1200" dirty="0"/>
+          </a:p>
+        </p:txBody>
+      </p:sp>
+      <p:sp>
+        <p:nvSpPr>
+          <p:cNvPr id="5" name="Text 3"/>
+          <p:cNvSpPr/>
+          <p:nvPr/>
+        </p:nvSpPr>
+        <p:spPr>
+          <a:xfrm>
+            <a:off x="406301" y="4434929"/>
+            <a:ext cx="8498026" cy="213271"/>
+          </a:xfrm>
+          <a:prstGeom prst="rect">
+            <a:avLst/>
+          </a:prstGeom>
+          <a:noFill/>
+          <a:ln/>
+        </p:spPr>
+        <p:txBody>
+          <a:bodyPr wrap="square" lIns="0" tIns="0" rIns="0" bIns="0" rtlCol="0" anchor="t"/>
+          <a:lstStyle/>
+          <a:p>
             <a:pPr algn="l" indent="0" marL="0">
               <a:lnSpc>
                 <a:spcPts val="1680"/>
@@ -3000,7 +3464,1962 @@
                 <a:ea typeface="Arial" pitchFamily="34" charset="-122"/>
                 <a:cs typeface="Arial" pitchFamily="34" charset="-120"/>
               </a:rPr>
-              <a:t>– No new RAG citations today. Sūrya Namaskāra is a modern composition (early 20th century, codified by the Raja of Aundh); not from classical texts. Teacher reference: any modern yoga manual.</a:t>
+              <a:t>Middle ·  · IKS Curriculum</a:t>
+            </a:r>
+            <a:endParaRPr lang="en-US" sz="1200" dirty="0"/>
+          </a:p>
+        </p:txBody>
+      </p:sp>
+    </p:spTree>
+  </p:cSld>
+  <p:clrMapOvr>
+    <a:masterClrMapping/>
+  </p:clrMapOvr>
+</p:sld>
+</file>
+
+<file path=ppt/slides/slide13.xml><?xml version="1.0" encoding="utf-8"?>
+<p:sld xmlns:a="http://schemas.openxmlformats.org/drawingml/2006/main" xmlns:r="http://schemas.openxmlformats.org/officeDocument/2006/relationships" xmlns:p="http://schemas.openxmlformats.org/presentationml/2006/main">
+  <p:cSld name="Slide 13">
+    <p:bg>
+      <p:bgPr>
+        <a:solidFill>
+          <a:srgbClr val="FFFFFF"/>
+        </a:solidFill>
+      </p:bgPr>
+    </p:bg>
+    <p:spTree>
+      <p:nvGrpSpPr>
+        <p:cNvPr id="1" name=""/>
+        <p:cNvGrpSpPr/>
+        <p:nvPr/>
+      </p:nvGrpSpPr>
+      <p:grpSpPr>
+        <a:xfrm>
+          <a:off x="0" y="0"/>
+          <a:ext cx="0" cy="0"/>
+          <a:chOff x="0" y="0"/>
+          <a:chExt cx="0" cy="0"/>
+        </a:xfrm>
+      </p:grpSpPr>
+      <p:sp>
+        <p:nvSpPr>
+          <p:cNvPr id="2" name="Text 0"/>
+          <p:cNvSpPr/>
+          <p:nvPr/>
+        </p:nvSpPr>
+        <p:spPr>
+          <a:xfrm>
+            <a:off x="0" y="0"/>
+            <a:ext cx="9144000" cy="101501"/>
+          </a:xfrm>
+          <a:prstGeom prst="rect">
+            <a:avLst/>
+          </a:prstGeom>
+          <a:solidFill>
+            <a:srgbClr val="277884"/>
+          </a:solidFill>
+          <a:ln/>
+        </p:spPr>
+        <p:txBody>
+          <a:bodyPr wrap="square" rtlCol="0" anchor="ctr"/>
+          <a:lstStyle/>
+          <a:p>
+            <a:pPr indent="0" marL="0">
+              <a:buNone/>
+            </a:pPr>
+            <a:endParaRPr lang="en-US" dirty="0"/>
+          </a:p>
+        </p:txBody>
+      </p:sp>
+      <p:sp>
+        <p:nvSpPr>
+          <p:cNvPr id="3" name="Text 1"/>
+          <p:cNvSpPr/>
+          <p:nvPr/>
+        </p:nvSpPr>
+        <p:spPr>
+          <a:xfrm>
+            <a:off x="406301" y="457051"/>
+            <a:ext cx="8498026" cy="274290"/>
+          </a:xfrm>
+          <a:prstGeom prst="rect">
+            <a:avLst/>
+          </a:prstGeom>
+          <a:noFill/>
+          <a:ln/>
+        </p:spPr>
+        <p:txBody>
+          <a:bodyPr wrap="square" lIns="0" tIns="0" rIns="0" bIns="0" rtlCol="0" anchor="t"/>
+          <a:lstStyle/>
+          <a:p>
+            <a:pPr algn="l" indent="0" marL="0">
+              <a:lnSpc>
+                <a:spcPts val="2160"/>
+              </a:lnSpc>
+              <a:spcBef>
+                <a:spcPts val="600"/>
+              </a:spcBef>
+              <a:spcAft>
+                <a:spcPts val="800"/>
+              </a:spcAft>
+              <a:buNone/>
+            </a:pPr>
+            <a:r>
+              <a:rPr lang="en-US" sz="1800" b="1" dirty="0">
+                <a:solidFill>
+                  <a:srgbClr val="FE4447"/>
+                </a:solidFill>
+                <a:latin typeface="Georgia" pitchFamily="34" charset="0"/>
+                <a:ea typeface="Georgia" pitchFamily="34" charset="-122"/>
+                <a:cs typeface="Georgia" pitchFamily="34" charset="-120"/>
+              </a:rPr>
+              <a:t>Student-facing content</a:t>
+            </a:r>
+            <a:endParaRPr lang="en-US" sz="1800" dirty="0"/>
+          </a:p>
+        </p:txBody>
+      </p:sp>
+      <p:sp>
+        <p:nvSpPr>
+          <p:cNvPr id="4" name="Text 2"/>
+          <p:cNvSpPr/>
+          <p:nvPr/>
+        </p:nvSpPr>
+        <p:spPr>
+          <a:xfrm>
+            <a:off x="406301" y="883593"/>
+            <a:ext cx="8331398" cy="2343150"/>
+          </a:xfrm>
+          <a:prstGeom prst="rect">
+            <a:avLst/>
+          </a:prstGeom>
+          <a:solidFill>
+            <a:srgbClr val="F4F8F9"/>
+          </a:solidFill>
+          <a:ln/>
+        </p:spPr>
+        <p:txBody>
+          <a:bodyPr wrap="square" rtlCol="0" anchor="ctr"/>
+          <a:lstStyle/>
+          <a:p>
+            <a:pPr indent="0" marL="0">
+              <a:buNone/>
+            </a:pPr>
+            <a:endParaRPr lang="en-US" dirty="0"/>
+          </a:p>
+        </p:txBody>
+      </p:sp>
+      <p:sp>
+        <p:nvSpPr>
+          <p:cNvPr id="5" name="Shape 3"/>
+          <p:cNvSpPr/>
+          <p:nvPr/>
+        </p:nvSpPr>
+        <p:spPr>
+          <a:xfrm>
+            <a:off x="434876" y="883593"/>
+            <a:ext cx="0" cy="2343150"/>
+          </a:xfrm>
+          <a:prstGeom prst="line">
+            <a:avLst/>
+          </a:prstGeom>
+          <a:noFill/>
+          <a:ln w="57150">
+            <a:solidFill>
+              <a:srgbClr val="FE4447"/>
+            </a:solidFill>
+            <a:prstDash val="solid"/>
+          </a:ln>
+        </p:spPr>
+      </p:sp>
+      <p:sp>
+        <p:nvSpPr>
+          <p:cNvPr id="6" name="Text 4"/>
+          <p:cNvSpPr/>
+          <p:nvPr/>
+        </p:nvSpPr>
+        <p:spPr>
+          <a:xfrm>
+            <a:off x="692051" y="1074093"/>
+            <a:ext cx="7973389" cy="230981"/>
+          </a:xfrm>
+          <a:prstGeom prst="rect">
+            <a:avLst/>
+          </a:prstGeom>
+          <a:noFill/>
+          <a:ln/>
+        </p:spPr>
+        <p:txBody>
+          <a:bodyPr wrap="square" lIns="0" tIns="0" rIns="0" bIns="0" rtlCol="0" anchor="t"/>
+          <a:lstStyle/>
+          <a:p>
+            <a:pPr algn="l" indent="0" marL="0">
+              <a:lnSpc>
+                <a:spcPts val="1820"/>
+              </a:lnSpc>
+              <a:spcBef>
+                <a:spcPts val="300"/>
+              </a:spcBef>
+              <a:spcAft>
+                <a:spcPts val="300"/>
+              </a:spcAft>
+              <a:buNone/>
+            </a:pPr>
+            <a:r>
+              <a:rPr lang="en-US" sz="1300" b="1" i="1" dirty="0">
+                <a:solidFill>
+                  <a:srgbClr val="1C2833"/>
+                </a:solidFill>
+                <a:latin typeface="Georgia" pitchFamily="34" charset="0"/>
+                <a:ea typeface="Georgia" pitchFamily="34" charset="-122"/>
+                <a:cs typeface="Georgia" pitchFamily="34" charset="-120"/>
+              </a:rPr>
+              <a:t>Sūrya Namaskāra — the 12 Poses</a:t>
+            </a:r>
+            <a:endParaRPr lang="en-US" sz="1300" dirty="0"/>
+          </a:p>
+        </p:txBody>
+      </p:sp>
+      <p:sp>
+        <p:nvSpPr>
+          <p:cNvPr id="7" name="Text 5"/>
+          <p:cNvSpPr/>
+          <p:nvPr/>
+        </p:nvSpPr>
+        <p:spPr>
+          <a:xfrm>
+            <a:off x="692051" y="1343174"/>
+            <a:ext cx="7973389" cy="230981"/>
+          </a:xfrm>
+          <a:prstGeom prst="rect">
+            <a:avLst/>
+          </a:prstGeom>
+          <a:noFill/>
+          <a:ln/>
+        </p:spPr>
+        <p:txBody>
+          <a:bodyPr wrap="square" lIns="0" tIns="0" rIns="0" bIns="0" rtlCol="0" anchor="t"/>
+          <a:lstStyle/>
+          <a:p>
+            <a:pPr algn="l" indent="0" marL="0">
+              <a:lnSpc>
+                <a:spcPts val="1820"/>
+              </a:lnSpc>
+              <a:spcBef>
+                <a:spcPts val="300"/>
+              </a:spcBef>
+              <a:spcAft>
+                <a:spcPts val="300"/>
+              </a:spcAft>
+              <a:buNone/>
+            </a:pPr>
+            <a:r>
+              <a:rPr lang="en-US" sz="1300" i="1" dirty="0">
+                <a:solidFill>
+                  <a:srgbClr val="1C2833"/>
+                </a:solidFill>
+                <a:latin typeface="Georgia" pitchFamily="34" charset="0"/>
+                <a:ea typeface="Georgia" pitchFamily="34" charset="-122"/>
+                <a:cs typeface="Georgia" pitchFamily="34" charset="-120"/>
+              </a:rPr>
+              <a:t>Memorise the order. We'll add the breath tomorrow.</a:t>
+            </a:r>
+            <a:endParaRPr lang="en-US" sz="1300" dirty="0"/>
+          </a:p>
+        </p:txBody>
+      </p:sp>
+      <p:sp>
+        <p:nvSpPr>
+          <p:cNvPr id="8" name="Text 6"/>
+          <p:cNvSpPr/>
+          <p:nvPr/>
+        </p:nvSpPr>
+        <p:spPr>
+          <a:xfrm>
+            <a:off x="692051" y="1612255"/>
+            <a:ext cx="7973389" cy="1154906"/>
+          </a:xfrm>
+          <a:prstGeom prst="rect">
+            <a:avLst/>
+          </a:prstGeom>
+          <a:noFill/>
+          <a:ln/>
+        </p:spPr>
+        <p:txBody>
+          <a:bodyPr wrap="square" lIns="0" tIns="0" rIns="0" bIns="0" rtlCol="0" anchor="t"/>
+          <a:lstStyle/>
+          <a:p>
+            <a:pPr algn="l" indent="0" marL="0">
+              <a:lnSpc>
+                <a:spcPts val="1820"/>
+              </a:lnSpc>
+              <a:spcBef>
+                <a:spcPts val="300"/>
+              </a:spcBef>
+              <a:spcAft>
+                <a:spcPts val="300"/>
+              </a:spcAft>
+              <a:buNone/>
+            </a:pPr>
+            <a:r>
+              <a:rPr lang="en-US" sz="1300" dirty="0">
+                <a:solidFill>
+                  <a:srgbClr val="1C2833"/>
+                </a:solidFill>
+                <a:latin typeface="Georgia" pitchFamily="34" charset="0"/>
+                <a:ea typeface="Georgia" pitchFamily="34" charset="-122"/>
+                <a:cs typeface="Georgia" pitchFamily="34" charset="-120"/>
+              </a:rPr>
+              <a:t>| # | Sanskrit | English | |---|----------|---------| | 1 | </a:t>
+            </a:r>
+            <a:pPr algn="l" indent="0" marL="0">
+              <a:lnSpc>
+                <a:spcPts val="1820"/>
+              </a:lnSpc>
+              <a:spcBef>
+                <a:spcPts val="300"/>
+              </a:spcBef>
+              <a:spcAft>
+                <a:spcPts val="300"/>
+              </a:spcAft>
+              <a:buNone/>
+            </a:pPr>
+            <a:r>
+              <a:rPr lang="en-US" sz="1300" i="1" dirty="0">
+                <a:solidFill>
+                  <a:srgbClr val="1C2833"/>
+                </a:solidFill>
+                <a:latin typeface="Georgia" pitchFamily="34" charset="0"/>
+                <a:ea typeface="Georgia" pitchFamily="34" charset="-122"/>
+                <a:cs typeface="Georgia" pitchFamily="34" charset="-120"/>
+              </a:rPr>
+              <a:t>praṇāmāsana</a:t>
+            </a:r>
+            <a:pPr algn="l" indent="0" marL="0">
+              <a:lnSpc>
+                <a:spcPts val="1820"/>
+              </a:lnSpc>
+              <a:spcBef>
+                <a:spcPts val="300"/>
+              </a:spcBef>
+              <a:spcAft>
+                <a:spcPts val="300"/>
+              </a:spcAft>
+              <a:buNone/>
+            </a:pPr>
+            <a:r>
+              <a:rPr lang="en-US" sz="1300" dirty="0">
+                <a:solidFill>
+                  <a:srgbClr val="1C2833"/>
+                </a:solidFill>
+                <a:latin typeface="Georgia" pitchFamily="34" charset="0"/>
+                <a:ea typeface="Georgia" pitchFamily="34" charset="-122"/>
+                <a:cs typeface="Georgia" pitchFamily="34" charset="-120"/>
+              </a:rPr>
+              <a:t> | prayer | | 2 | </a:t>
+            </a:r>
+            <a:pPr algn="l" indent="0" marL="0">
+              <a:lnSpc>
+                <a:spcPts val="1820"/>
+              </a:lnSpc>
+              <a:spcBef>
+                <a:spcPts val="300"/>
+              </a:spcBef>
+              <a:spcAft>
+                <a:spcPts val="300"/>
+              </a:spcAft>
+              <a:buNone/>
+            </a:pPr>
+            <a:r>
+              <a:rPr lang="en-US" sz="1300" i="1" dirty="0">
+                <a:solidFill>
+                  <a:srgbClr val="1C2833"/>
+                </a:solidFill>
+                <a:latin typeface="Georgia" pitchFamily="34" charset="0"/>
+                <a:ea typeface="Georgia" pitchFamily="34" charset="-122"/>
+                <a:cs typeface="Georgia" pitchFamily="34" charset="-120"/>
+              </a:rPr>
+              <a:t>hasta-uttānāsana</a:t>
+            </a:r>
+            <a:pPr algn="l" indent="0" marL="0">
+              <a:lnSpc>
+                <a:spcPts val="1820"/>
+              </a:lnSpc>
+              <a:spcBef>
+                <a:spcPts val="300"/>
+              </a:spcBef>
+              <a:spcAft>
+                <a:spcPts val="300"/>
+              </a:spcAft>
+              <a:buNone/>
+            </a:pPr>
+            <a:r>
+              <a:rPr lang="en-US" sz="1300" dirty="0">
+                <a:solidFill>
+                  <a:srgbClr val="1C2833"/>
+                </a:solidFill>
+                <a:latin typeface="Georgia" pitchFamily="34" charset="0"/>
+                <a:ea typeface="Georgia" pitchFamily="34" charset="-122"/>
+                <a:cs typeface="Georgia" pitchFamily="34" charset="-120"/>
+              </a:rPr>
+              <a:t> | raised hands | | 3 | </a:t>
+            </a:r>
+            <a:pPr algn="l" indent="0" marL="0">
+              <a:lnSpc>
+                <a:spcPts val="1820"/>
+              </a:lnSpc>
+              <a:spcBef>
+                <a:spcPts val="300"/>
+              </a:spcBef>
+              <a:spcAft>
+                <a:spcPts val="300"/>
+              </a:spcAft>
+              <a:buNone/>
+            </a:pPr>
+            <a:r>
+              <a:rPr lang="en-US" sz="1300" i="1" dirty="0">
+                <a:solidFill>
+                  <a:srgbClr val="1C2833"/>
+                </a:solidFill>
+                <a:latin typeface="Georgia" pitchFamily="34" charset="0"/>
+                <a:ea typeface="Georgia" pitchFamily="34" charset="-122"/>
+                <a:cs typeface="Georgia" pitchFamily="34" charset="-120"/>
+              </a:rPr>
+              <a:t>uttānāsana</a:t>
+            </a:r>
+            <a:pPr algn="l" indent="0" marL="0">
+              <a:lnSpc>
+                <a:spcPts val="1820"/>
+              </a:lnSpc>
+              <a:spcBef>
+                <a:spcPts val="300"/>
+              </a:spcBef>
+              <a:spcAft>
+                <a:spcPts val="300"/>
+              </a:spcAft>
+              <a:buNone/>
+            </a:pPr>
+            <a:r>
+              <a:rPr lang="en-US" sz="1300" dirty="0">
+                <a:solidFill>
+                  <a:srgbClr val="1C2833"/>
+                </a:solidFill>
+                <a:latin typeface="Georgia" pitchFamily="34" charset="0"/>
+                <a:ea typeface="Georgia" pitchFamily="34" charset="-122"/>
+                <a:cs typeface="Georgia" pitchFamily="34" charset="-120"/>
+              </a:rPr>
+              <a:t> | standing fold | | 4 | </a:t>
+            </a:r>
+            <a:pPr algn="l" indent="0" marL="0">
+              <a:lnSpc>
+                <a:spcPts val="1820"/>
+              </a:lnSpc>
+              <a:spcBef>
+                <a:spcPts val="300"/>
+              </a:spcBef>
+              <a:spcAft>
+                <a:spcPts val="300"/>
+              </a:spcAft>
+              <a:buNone/>
+            </a:pPr>
+            <a:r>
+              <a:rPr lang="en-US" sz="1300" i="1" dirty="0">
+                <a:solidFill>
+                  <a:srgbClr val="1C2833"/>
+                </a:solidFill>
+                <a:latin typeface="Georgia" pitchFamily="34" charset="0"/>
+                <a:ea typeface="Georgia" pitchFamily="34" charset="-122"/>
+                <a:cs typeface="Georgia" pitchFamily="34" charset="-120"/>
+              </a:rPr>
+              <a:t>aśva-sañcalanāsana</a:t>
+            </a:r>
+            <a:pPr algn="l" indent="0" marL="0">
+              <a:lnSpc>
+                <a:spcPts val="1820"/>
+              </a:lnSpc>
+              <a:spcBef>
+                <a:spcPts val="300"/>
+              </a:spcBef>
+              <a:spcAft>
+                <a:spcPts val="300"/>
+              </a:spcAft>
+              <a:buNone/>
+            </a:pPr>
+            <a:r>
+              <a:rPr lang="en-US" sz="1300" dirty="0">
+                <a:solidFill>
+                  <a:srgbClr val="1C2833"/>
+                </a:solidFill>
+                <a:latin typeface="Georgia" pitchFamily="34" charset="0"/>
+                <a:ea typeface="Georgia" pitchFamily="34" charset="-122"/>
+                <a:cs typeface="Georgia" pitchFamily="34" charset="-120"/>
+              </a:rPr>
+              <a:t> (right) | lunge | | 5 | </a:t>
+            </a:r>
+            <a:pPr algn="l" indent="0" marL="0">
+              <a:lnSpc>
+                <a:spcPts val="1820"/>
+              </a:lnSpc>
+              <a:spcBef>
+                <a:spcPts val="300"/>
+              </a:spcBef>
+              <a:spcAft>
+                <a:spcPts val="300"/>
+              </a:spcAft>
+              <a:buNone/>
+            </a:pPr>
+            <a:r>
+              <a:rPr lang="en-US" sz="1300" i="1" dirty="0">
+                <a:solidFill>
+                  <a:srgbClr val="1C2833"/>
+                </a:solidFill>
+                <a:latin typeface="Georgia" pitchFamily="34" charset="0"/>
+                <a:ea typeface="Georgia" pitchFamily="34" charset="-122"/>
+                <a:cs typeface="Georgia" pitchFamily="34" charset="-120"/>
+              </a:rPr>
+              <a:t>adho-mukha-śvānāsana</a:t>
+            </a:r>
+            <a:pPr algn="l" indent="0" marL="0">
+              <a:lnSpc>
+                <a:spcPts val="1820"/>
+              </a:lnSpc>
+              <a:spcBef>
+                <a:spcPts val="300"/>
+              </a:spcBef>
+              <a:spcAft>
+                <a:spcPts val="300"/>
+              </a:spcAft>
+              <a:buNone/>
+            </a:pPr>
+            <a:r>
+              <a:rPr lang="en-US" sz="1300" dirty="0">
+                <a:solidFill>
+                  <a:srgbClr val="1C2833"/>
+                </a:solidFill>
+                <a:latin typeface="Georgia" pitchFamily="34" charset="0"/>
+                <a:ea typeface="Georgia" pitchFamily="34" charset="-122"/>
+                <a:cs typeface="Georgia" pitchFamily="34" charset="-120"/>
+              </a:rPr>
+              <a:t> | downward dog | | 6 | </a:t>
+            </a:r>
+            <a:pPr algn="l" indent="0" marL="0">
+              <a:lnSpc>
+                <a:spcPts val="1820"/>
+              </a:lnSpc>
+              <a:spcBef>
+                <a:spcPts val="300"/>
+              </a:spcBef>
+              <a:spcAft>
+                <a:spcPts val="300"/>
+              </a:spcAft>
+              <a:buNone/>
+            </a:pPr>
+            <a:r>
+              <a:rPr lang="en-US" sz="1300" i="1" dirty="0">
+                <a:solidFill>
+                  <a:srgbClr val="1C2833"/>
+                </a:solidFill>
+                <a:latin typeface="Georgia" pitchFamily="34" charset="0"/>
+                <a:ea typeface="Georgia" pitchFamily="34" charset="-122"/>
+                <a:cs typeface="Georgia" pitchFamily="34" charset="-120"/>
+              </a:rPr>
+              <a:t>aṣṭāṅga-namaskāra</a:t>
+            </a:r>
+            <a:pPr algn="l" indent="0" marL="0">
+              <a:lnSpc>
+                <a:spcPts val="1820"/>
+              </a:lnSpc>
+              <a:spcBef>
+                <a:spcPts val="300"/>
+              </a:spcBef>
+              <a:spcAft>
+                <a:spcPts val="300"/>
+              </a:spcAft>
+              <a:buNone/>
+            </a:pPr>
+            <a:r>
+              <a:rPr lang="en-US" sz="1300" dirty="0">
+                <a:solidFill>
+                  <a:srgbClr val="1C2833"/>
+                </a:solidFill>
+                <a:latin typeface="Georgia" pitchFamily="34" charset="0"/>
+                <a:ea typeface="Georgia" pitchFamily="34" charset="-122"/>
+                <a:cs typeface="Georgia" pitchFamily="34" charset="-120"/>
+              </a:rPr>
+              <a:t> | knees-chest-chin | | 7 | </a:t>
+            </a:r>
+            <a:pPr algn="l" indent="0" marL="0">
+              <a:lnSpc>
+                <a:spcPts val="1820"/>
+              </a:lnSpc>
+              <a:spcBef>
+                <a:spcPts val="300"/>
+              </a:spcBef>
+              <a:spcAft>
+                <a:spcPts val="300"/>
+              </a:spcAft>
+              <a:buNone/>
+            </a:pPr>
+            <a:r>
+              <a:rPr lang="en-US" sz="1300" i="1" dirty="0">
+                <a:solidFill>
+                  <a:srgbClr val="1C2833"/>
+                </a:solidFill>
+                <a:latin typeface="Georgia" pitchFamily="34" charset="0"/>
+                <a:ea typeface="Georgia" pitchFamily="34" charset="-122"/>
+                <a:cs typeface="Georgia" pitchFamily="34" charset="-120"/>
+              </a:rPr>
+              <a:t>bhujaṅgāsana</a:t>
+            </a:r>
+            <a:pPr algn="l" indent="0" marL="0">
+              <a:lnSpc>
+                <a:spcPts val="1820"/>
+              </a:lnSpc>
+              <a:spcBef>
+                <a:spcPts val="300"/>
+              </a:spcBef>
+              <a:spcAft>
+                <a:spcPts val="300"/>
+              </a:spcAft>
+              <a:buNone/>
+            </a:pPr>
+            <a:r>
+              <a:rPr lang="en-US" sz="1300" dirty="0">
+                <a:solidFill>
+                  <a:srgbClr val="1C2833"/>
+                </a:solidFill>
+                <a:latin typeface="Georgia" pitchFamily="34" charset="0"/>
+                <a:ea typeface="Georgia" pitchFamily="34" charset="-122"/>
+                <a:cs typeface="Georgia" pitchFamily="34" charset="-120"/>
+              </a:rPr>
+              <a:t> | cobra | | 8 | </a:t>
+            </a:r>
+            <a:pPr algn="l" indent="0" marL="0">
+              <a:lnSpc>
+                <a:spcPts val="1820"/>
+              </a:lnSpc>
+              <a:spcBef>
+                <a:spcPts val="300"/>
+              </a:spcBef>
+              <a:spcAft>
+                <a:spcPts val="300"/>
+              </a:spcAft>
+              <a:buNone/>
+            </a:pPr>
+            <a:r>
+              <a:rPr lang="en-US" sz="1300" i="1" dirty="0">
+                <a:solidFill>
+                  <a:srgbClr val="1C2833"/>
+                </a:solidFill>
+                <a:latin typeface="Georgia" pitchFamily="34" charset="0"/>
+                <a:ea typeface="Georgia" pitchFamily="34" charset="-122"/>
+                <a:cs typeface="Georgia" pitchFamily="34" charset="-120"/>
+              </a:rPr>
+              <a:t>adho-mukha-śvānāsana</a:t>
+            </a:r>
+            <a:pPr algn="l" indent="0" marL="0">
+              <a:lnSpc>
+                <a:spcPts val="1820"/>
+              </a:lnSpc>
+              <a:spcBef>
+                <a:spcPts val="300"/>
+              </a:spcBef>
+              <a:spcAft>
+                <a:spcPts val="300"/>
+              </a:spcAft>
+              <a:buNone/>
+            </a:pPr>
+            <a:r>
+              <a:rPr lang="en-US" sz="1300" dirty="0">
+                <a:solidFill>
+                  <a:srgbClr val="1C2833"/>
+                </a:solidFill>
+                <a:latin typeface="Georgia" pitchFamily="34" charset="0"/>
+                <a:ea typeface="Georgia" pitchFamily="34" charset="-122"/>
+                <a:cs typeface="Georgia" pitchFamily="34" charset="-120"/>
+              </a:rPr>
+              <a:t> | downward dog | | 9 | </a:t>
+            </a:r>
+            <a:pPr algn="l" indent="0" marL="0">
+              <a:lnSpc>
+                <a:spcPts val="1820"/>
+              </a:lnSpc>
+              <a:spcBef>
+                <a:spcPts val="300"/>
+              </a:spcBef>
+              <a:spcAft>
+                <a:spcPts val="300"/>
+              </a:spcAft>
+              <a:buNone/>
+            </a:pPr>
+            <a:r>
+              <a:rPr lang="en-US" sz="1300" i="1" dirty="0">
+                <a:solidFill>
+                  <a:srgbClr val="1C2833"/>
+                </a:solidFill>
+                <a:latin typeface="Georgia" pitchFamily="34" charset="0"/>
+                <a:ea typeface="Georgia" pitchFamily="34" charset="-122"/>
+                <a:cs typeface="Georgia" pitchFamily="34" charset="-120"/>
+              </a:rPr>
+              <a:t>aśva-sañcalanāsana</a:t>
+            </a:r>
+            <a:pPr algn="l" indent="0" marL="0">
+              <a:lnSpc>
+                <a:spcPts val="1820"/>
+              </a:lnSpc>
+              <a:spcBef>
+                <a:spcPts val="300"/>
+              </a:spcBef>
+              <a:spcAft>
+                <a:spcPts val="300"/>
+              </a:spcAft>
+              <a:buNone/>
+            </a:pPr>
+            <a:r>
+              <a:rPr lang="en-US" sz="1300" dirty="0">
+                <a:solidFill>
+                  <a:srgbClr val="1C2833"/>
+                </a:solidFill>
+                <a:latin typeface="Georgia" pitchFamily="34" charset="0"/>
+                <a:ea typeface="Georgia" pitchFamily="34" charset="-122"/>
+                <a:cs typeface="Georgia" pitchFamily="34" charset="-120"/>
+              </a:rPr>
+              <a:t> (right forward) | lunge | | 10 | </a:t>
+            </a:r>
+            <a:pPr algn="l" indent="0" marL="0">
+              <a:lnSpc>
+                <a:spcPts val="1820"/>
+              </a:lnSpc>
+              <a:spcBef>
+                <a:spcPts val="300"/>
+              </a:spcBef>
+              <a:spcAft>
+                <a:spcPts val="300"/>
+              </a:spcAft>
+              <a:buNone/>
+            </a:pPr>
+            <a:r>
+              <a:rPr lang="en-US" sz="1300" i="1" dirty="0">
+                <a:solidFill>
+                  <a:srgbClr val="1C2833"/>
+                </a:solidFill>
+                <a:latin typeface="Georgia" pitchFamily="34" charset="0"/>
+                <a:ea typeface="Georgia" pitchFamily="34" charset="-122"/>
+                <a:cs typeface="Georgia" pitchFamily="34" charset="-120"/>
+              </a:rPr>
+              <a:t>uttānāsana</a:t>
+            </a:r>
+            <a:pPr algn="l" indent="0" marL="0">
+              <a:lnSpc>
+                <a:spcPts val="1820"/>
+              </a:lnSpc>
+              <a:spcBef>
+                <a:spcPts val="300"/>
+              </a:spcBef>
+              <a:spcAft>
+                <a:spcPts val="300"/>
+              </a:spcAft>
+              <a:buNone/>
+            </a:pPr>
+            <a:r>
+              <a:rPr lang="en-US" sz="1300" dirty="0">
+                <a:solidFill>
+                  <a:srgbClr val="1C2833"/>
+                </a:solidFill>
+                <a:latin typeface="Georgia" pitchFamily="34" charset="0"/>
+                <a:ea typeface="Georgia" pitchFamily="34" charset="-122"/>
+                <a:cs typeface="Georgia" pitchFamily="34" charset="-120"/>
+              </a:rPr>
+              <a:t> | standing fold | | 11 | </a:t>
+            </a:r>
+            <a:pPr algn="l" indent="0" marL="0">
+              <a:lnSpc>
+                <a:spcPts val="1820"/>
+              </a:lnSpc>
+              <a:spcBef>
+                <a:spcPts val="300"/>
+              </a:spcBef>
+              <a:spcAft>
+                <a:spcPts val="300"/>
+              </a:spcAft>
+              <a:buNone/>
+            </a:pPr>
+            <a:r>
+              <a:rPr lang="en-US" sz="1300" i="1" dirty="0">
+                <a:solidFill>
+                  <a:srgbClr val="1C2833"/>
+                </a:solidFill>
+                <a:latin typeface="Georgia" pitchFamily="34" charset="0"/>
+                <a:ea typeface="Georgia" pitchFamily="34" charset="-122"/>
+                <a:cs typeface="Georgia" pitchFamily="34" charset="-120"/>
+              </a:rPr>
+              <a:t>hasta-uttānāsana</a:t>
+            </a:r>
+            <a:pPr algn="l" indent="0" marL="0">
+              <a:lnSpc>
+                <a:spcPts val="1820"/>
+              </a:lnSpc>
+              <a:spcBef>
+                <a:spcPts val="300"/>
+              </a:spcBef>
+              <a:spcAft>
+                <a:spcPts val="300"/>
+              </a:spcAft>
+              <a:buNone/>
+            </a:pPr>
+            <a:r>
+              <a:rPr lang="en-US" sz="1300" dirty="0">
+                <a:solidFill>
+                  <a:srgbClr val="1C2833"/>
+                </a:solidFill>
+                <a:latin typeface="Georgia" pitchFamily="34" charset="0"/>
+                <a:ea typeface="Georgia" pitchFamily="34" charset="-122"/>
+                <a:cs typeface="Georgia" pitchFamily="34" charset="-120"/>
+              </a:rPr>
+              <a:t> | raised hands | | 12 | </a:t>
+            </a:r>
+            <a:pPr algn="l" indent="0" marL="0">
+              <a:lnSpc>
+                <a:spcPts val="1820"/>
+              </a:lnSpc>
+              <a:spcBef>
+                <a:spcPts val="300"/>
+              </a:spcBef>
+              <a:spcAft>
+                <a:spcPts val="300"/>
+              </a:spcAft>
+              <a:buNone/>
+            </a:pPr>
+            <a:r>
+              <a:rPr lang="en-US" sz="1300" i="1" dirty="0">
+                <a:solidFill>
+                  <a:srgbClr val="1C2833"/>
+                </a:solidFill>
+                <a:latin typeface="Georgia" pitchFamily="34" charset="0"/>
+                <a:ea typeface="Georgia" pitchFamily="34" charset="-122"/>
+                <a:cs typeface="Georgia" pitchFamily="34" charset="-120"/>
+              </a:rPr>
+              <a:t>praṇāmāsana</a:t>
+            </a:r>
+            <a:pPr algn="l" indent="0" marL="0">
+              <a:lnSpc>
+                <a:spcPts val="1820"/>
+              </a:lnSpc>
+              <a:spcBef>
+                <a:spcPts val="300"/>
+              </a:spcBef>
+              <a:spcAft>
+                <a:spcPts val="300"/>
+              </a:spcAft>
+              <a:buNone/>
+            </a:pPr>
+            <a:r>
+              <a:rPr lang="en-US" sz="1300" dirty="0">
+                <a:solidFill>
+                  <a:srgbClr val="1C2833"/>
+                </a:solidFill>
+                <a:latin typeface="Georgia" pitchFamily="34" charset="0"/>
+                <a:ea typeface="Georgia" pitchFamily="34" charset="-122"/>
+                <a:cs typeface="Georgia" pitchFamily="34" charset="-120"/>
+              </a:rPr>
+              <a:t> | prayer |</a:t>
+            </a:r>
+            <a:endParaRPr lang="en-US" sz="1300" dirty="0"/>
+          </a:p>
+        </p:txBody>
+      </p:sp>
+      <p:sp>
+        <p:nvSpPr>
+          <p:cNvPr id="9" name="Text 7"/>
+          <p:cNvSpPr/>
+          <p:nvPr/>
+        </p:nvSpPr>
+        <p:spPr>
+          <a:xfrm>
+            <a:off x="692051" y="2805261"/>
+            <a:ext cx="7973389" cy="230981"/>
+          </a:xfrm>
+          <a:prstGeom prst="rect">
+            <a:avLst/>
+          </a:prstGeom>
+          <a:noFill/>
+          <a:ln/>
+        </p:spPr>
+        <p:txBody>
+          <a:bodyPr wrap="square" lIns="0" tIns="0" rIns="0" bIns="0" rtlCol="0" anchor="t"/>
+          <a:lstStyle/>
+          <a:p>
+            <a:pPr algn="l" indent="0" marL="0">
+              <a:lnSpc>
+                <a:spcPts val="1820"/>
+              </a:lnSpc>
+              <a:spcBef>
+                <a:spcPts val="300"/>
+              </a:spcBef>
+              <a:spcAft>
+                <a:spcPts val="300"/>
+              </a:spcAft>
+              <a:buNone/>
+            </a:pPr>
+            <a:r>
+              <a:rPr lang="en-US" sz="1300" i="1" dirty="0">
+                <a:solidFill>
+                  <a:srgbClr val="1C2833"/>
+                </a:solidFill>
+                <a:latin typeface="Georgia" pitchFamily="34" charset="0"/>
+                <a:ea typeface="Georgia" pitchFamily="34" charset="-122"/>
+                <a:cs typeface="Georgia" pitchFamily="34" charset="-120"/>
+              </a:rPr>
+              <a:t>Notice the symmetry: poses 1–6 are mirrored by 12–7.</a:t>
+            </a:r>
+            <a:endParaRPr lang="en-US" sz="1300" dirty="0"/>
+          </a:p>
+        </p:txBody>
+      </p:sp>
+      <p:sp>
+        <p:nvSpPr>
+          <p:cNvPr id="10" name="Text 8"/>
+          <p:cNvSpPr/>
+          <p:nvPr/>
+        </p:nvSpPr>
+        <p:spPr>
+          <a:xfrm>
+            <a:off x="406301" y="4434929"/>
+            <a:ext cx="8498026" cy="213271"/>
+          </a:xfrm>
+          <a:prstGeom prst="rect">
+            <a:avLst/>
+          </a:prstGeom>
+          <a:noFill/>
+          <a:ln/>
+        </p:spPr>
+        <p:txBody>
+          <a:bodyPr wrap="square" lIns="0" tIns="0" rIns="0" bIns="0" rtlCol="0" anchor="t"/>
+          <a:lstStyle/>
+          <a:p>
+            <a:pPr algn="l" indent="0" marL="0">
+              <a:lnSpc>
+                <a:spcPts val="1680"/>
+              </a:lnSpc>
+              <a:spcBef>
+                <a:spcPts val="300"/>
+              </a:spcBef>
+              <a:spcAft>
+                <a:spcPts val="300"/>
+              </a:spcAft>
+              <a:buNone/>
+            </a:pPr>
+            <a:r>
+              <a:rPr lang="en-US" sz="1200" dirty="0">
+                <a:solidFill>
+                  <a:srgbClr val="1C2833"/>
+                </a:solidFill>
+                <a:latin typeface="Arial" pitchFamily="34" charset="0"/>
+                <a:ea typeface="Arial" pitchFamily="34" charset="-122"/>
+                <a:cs typeface="Arial" pitchFamily="34" charset="-120"/>
+              </a:rPr>
+              <a:t>Middle ·  · IKS Curriculum</a:t>
+            </a:r>
+            <a:endParaRPr lang="en-US" sz="1200" dirty="0"/>
+          </a:p>
+        </p:txBody>
+      </p:sp>
+    </p:spTree>
+  </p:cSld>
+  <p:clrMapOvr>
+    <a:masterClrMapping/>
+  </p:clrMapOvr>
+</p:sld>
+</file>
+
+<file path=ppt/slides/slide14.xml><?xml version="1.0" encoding="utf-8"?>
+<p:sld xmlns:a="http://schemas.openxmlformats.org/drawingml/2006/main" xmlns:r="http://schemas.openxmlformats.org/officeDocument/2006/relationships" xmlns:p="http://schemas.openxmlformats.org/presentationml/2006/main">
+  <p:cSld name="Slide 14">
+    <p:bg>
+      <p:bgPr>
+        <a:solidFill>
+          <a:srgbClr val="FFFFFF"/>
+        </a:solidFill>
+      </p:bgPr>
+    </p:bg>
+    <p:spTree>
+      <p:nvGrpSpPr>
+        <p:cNvPr id="1" name=""/>
+        <p:cNvGrpSpPr/>
+        <p:nvPr/>
+      </p:nvGrpSpPr>
+      <p:grpSpPr>
+        <a:xfrm>
+          <a:off x="0" y="0"/>
+          <a:ext cx="0" cy="0"/>
+          <a:chOff x="0" y="0"/>
+          <a:chExt cx="0" cy="0"/>
+        </a:xfrm>
+      </p:grpSpPr>
+      <p:sp>
+        <p:nvSpPr>
+          <p:cNvPr id="2" name="Text 0"/>
+          <p:cNvSpPr/>
+          <p:nvPr/>
+        </p:nvSpPr>
+        <p:spPr>
+          <a:xfrm>
+            <a:off x="0" y="0"/>
+            <a:ext cx="9144000" cy="101501"/>
+          </a:xfrm>
+          <a:prstGeom prst="rect">
+            <a:avLst/>
+          </a:prstGeom>
+          <a:solidFill>
+            <a:srgbClr val="277884"/>
+          </a:solidFill>
+          <a:ln/>
+        </p:spPr>
+        <p:txBody>
+          <a:bodyPr wrap="square" rtlCol="0" anchor="ctr"/>
+          <a:lstStyle/>
+          <a:p>
+            <a:pPr indent="0" marL="0">
+              <a:buNone/>
+            </a:pPr>
+            <a:endParaRPr lang="en-US" dirty="0"/>
+          </a:p>
+        </p:txBody>
+      </p:sp>
+      <p:sp>
+        <p:nvSpPr>
+          <p:cNvPr id="3" name="Text 1"/>
+          <p:cNvSpPr/>
+          <p:nvPr/>
+        </p:nvSpPr>
+        <p:spPr>
+          <a:xfrm>
+            <a:off x="406301" y="457051"/>
+            <a:ext cx="8498026" cy="274290"/>
+          </a:xfrm>
+          <a:prstGeom prst="rect">
+            <a:avLst/>
+          </a:prstGeom>
+          <a:noFill/>
+          <a:ln/>
+        </p:spPr>
+        <p:txBody>
+          <a:bodyPr wrap="square" lIns="0" tIns="0" rIns="0" bIns="0" rtlCol="0" anchor="t"/>
+          <a:lstStyle/>
+          <a:p>
+            <a:pPr algn="l" indent="0" marL="0">
+              <a:lnSpc>
+                <a:spcPts val="2160"/>
+              </a:lnSpc>
+              <a:spcBef>
+                <a:spcPts val="600"/>
+              </a:spcBef>
+              <a:spcAft>
+                <a:spcPts val="800"/>
+              </a:spcAft>
+              <a:buNone/>
+            </a:pPr>
+            <a:r>
+              <a:rPr lang="en-US" sz="1800" b="1" dirty="0">
+                <a:solidFill>
+                  <a:srgbClr val="FE4447"/>
+                </a:solidFill>
+                <a:latin typeface="Georgia" pitchFamily="34" charset="0"/>
+                <a:ea typeface="Georgia" pitchFamily="34" charset="-122"/>
+                <a:cs typeface="Georgia" pitchFamily="34" charset="-120"/>
+              </a:rPr>
+              <a:t>Homework</a:t>
+            </a:r>
+            <a:endParaRPr lang="en-US" sz="1800" dirty="0"/>
+          </a:p>
+        </p:txBody>
+      </p:sp>
+      <p:sp>
+        <p:nvSpPr>
+          <p:cNvPr id="4" name="Text 2"/>
+          <p:cNvSpPr/>
+          <p:nvPr/>
+        </p:nvSpPr>
+        <p:spPr>
+          <a:xfrm>
+            <a:off x="634901" y="883593"/>
+            <a:ext cx="8102798" cy="281880"/>
+          </a:xfrm>
+          <a:prstGeom prst="rect">
+            <a:avLst/>
+          </a:prstGeom>
+          <a:noFill/>
+          <a:ln/>
+        </p:spPr>
+        <p:txBody>
+          <a:bodyPr wrap="square" lIns="0" tIns="0" rIns="0" bIns="0" rtlCol="0" anchor="t"/>
+          <a:lstStyle/>
+          <a:p>
+            <a:pPr algn="l" marL="342900" indent="-342900">
+              <a:lnSpc>
+                <a:spcPts val="1620"/>
+              </a:lnSpc>
+              <a:spcAft>
+                <a:spcPts val="300"/>
+              </a:spcAft>
+              <a:buSzPct val="100000"/>
+              <a:buChar char="•"/>
+            </a:pPr>
+            <a:r>
+              <a:rPr lang="en-US" sz="1200" dirty="0">
+                <a:solidFill>
+                  <a:srgbClr val="1C2833"/>
+                </a:solidFill>
+                <a:latin typeface="Arial" pitchFamily="34" charset="0"/>
+                <a:ea typeface="Arial" pitchFamily="34" charset="-122"/>
+                <a:cs typeface="Arial" pitchFamily="34" charset="-120"/>
+              </a:rPr>
+              <a:t>Practise the sequence at home — 1 round, slowly. Notice which transitions feel awkward.</a:t>
+            </a:r>
+            <a:endParaRPr lang="en-US" sz="1200" dirty="0"/>
+          </a:p>
+        </p:txBody>
+      </p:sp>
+      <p:sp>
+        <p:nvSpPr>
+          <p:cNvPr id="5" name="Text 3"/>
+          <p:cNvSpPr/>
+          <p:nvPr/>
+        </p:nvSpPr>
+        <p:spPr>
+          <a:xfrm>
+            <a:off x="406301" y="4434929"/>
+            <a:ext cx="8498026" cy="213271"/>
+          </a:xfrm>
+          <a:prstGeom prst="rect">
+            <a:avLst/>
+          </a:prstGeom>
+          <a:noFill/>
+          <a:ln/>
+        </p:spPr>
+        <p:txBody>
+          <a:bodyPr wrap="square" lIns="0" tIns="0" rIns="0" bIns="0" rtlCol="0" anchor="t"/>
+          <a:lstStyle/>
+          <a:p>
+            <a:pPr algn="l" indent="0" marL="0">
+              <a:lnSpc>
+                <a:spcPts val="1680"/>
+              </a:lnSpc>
+              <a:spcBef>
+                <a:spcPts val="300"/>
+              </a:spcBef>
+              <a:spcAft>
+                <a:spcPts val="300"/>
+              </a:spcAft>
+              <a:buNone/>
+            </a:pPr>
+            <a:r>
+              <a:rPr lang="en-US" sz="1200" dirty="0">
+                <a:solidFill>
+                  <a:srgbClr val="1C2833"/>
+                </a:solidFill>
+                <a:latin typeface="Arial" pitchFamily="34" charset="0"/>
+                <a:ea typeface="Arial" pitchFamily="34" charset="-122"/>
+                <a:cs typeface="Arial" pitchFamily="34" charset="-120"/>
+              </a:rPr>
+              <a:t>Middle ·  · IKS Curriculum</a:t>
+            </a:r>
+            <a:endParaRPr lang="en-US" sz="1200" dirty="0"/>
+          </a:p>
+        </p:txBody>
+      </p:sp>
+    </p:spTree>
+  </p:cSld>
+  <p:clrMapOvr>
+    <a:masterClrMapping/>
+  </p:clrMapOvr>
+</p:sld>
+</file>
+
+<file path=ppt/slides/slide15.xml><?xml version="1.0" encoding="utf-8"?>
+<p:sld xmlns:a="http://schemas.openxmlformats.org/drawingml/2006/main" xmlns:r="http://schemas.openxmlformats.org/officeDocument/2006/relationships" xmlns:p="http://schemas.openxmlformats.org/presentationml/2006/main">
+  <p:cSld name="Slide 15">
+    <p:bg>
+      <p:bgPr>
+        <a:solidFill>
+          <a:srgbClr val="FFFFFF"/>
+        </a:solidFill>
+      </p:bgPr>
+    </p:bg>
+    <p:spTree>
+      <p:nvGrpSpPr>
+        <p:cNvPr id="1" name=""/>
+        <p:cNvGrpSpPr/>
+        <p:nvPr/>
+      </p:nvGrpSpPr>
+      <p:grpSpPr>
+        <a:xfrm>
+          <a:off x="0" y="0"/>
+          <a:ext cx="0" cy="0"/>
+          <a:chOff x="0" y="0"/>
+          <a:chExt cx="0" cy="0"/>
+        </a:xfrm>
+      </p:grpSpPr>
+      <p:sp>
+        <p:nvSpPr>
+          <p:cNvPr id="2" name="Text 0"/>
+          <p:cNvSpPr/>
+          <p:nvPr/>
+        </p:nvSpPr>
+        <p:spPr>
+          <a:xfrm>
+            <a:off x="0" y="0"/>
+            <a:ext cx="9144000" cy="101501"/>
+          </a:xfrm>
+          <a:prstGeom prst="rect">
+            <a:avLst/>
+          </a:prstGeom>
+          <a:solidFill>
+            <a:srgbClr val="277884"/>
+          </a:solidFill>
+          <a:ln/>
+        </p:spPr>
+        <p:txBody>
+          <a:bodyPr wrap="square" rtlCol="0" anchor="ctr"/>
+          <a:lstStyle/>
+          <a:p>
+            <a:pPr indent="0" marL="0">
+              <a:buNone/>
+            </a:pPr>
+            <a:endParaRPr lang="en-US" dirty="0"/>
+          </a:p>
+        </p:txBody>
+      </p:sp>
+      <p:sp>
+        <p:nvSpPr>
+          <p:cNvPr id="3" name="Text 1"/>
+          <p:cNvSpPr/>
+          <p:nvPr/>
+        </p:nvSpPr>
+        <p:spPr>
+          <a:xfrm>
+            <a:off x="406301" y="457051"/>
+            <a:ext cx="8498026" cy="274290"/>
+          </a:xfrm>
+          <a:prstGeom prst="rect">
+            <a:avLst/>
+          </a:prstGeom>
+          <a:noFill/>
+          <a:ln/>
+        </p:spPr>
+        <p:txBody>
+          <a:bodyPr wrap="square" lIns="0" tIns="0" rIns="0" bIns="0" rtlCol="0" anchor="t"/>
+          <a:lstStyle/>
+          <a:p>
+            <a:pPr algn="l" indent="0" marL="0">
+              <a:lnSpc>
+                <a:spcPts val="2160"/>
+              </a:lnSpc>
+              <a:spcBef>
+                <a:spcPts val="600"/>
+              </a:spcBef>
+              <a:spcAft>
+                <a:spcPts val="800"/>
+              </a:spcAft>
+              <a:buNone/>
+            </a:pPr>
+            <a:r>
+              <a:rPr lang="en-US" sz="1800" b="1" dirty="0">
+                <a:solidFill>
+                  <a:srgbClr val="FE4447"/>
+                </a:solidFill>
+                <a:latin typeface="Georgia" pitchFamily="34" charset="0"/>
+                <a:ea typeface="Georgia" pitchFamily="34" charset="-122"/>
+                <a:cs typeface="Georgia" pitchFamily="34" charset="-120"/>
+              </a:rPr>
+              <a:t>Differentiation</a:t>
+            </a:r>
+            <a:endParaRPr lang="en-US" sz="1800" dirty="0"/>
+          </a:p>
+        </p:txBody>
+      </p:sp>
+      <p:sp>
+        <p:nvSpPr>
+          <p:cNvPr id="4" name="Text 2"/>
+          <p:cNvSpPr/>
+          <p:nvPr/>
+        </p:nvSpPr>
+        <p:spPr>
+          <a:xfrm>
+            <a:off x="634901" y="883593"/>
+            <a:ext cx="8102798" cy="525661"/>
+          </a:xfrm>
+          <a:prstGeom prst="rect">
+            <a:avLst/>
+          </a:prstGeom>
+          <a:noFill/>
+          <a:ln/>
+        </p:spPr>
+        <p:txBody>
+          <a:bodyPr wrap="square" lIns="0" tIns="0" rIns="0" bIns="0" rtlCol="0" anchor="t"/>
+          <a:lstStyle/>
+          <a:p>
+            <a:pPr algn="l" marL="342900" indent="-342900">
+              <a:lnSpc>
+                <a:spcPts val="1620"/>
+              </a:lnSpc>
+              <a:spcAft>
+                <a:spcPts val="300"/>
+              </a:spcAft>
+              <a:buSzPct val="100000"/>
+              <a:buChar char="•"/>
+            </a:pPr>
+            <a:r>
+              <a:rPr lang="en-US" sz="1200" b="1" dirty="0">
+                <a:solidFill>
+                  <a:srgbClr val="1C2833"/>
+                </a:solidFill>
+                <a:latin typeface="Arial" pitchFamily="34" charset="0"/>
+                <a:ea typeface="Arial" pitchFamily="34" charset="-122"/>
+                <a:cs typeface="Arial" pitchFamily="34" charset="-120"/>
+              </a:rPr>
+              <a:t>Tier up:</a:t>
+            </a:r>
+            <a:pPr algn="l" indent="0" marL="0">
+              <a:lnSpc>
+                <a:spcPts val="1620"/>
+              </a:lnSpc>
+              <a:spcAft>
+                <a:spcPts val="300"/>
+              </a:spcAft>
+              <a:buNone/>
+            </a:pPr>
+            <a:r>
+              <a:rPr lang="en-US" sz="1200" dirty="0">
+                <a:solidFill>
+                  <a:srgbClr val="1C2833"/>
+                </a:solidFill>
+                <a:latin typeface="Arial" pitchFamily="34" charset="0"/>
+                <a:ea typeface="Arial" pitchFamily="34" charset="-122"/>
+                <a:cs typeface="Arial" pitchFamily="34" charset="-120"/>
+              </a:rPr>
+              <a:t> Attempt 2 rounds (alternating leg) at home.</a:t>
+            </a:r>
+            <a:endParaRPr lang="en-US" sz="1200" dirty="0"/>
+          </a:p>
+          <a:p>
+            <a:pPr algn="l" marL="342900" indent="-342900">
+              <a:lnSpc>
+                <a:spcPts val="1620"/>
+              </a:lnSpc>
+              <a:spcAft>
+                <a:spcPts val="300"/>
+              </a:spcAft>
+              <a:buSzPct val="100000"/>
+              <a:buChar char="•"/>
+            </a:pPr>
+            <a:r>
+              <a:rPr lang="en-US" sz="1200" b="1" dirty="0">
+                <a:solidFill>
+                  <a:srgbClr val="1C2833"/>
+                </a:solidFill>
+                <a:latin typeface="Arial" pitchFamily="34" charset="0"/>
+                <a:ea typeface="Arial" pitchFamily="34" charset="-122"/>
+                <a:cs typeface="Arial" pitchFamily="34" charset="-120"/>
+              </a:rPr>
+              <a:t>Tier down:</a:t>
+            </a:r>
+            <a:pPr algn="l" indent="0" marL="0">
+              <a:lnSpc>
+                <a:spcPts val="1620"/>
+              </a:lnSpc>
+              <a:spcAft>
+                <a:spcPts val="300"/>
+              </a:spcAft>
+              <a:buNone/>
+            </a:pPr>
+            <a:r>
+              <a:rPr lang="en-US" sz="1200" dirty="0">
+                <a:solidFill>
+                  <a:srgbClr val="1C2833"/>
+                </a:solidFill>
+                <a:latin typeface="Arial" pitchFamily="34" charset="0"/>
+                <a:ea typeface="Arial" pitchFamily="34" charset="-122"/>
+                <a:cs typeface="Arial" pitchFamily="34" charset="-120"/>
+              </a:rPr>
+              <a:t> Practise only the first 6 poses today; complete the rest tomorrow.</a:t>
+            </a:r>
+            <a:endParaRPr lang="en-US" sz="1200" dirty="0"/>
+          </a:p>
+        </p:txBody>
+      </p:sp>
+      <p:sp>
+        <p:nvSpPr>
+          <p:cNvPr id="5" name="Text 3"/>
+          <p:cNvSpPr/>
+          <p:nvPr/>
+        </p:nvSpPr>
+        <p:spPr>
+          <a:xfrm>
+            <a:off x="406301" y="4434929"/>
+            <a:ext cx="8498026" cy="213271"/>
+          </a:xfrm>
+          <a:prstGeom prst="rect">
+            <a:avLst/>
+          </a:prstGeom>
+          <a:noFill/>
+          <a:ln/>
+        </p:spPr>
+        <p:txBody>
+          <a:bodyPr wrap="square" lIns="0" tIns="0" rIns="0" bIns="0" rtlCol="0" anchor="t"/>
+          <a:lstStyle/>
+          <a:p>
+            <a:pPr algn="l" indent="0" marL="0">
+              <a:lnSpc>
+                <a:spcPts val="1680"/>
+              </a:lnSpc>
+              <a:spcBef>
+                <a:spcPts val="300"/>
+              </a:spcBef>
+              <a:spcAft>
+                <a:spcPts val="300"/>
+              </a:spcAft>
+              <a:buNone/>
+            </a:pPr>
+            <a:r>
+              <a:rPr lang="en-US" sz="1200" dirty="0">
+                <a:solidFill>
+                  <a:srgbClr val="1C2833"/>
+                </a:solidFill>
+                <a:latin typeface="Arial" pitchFamily="34" charset="0"/>
+                <a:ea typeface="Arial" pitchFamily="34" charset="-122"/>
+                <a:cs typeface="Arial" pitchFamily="34" charset="-120"/>
+              </a:rPr>
+              <a:t>Middle ·  · IKS Curriculum</a:t>
+            </a:r>
+            <a:endParaRPr lang="en-US" sz="1200" dirty="0"/>
+          </a:p>
+        </p:txBody>
+      </p:sp>
+    </p:spTree>
+  </p:cSld>
+  <p:clrMapOvr>
+    <a:masterClrMapping/>
+  </p:clrMapOvr>
+</p:sld>
+</file>
+
+<file path=ppt/slides/slide16.xml><?xml version="1.0" encoding="utf-8"?>
+<p:sld xmlns:a="http://schemas.openxmlformats.org/drawingml/2006/main" xmlns:r="http://schemas.openxmlformats.org/officeDocument/2006/relationships" xmlns:p="http://schemas.openxmlformats.org/presentationml/2006/main">
+  <p:cSld name="Slide 16">
+    <p:bg>
+      <p:bgPr>
+        <a:solidFill>
+          <a:srgbClr val="FFFFFF"/>
+        </a:solidFill>
+      </p:bgPr>
+    </p:bg>
+    <p:spTree>
+      <p:nvGrpSpPr>
+        <p:cNvPr id="1" name=""/>
+        <p:cNvGrpSpPr/>
+        <p:nvPr/>
+      </p:nvGrpSpPr>
+      <p:grpSpPr>
+        <a:xfrm>
+          <a:off x="0" y="0"/>
+          <a:ext cx="0" cy="0"/>
+          <a:chOff x="0" y="0"/>
+          <a:chExt cx="0" cy="0"/>
+        </a:xfrm>
+      </p:grpSpPr>
+      <p:sp>
+        <p:nvSpPr>
+          <p:cNvPr id="2" name="Text 0"/>
+          <p:cNvSpPr/>
+          <p:nvPr/>
+        </p:nvSpPr>
+        <p:spPr>
+          <a:xfrm>
+            <a:off x="0" y="0"/>
+            <a:ext cx="9144000" cy="101501"/>
+          </a:xfrm>
+          <a:prstGeom prst="rect">
+            <a:avLst/>
+          </a:prstGeom>
+          <a:solidFill>
+            <a:srgbClr val="277884"/>
+          </a:solidFill>
+          <a:ln/>
+        </p:spPr>
+        <p:txBody>
+          <a:bodyPr wrap="square" rtlCol="0" anchor="ctr"/>
+          <a:lstStyle/>
+          <a:p>
+            <a:pPr indent="0" marL="0">
+              <a:buNone/>
+            </a:pPr>
+            <a:endParaRPr lang="en-US" dirty="0"/>
+          </a:p>
+        </p:txBody>
+      </p:sp>
+      <p:sp>
+        <p:nvSpPr>
+          <p:cNvPr id="3" name="Text 1"/>
+          <p:cNvSpPr/>
+          <p:nvPr/>
+        </p:nvSpPr>
+        <p:spPr>
+          <a:xfrm>
+            <a:off x="406301" y="457051"/>
+            <a:ext cx="8498026" cy="274290"/>
+          </a:xfrm>
+          <a:prstGeom prst="rect">
+            <a:avLst/>
+          </a:prstGeom>
+          <a:noFill/>
+          <a:ln/>
+        </p:spPr>
+        <p:txBody>
+          <a:bodyPr wrap="square" lIns="0" tIns="0" rIns="0" bIns="0" rtlCol="0" anchor="t"/>
+          <a:lstStyle/>
+          <a:p>
+            <a:pPr algn="l" indent="0" marL="0">
+              <a:lnSpc>
+                <a:spcPts val="2160"/>
+              </a:lnSpc>
+              <a:spcBef>
+                <a:spcPts val="600"/>
+              </a:spcBef>
+              <a:spcAft>
+                <a:spcPts val="800"/>
+              </a:spcAft>
+              <a:buNone/>
+            </a:pPr>
+            <a:r>
+              <a:rPr lang="en-US" sz="1800" b="1" dirty="0">
+                <a:solidFill>
+                  <a:srgbClr val="FE4447"/>
+                </a:solidFill>
+                <a:latin typeface="Georgia" pitchFamily="34" charset="0"/>
+                <a:ea typeface="Georgia" pitchFamily="34" charset="-122"/>
+                <a:cs typeface="Georgia" pitchFamily="34" charset="-120"/>
+              </a:rPr>
+              <a:t>Teacher notes</a:t>
+            </a:r>
+            <a:endParaRPr lang="en-US" sz="1800" dirty="0"/>
+          </a:p>
+        </p:txBody>
+      </p:sp>
+      <p:sp>
+        <p:nvSpPr>
+          <p:cNvPr id="4" name="Text 2"/>
+          <p:cNvSpPr/>
+          <p:nvPr/>
+        </p:nvSpPr>
+        <p:spPr>
+          <a:xfrm>
+            <a:off x="634901" y="883593"/>
+            <a:ext cx="8102798" cy="975122"/>
+          </a:xfrm>
+          <a:prstGeom prst="rect">
+            <a:avLst/>
+          </a:prstGeom>
+          <a:noFill/>
+          <a:ln/>
+        </p:spPr>
+        <p:txBody>
+          <a:bodyPr wrap="square" lIns="0" tIns="0" rIns="0" bIns="0" rtlCol="0" anchor="t"/>
+          <a:lstStyle/>
+          <a:p>
+            <a:pPr algn="l" marL="342900" indent="-342900">
+              <a:lnSpc>
+                <a:spcPts val="1620"/>
+              </a:lnSpc>
+              <a:spcAft>
+                <a:spcPts val="300"/>
+              </a:spcAft>
+              <a:buSzPct val="100000"/>
+              <a:buChar char="•"/>
+            </a:pPr>
+            <a:r>
+              <a:rPr lang="en-US" sz="1200" dirty="0">
+                <a:solidFill>
+                  <a:srgbClr val="1C2833"/>
+                </a:solidFill>
+                <a:latin typeface="Arial" pitchFamily="34" charset="0"/>
+                <a:ea typeface="Arial" pitchFamily="34" charset="-122"/>
+                <a:cs typeface="Arial" pitchFamily="34" charset="-120"/>
+              </a:rPr>
+              <a:t>The hardest pose for beginners is usually #6 (</a:t>
+            </a:r>
+            <a:pPr algn="l" indent="0" marL="0">
+              <a:lnSpc>
+                <a:spcPts val="1620"/>
+              </a:lnSpc>
+              <a:spcAft>
+                <a:spcPts val="300"/>
+              </a:spcAft>
+              <a:buNone/>
+            </a:pPr>
+            <a:r>
+              <a:rPr lang="en-US" sz="1200" i="1" dirty="0">
+                <a:solidFill>
+                  <a:srgbClr val="1C2833"/>
+                </a:solidFill>
+                <a:latin typeface="Arial" pitchFamily="34" charset="0"/>
+                <a:ea typeface="Arial" pitchFamily="34" charset="-122"/>
+                <a:cs typeface="Arial" pitchFamily="34" charset="-120"/>
+              </a:rPr>
+              <a:t>aṣṭāṅga-namaskāra</a:t>
+            </a:r>
+            <a:pPr algn="l" indent="0" marL="0">
+              <a:lnSpc>
+                <a:spcPts val="1620"/>
+              </a:lnSpc>
+              <a:spcAft>
+                <a:spcPts val="300"/>
+              </a:spcAft>
+              <a:buNone/>
+            </a:pPr>
+            <a:r>
+              <a:rPr lang="en-US" sz="1200" dirty="0">
+                <a:solidFill>
+                  <a:srgbClr val="1C2833"/>
+                </a:solidFill>
+                <a:latin typeface="Arial" pitchFamily="34" charset="0"/>
+                <a:ea typeface="Arial" pitchFamily="34" charset="-122"/>
+                <a:cs typeface="Arial" pitchFamily="34" charset="-120"/>
+              </a:rPr>
+              <a:t> — knees, chest, chin to mat). Common error: chest plank-down instead of dropping knees first. Cue "knees down FIRST, then chest, then chin."</a:t>
+            </a:r>
+            <a:endParaRPr lang="en-US" sz="1200" dirty="0"/>
+          </a:p>
+          <a:p>
+            <a:pPr algn="l" marL="342900" indent="-342900">
+              <a:lnSpc>
+                <a:spcPts val="1620"/>
+              </a:lnSpc>
+              <a:spcAft>
+                <a:spcPts val="300"/>
+              </a:spcAft>
+              <a:buSzPct val="100000"/>
+              <a:buChar char="•"/>
+            </a:pPr>
+            <a:r>
+              <a:rPr lang="en-US" sz="1200" dirty="0">
+                <a:solidFill>
+                  <a:srgbClr val="1C2833"/>
+                </a:solidFill>
+                <a:latin typeface="Arial" pitchFamily="34" charset="0"/>
+                <a:ea typeface="Arial" pitchFamily="34" charset="-122"/>
+                <a:cs typeface="Arial" pitchFamily="34" charset="-120"/>
+              </a:rPr>
+              <a:t>In </a:t>
+            </a:r>
+            <a:pPr algn="l" indent="0" marL="0">
+              <a:lnSpc>
+                <a:spcPts val="1620"/>
+              </a:lnSpc>
+              <a:spcAft>
+                <a:spcPts val="300"/>
+              </a:spcAft>
+              <a:buNone/>
+            </a:pPr>
+            <a:r>
+              <a:rPr lang="en-US" sz="1200" i="1" dirty="0">
+                <a:solidFill>
+                  <a:srgbClr val="1C2833"/>
+                </a:solidFill>
+                <a:latin typeface="Arial" pitchFamily="34" charset="0"/>
+                <a:ea typeface="Arial" pitchFamily="34" charset="-122"/>
+                <a:cs typeface="Arial" pitchFamily="34" charset="-120"/>
+              </a:rPr>
+              <a:t>bhujaṅgāsana</a:t>
+            </a:r>
+            <a:pPr algn="l" indent="0" marL="0">
+              <a:lnSpc>
+                <a:spcPts val="1620"/>
+              </a:lnSpc>
+              <a:spcAft>
+                <a:spcPts val="300"/>
+              </a:spcAft>
+              <a:buNone/>
+            </a:pPr>
+            <a:r>
+              <a:rPr lang="en-US" sz="1200" dirty="0">
+                <a:solidFill>
+                  <a:srgbClr val="1C2833"/>
+                </a:solidFill>
+                <a:latin typeface="Arial" pitchFamily="34" charset="0"/>
+                <a:ea typeface="Arial" pitchFamily="34" charset="-122"/>
+                <a:cs typeface="Arial" pitchFamily="34" charset="-120"/>
+              </a:rPr>
+              <a:t>, keep the elbows bent and close to the body. Don't push to full backbend.</a:t>
+            </a:r>
+            <a:endParaRPr lang="en-US" sz="1200" dirty="0"/>
+          </a:p>
+          <a:p>
+            <a:pPr algn="l" marL="342900" indent="-342900">
+              <a:lnSpc>
+                <a:spcPts val="1620"/>
+              </a:lnSpc>
+              <a:spcAft>
+                <a:spcPts val="300"/>
+              </a:spcAft>
+              <a:buSzPct val="100000"/>
+              <a:buChar char="•"/>
+            </a:pPr>
+            <a:r>
+              <a:rPr lang="en-US" sz="1200" dirty="0">
+                <a:solidFill>
+                  <a:srgbClr val="1C2833"/>
+                </a:solidFill>
+                <a:latin typeface="Arial" pitchFamily="34" charset="0"/>
+                <a:ea typeface="Arial" pitchFamily="34" charset="-122"/>
+                <a:cs typeface="Arial" pitchFamily="34" charset="-120"/>
+              </a:rPr>
+              <a:t>For students with wrist issues, modify </a:t>
+            </a:r>
+            <a:pPr algn="l" indent="0" marL="0">
+              <a:lnSpc>
+                <a:spcPts val="1620"/>
+              </a:lnSpc>
+              <a:spcAft>
+                <a:spcPts val="300"/>
+              </a:spcAft>
+              <a:buNone/>
+            </a:pPr>
+            <a:r>
+              <a:rPr lang="en-US" sz="1200" i="1" dirty="0">
+                <a:solidFill>
+                  <a:srgbClr val="1C2833"/>
+                </a:solidFill>
+                <a:latin typeface="Arial" pitchFamily="34" charset="0"/>
+                <a:ea typeface="Arial" pitchFamily="34" charset="-122"/>
+                <a:cs typeface="Arial" pitchFamily="34" charset="-120"/>
+              </a:rPr>
+              <a:t>adho-mukha-śvānāsana</a:t>
+            </a:r>
+            <a:pPr algn="l" indent="0" marL="0">
+              <a:lnSpc>
+                <a:spcPts val="1620"/>
+              </a:lnSpc>
+              <a:spcAft>
+                <a:spcPts val="300"/>
+              </a:spcAft>
+              <a:buNone/>
+            </a:pPr>
+            <a:r>
+              <a:rPr lang="en-US" sz="1200" dirty="0">
+                <a:solidFill>
+                  <a:srgbClr val="1C2833"/>
+                </a:solidFill>
+                <a:latin typeface="Arial" pitchFamily="34" charset="0"/>
+                <a:ea typeface="Arial" pitchFamily="34" charset="-122"/>
+                <a:cs typeface="Arial" pitchFamily="34" charset="-120"/>
+              </a:rPr>
+              <a:t> by going to forearms (dolphin pose) or skipping.</a:t>
+            </a:r>
+            <a:endParaRPr lang="en-US" sz="1200" dirty="0"/>
+          </a:p>
+        </p:txBody>
+      </p:sp>
+      <p:sp>
+        <p:nvSpPr>
+          <p:cNvPr id="5" name="Text 3"/>
+          <p:cNvSpPr/>
+          <p:nvPr/>
+        </p:nvSpPr>
+        <p:spPr>
+          <a:xfrm>
+            <a:off x="406301" y="4434929"/>
+            <a:ext cx="8498026" cy="213271"/>
+          </a:xfrm>
+          <a:prstGeom prst="rect">
+            <a:avLst/>
+          </a:prstGeom>
+          <a:noFill/>
+          <a:ln/>
+        </p:spPr>
+        <p:txBody>
+          <a:bodyPr wrap="square" lIns="0" tIns="0" rIns="0" bIns="0" rtlCol="0" anchor="t"/>
+          <a:lstStyle/>
+          <a:p>
+            <a:pPr algn="l" indent="0" marL="0">
+              <a:lnSpc>
+                <a:spcPts val="1680"/>
+              </a:lnSpc>
+              <a:spcBef>
+                <a:spcPts val="300"/>
+              </a:spcBef>
+              <a:spcAft>
+                <a:spcPts val="300"/>
+              </a:spcAft>
+              <a:buNone/>
+            </a:pPr>
+            <a:r>
+              <a:rPr lang="en-US" sz="1200" dirty="0">
+                <a:solidFill>
+                  <a:srgbClr val="1C2833"/>
+                </a:solidFill>
+                <a:latin typeface="Arial" pitchFamily="34" charset="0"/>
+                <a:ea typeface="Arial" pitchFamily="34" charset="-122"/>
+                <a:cs typeface="Arial" pitchFamily="34" charset="-120"/>
+              </a:rPr>
+              <a:t>Middle ·  · IKS Curriculum</a:t>
+            </a:r>
+            <a:endParaRPr lang="en-US" sz="1200" dirty="0"/>
+          </a:p>
+        </p:txBody>
+      </p:sp>
+    </p:spTree>
+  </p:cSld>
+  <p:clrMapOvr>
+    <a:masterClrMapping/>
+  </p:clrMapOvr>
+</p:sld>
+</file>
+
+<file path=ppt/slides/slide17.xml><?xml version="1.0" encoding="utf-8"?>
+<p:sld xmlns:a="http://schemas.openxmlformats.org/drawingml/2006/main" xmlns:r="http://schemas.openxmlformats.org/officeDocument/2006/relationships" xmlns:p="http://schemas.openxmlformats.org/presentationml/2006/main">
+  <p:cSld name="Slide 17">
+    <p:bg>
+      <p:bgPr>
+        <a:solidFill>
+          <a:srgbClr val="FFFFFF"/>
+        </a:solidFill>
+      </p:bgPr>
+    </p:bg>
+    <p:spTree>
+      <p:nvGrpSpPr>
+        <p:cNvPr id="1" name=""/>
+        <p:cNvGrpSpPr/>
+        <p:nvPr/>
+      </p:nvGrpSpPr>
+      <p:grpSpPr>
+        <a:xfrm>
+          <a:off x="0" y="0"/>
+          <a:ext cx="0" cy="0"/>
+          <a:chOff x="0" y="0"/>
+          <a:chExt cx="0" cy="0"/>
+        </a:xfrm>
+      </p:grpSpPr>
+      <p:sp>
+        <p:nvSpPr>
+          <p:cNvPr id="2" name="Text 0"/>
+          <p:cNvSpPr/>
+          <p:nvPr/>
+        </p:nvSpPr>
+        <p:spPr>
+          <a:xfrm>
+            <a:off x="0" y="0"/>
+            <a:ext cx="9144000" cy="101501"/>
+          </a:xfrm>
+          <a:prstGeom prst="rect">
+            <a:avLst/>
+          </a:prstGeom>
+          <a:solidFill>
+            <a:srgbClr val="277884"/>
+          </a:solidFill>
+          <a:ln/>
+        </p:spPr>
+        <p:txBody>
+          <a:bodyPr wrap="square" rtlCol="0" anchor="ctr"/>
+          <a:lstStyle/>
+          <a:p>
+            <a:pPr indent="0" marL="0">
+              <a:buNone/>
+            </a:pPr>
+            <a:endParaRPr lang="en-US" dirty="0"/>
+          </a:p>
+        </p:txBody>
+      </p:sp>
+      <p:sp>
+        <p:nvSpPr>
+          <p:cNvPr id="3" name="Text 1"/>
+          <p:cNvSpPr/>
+          <p:nvPr/>
+        </p:nvSpPr>
+        <p:spPr>
+          <a:xfrm>
+            <a:off x="406301" y="457051"/>
+            <a:ext cx="8498026" cy="274290"/>
+          </a:xfrm>
+          <a:prstGeom prst="rect">
+            <a:avLst/>
+          </a:prstGeom>
+          <a:noFill/>
+          <a:ln/>
+        </p:spPr>
+        <p:txBody>
+          <a:bodyPr wrap="square" lIns="0" tIns="0" rIns="0" bIns="0" rtlCol="0" anchor="t"/>
+          <a:lstStyle/>
+          <a:p>
+            <a:pPr algn="l" indent="0" marL="0">
+              <a:lnSpc>
+                <a:spcPts val="2160"/>
+              </a:lnSpc>
+              <a:spcBef>
+                <a:spcPts val="600"/>
+              </a:spcBef>
+              <a:spcAft>
+                <a:spcPts val="800"/>
+              </a:spcAft>
+              <a:buNone/>
+            </a:pPr>
+            <a:r>
+              <a:rPr lang="en-US" sz="1800" b="1" dirty="0">
+                <a:solidFill>
+                  <a:srgbClr val="FE4447"/>
+                </a:solidFill>
+                <a:latin typeface="Georgia" pitchFamily="34" charset="0"/>
+                <a:ea typeface="Georgia" pitchFamily="34" charset="-122"/>
+                <a:cs typeface="Georgia" pitchFamily="34" charset="-120"/>
+              </a:rPr>
+              <a:t>Citation(s) used in this lesson</a:t>
+            </a:r>
+            <a:endParaRPr lang="en-US" sz="1800" dirty="0"/>
+          </a:p>
+        </p:txBody>
+      </p:sp>
+      <p:sp>
+        <p:nvSpPr>
+          <p:cNvPr id="4" name="Text 2"/>
+          <p:cNvSpPr/>
+          <p:nvPr/>
+        </p:nvSpPr>
+        <p:spPr>
+          <a:xfrm>
+            <a:off x="634901" y="883593"/>
+            <a:ext cx="8102798" cy="487561"/>
+          </a:xfrm>
+          <a:prstGeom prst="rect">
+            <a:avLst/>
+          </a:prstGeom>
+          <a:noFill/>
+          <a:ln/>
+        </p:spPr>
+        <p:txBody>
+          <a:bodyPr wrap="square" lIns="0" tIns="0" rIns="0" bIns="0" rtlCol="0" anchor="t"/>
+          <a:lstStyle/>
+          <a:p>
+            <a:pPr algn="l" marL="342900" indent="-342900">
+              <a:lnSpc>
+                <a:spcPts val="1620"/>
+              </a:lnSpc>
+              <a:spcAft>
+                <a:spcPts val="300"/>
+              </a:spcAft>
+              <a:buSzPct val="100000"/>
+              <a:buChar char="•"/>
+            </a:pPr>
+            <a:r>
+              <a:rPr lang="en-US" sz="1200" dirty="0">
+                <a:solidFill>
+                  <a:srgbClr val="1C2833"/>
+                </a:solidFill>
+                <a:latin typeface="Arial" pitchFamily="34" charset="0"/>
+                <a:ea typeface="Arial" pitchFamily="34" charset="-122"/>
+                <a:cs typeface="Arial" pitchFamily="34" charset="-120"/>
+              </a:rPr>
+              <a:t>No new RAG citations today. Sūrya Namaskāra is a modern composition (early 20th century, codified by the Raja of Aundh); not from classical texts. Teacher reference: any modern yoga manual.</a:t>
             </a:r>
             <a:endParaRPr lang="en-US" sz="1200" dirty="0"/>
           </a:p>
@@ -3158,7 +5577,7 @@
                 <a:ea typeface="Georgia" pitchFamily="34" charset="-122"/>
                 <a:cs typeface="Georgia" pitchFamily="34" charset="-120"/>
               </a:rPr>
-              <a:t>Materials</a:t>
+              <a:t>Learning objective</a:t>
             </a:r>
             <a:endParaRPr lang="en-US" sz="1800" dirty="0"/>
           </a:p>
@@ -3173,7 +5592,7 @@
         <p:spPr>
           <a:xfrm>
             <a:off x="406301" y="870942"/>
-            <a:ext cx="8498026" cy="213271"/>
+            <a:ext cx="8498026" cy="426541"/>
           </a:xfrm>
           <a:prstGeom prst="rect">
             <a:avLst/>
@@ -3206,7 +5625,7 @@
                 <a:ea typeface="Arial" pitchFamily="34" charset="-122"/>
                 <a:cs typeface="Arial" pitchFamily="34" charset="-120"/>
               </a:rPr>
-              <a:t>– Mats. Sūrya Namaskāra wall poster (12 poses with names). – Stopwatch.</a:t>
+              <a:t>By the end of this lesson, students will name and demonstrate the 12 poses of Sūrya Namaskāra in order, performed slowly without breath co-ordination yet.</a:t>
             </a:r>
             <a:endParaRPr lang="en-US" sz="1200" dirty="0"/>
           </a:p>
@@ -3364,7 +5783,7 @@
                 <a:ea typeface="Georgia" pitchFamily="34" charset="-122"/>
                 <a:cs typeface="Georgia" pitchFamily="34" charset="-120"/>
               </a:rPr>
-              <a:t>Vocabulary introduced today</a:t>
+              <a:t>Materials</a:t>
             </a:r>
             <a:endParaRPr lang="en-US" sz="1800" dirty="0"/>
           </a:p>
@@ -3379,7 +5798,7 @@
         <p:spPr>
           <a:xfrm>
             <a:off x="634901" y="883593"/>
-            <a:ext cx="8102798" cy="2232124"/>
+            <a:ext cx="8102798" cy="525661"/>
           </a:xfrm>
           <a:prstGeom prst="rect">
             <a:avLst/>
@@ -3402,26 +5821,6 @@
               <a:buChar char="•"/>
             </a:pPr>
             <a:r>
-              <a:rPr lang="en-US" sz="1200" i="1" dirty="0">
-                <a:solidFill>
-                  <a:srgbClr val="1C2833"/>
-                </a:solidFill>
-                <a:latin typeface="Arial" pitchFamily="34" charset="0"/>
-                <a:ea typeface="Arial" pitchFamily="34" charset="-122"/>
-                <a:cs typeface="Arial" pitchFamily="34" charset="-120"/>
-              </a:rPr>
-              <a:t>Sūrya Namaskāra</a:t>
-            </a:r>
-            <a:pPr algn="l" indent="0" marL="0">
-              <a:lnSpc>
-                <a:spcPts val="1620"/>
-              </a:lnSpc>
-              <a:spcAft>
-                <a:spcPts val="300"/>
-              </a:spcAft>
-              <a:buNone/>
-            </a:pPr>
-            <a:r>
               <a:rPr lang="en-US" sz="1200" dirty="0">
                 <a:solidFill>
                   <a:srgbClr val="1C2833"/>
@@ -3430,7 +5829,7 @@
                 <a:ea typeface="Arial" pitchFamily="34" charset="-122"/>
                 <a:cs typeface="Arial" pitchFamily="34" charset="-120"/>
               </a:rPr>
-              <a:t> (IAST: sūrya-namaskāra; lit. "salutation to the sun") — the 12-pose flowing sequence.</a:t>
+              <a:t>Mats. Sūrya Namaskāra wall poster (12 poses with names).</a:t>
             </a:r>
             <a:endParaRPr lang="en-US" sz="1200" dirty="0"/>
           </a:p>
@@ -3446,26 +5845,6 @@
               <a:buChar char="•"/>
             </a:pPr>
             <a:r>
-              <a:rPr lang="en-US" sz="1200" i="1" dirty="0">
-                <a:solidFill>
-                  <a:srgbClr val="1C2833"/>
-                </a:solidFill>
-                <a:latin typeface="Arial" pitchFamily="34" charset="0"/>
-                <a:ea typeface="Arial" pitchFamily="34" charset="-122"/>
-                <a:cs typeface="Arial" pitchFamily="34" charset="-120"/>
-              </a:rPr>
-              <a:t>praṇāmāsana</a:t>
-            </a:r>
-            <a:pPr algn="l" indent="0" marL="0">
-              <a:lnSpc>
-                <a:spcPts val="1620"/>
-              </a:lnSpc>
-              <a:spcAft>
-                <a:spcPts val="300"/>
-              </a:spcAft>
-              <a:buNone/>
-            </a:pPr>
-            <a:r>
               <a:rPr lang="en-US" sz="1200" dirty="0">
                 <a:solidFill>
                   <a:srgbClr val="1C2833"/>
@@ -3474,355 +5853,7 @@
                 <a:ea typeface="Arial" pitchFamily="34" charset="-122"/>
                 <a:cs typeface="Arial" pitchFamily="34" charset="-120"/>
               </a:rPr>
-              <a:t> — prayer pose</a:t>
-            </a:r>
-            <a:endParaRPr lang="en-US" sz="1200" dirty="0"/>
-          </a:p>
-          <a:p>
-            <a:pPr algn="l" marL="342900" indent="-342900">
-              <a:lnSpc>
-                <a:spcPts val="1620"/>
-              </a:lnSpc>
-              <a:spcAft>
-                <a:spcPts val="300"/>
-              </a:spcAft>
-              <a:buSzPct val="100000"/>
-              <a:buChar char="•"/>
-            </a:pPr>
-            <a:r>
-              <a:rPr lang="en-US" sz="1200" i="1" dirty="0">
-                <a:solidFill>
-                  <a:srgbClr val="1C2833"/>
-                </a:solidFill>
-                <a:latin typeface="Arial" pitchFamily="34" charset="0"/>
-                <a:ea typeface="Arial" pitchFamily="34" charset="-122"/>
-                <a:cs typeface="Arial" pitchFamily="34" charset="-120"/>
-              </a:rPr>
-              <a:t>hasta-uttānāsana</a:t>
-            </a:r>
-            <a:pPr algn="l" indent="0" marL="0">
-              <a:lnSpc>
-                <a:spcPts val="1620"/>
-              </a:lnSpc>
-              <a:spcAft>
-                <a:spcPts val="300"/>
-              </a:spcAft>
-              <a:buNone/>
-            </a:pPr>
-            <a:r>
-              <a:rPr lang="en-US" sz="1200" dirty="0">
-                <a:solidFill>
-                  <a:srgbClr val="1C2833"/>
-                </a:solidFill>
-                <a:latin typeface="Arial" pitchFamily="34" charset="0"/>
-                <a:ea typeface="Arial" pitchFamily="34" charset="-122"/>
-                <a:cs typeface="Arial" pitchFamily="34" charset="-120"/>
-              </a:rPr>
-              <a:t> — raised hands</a:t>
-            </a:r>
-            <a:endParaRPr lang="en-US" sz="1200" dirty="0"/>
-          </a:p>
-          <a:p>
-            <a:pPr algn="l" marL="342900" indent="-342900">
-              <a:lnSpc>
-                <a:spcPts val="1620"/>
-              </a:lnSpc>
-              <a:spcAft>
-                <a:spcPts val="300"/>
-              </a:spcAft>
-              <a:buSzPct val="100000"/>
-              <a:buChar char="•"/>
-            </a:pPr>
-            <a:r>
-              <a:rPr lang="en-US" sz="1200" i="1" dirty="0">
-                <a:solidFill>
-                  <a:srgbClr val="1C2833"/>
-                </a:solidFill>
-                <a:latin typeface="Arial" pitchFamily="34" charset="0"/>
-                <a:ea typeface="Arial" pitchFamily="34" charset="-122"/>
-                <a:cs typeface="Arial" pitchFamily="34" charset="-120"/>
-              </a:rPr>
-              <a:t>uttānāsana</a:t>
-            </a:r>
-            <a:pPr algn="l" indent="0" marL="0">
-              <a:lnSpc>
-                <a:spcPts val="1620"/>
-              </a:lnSpc>
-              <a:spcAft>
-                <a:spcPts val="300"/>
-              </a:spcAft>
-              <a:buNone/>
-            </a:pPr>
-            <a:r>
-              <a:rPr lang="en-US" sz="1200" dirty="0">
-                <a:solidFill>
-                  <a:srgbClr val="1C2833"/>
-                </a:solidFill>
-                <a:latin typeface="Arial" pitchFamily="34" charset="0"/>
-                <a:ea typeface="Arial" pitchFamily="34" charset="-122"/>
-                <a:cs typeface="Arial" pitchFamily="34" charset="-120"/>
-              </a:rPr>
-              <a:t> — standing forward fold</a:t>
-            </a:r>
-            <a:endParaRPr lang="en-US" sz="1200" dirty="0"/>
-          </a:p>
-          <a:p>
-            <a:pPr algn="l" marL="342900" indent="-342900">
-              <a:lnSpc>
-                <a:spcPts val="1620"/>
-              </a:lnSpc>
-              <a:spcAft>
-                <a:spcPts val="300"/>
-              </a:spcAft>
-              <a:buSzPct val="100000"/>
-              <a:buChar char="•"/>
-            </a:pPr>
-            <a:r>
-              <a:rPr lang="en-US" sz="1200" i="1" dirty="0">
-                <a:solidFill>
-                  <a:srgbClr val="1C2833"/>
-                </a:solidFill>
-                <a:latin typeface="Arial" pitchFamily="34" charset="0"/>
-                <a:ea typeface="Arial" pitchFamily="34" charset="-122"/>
-                <a:cs typeface="Arial" pitchFamily="34" charset="-120"/>
-              </a:rPr>
-              <a:t>aśva-sañcalanāsana</a:t>
-            </a:r>
-            <a:pPr algn="l" indent="0" marL="0">
-              <a:lnSpc>
-                <a:spcPts val="1620"/>
-              </a:lnSpc>
-              <a:spcAft>
-                <a:spcPts val="300"/>
-              </a:spcAft>
-              <a:buNone/>
-            </a:pPr>
-            <a:r>
-              <a:rPr lang="en-US" sz="1200" dirty="0">
-                <a:solidFill>
-                  <a:srgbClr val="1C2833"/>
-                </a:solidFill>
-                <a:latin typeface="Arial" pitchFamily="34" charset="0"/>
-                <a:ea typeface="Arial" pitchFamily="34" charset="-122"/>
-                <a:cs typeface="Arial" pitchFamily="34" charset="-120"/>
-              </a:rPr>
-              <a:t> — lunge (literally "horse-stride pose")</a:t>
-            </a:r>
-            <a:endParaRPr lang="en-US" sz="1200" dirty="0"/>
-          </a:p>
-          <a:p>
-            <a:pPr algn="l" marL="342900" indent="-342900">
-              <a:lnSpc>
-                <a:spcPts val="1620"/>
-              </a:lnSpc>
-              <a:spcAft>
-                <a:spcPts val="300"/>
-              </a:spcAft>
-              <a:buSzPct val="100000"/>
-              <a:buChar char="•"/>
-            </a:pPr>
-            <a:r>
-              <a:rPr lang="en-US" sz="1200" i="1" dirty="0">
-                <a:solidFill>
-                  <a:srgbClr val="1C2833"/>
-                </a:solidFill>
-                <a:latin typeface="Arial" pitchFamily="34" charset="0"/>
-                <a:ea typeface="Arial" pitchFamily="34" charset="-122"/>
-                <a:cs typeface="Arial" pitchFamily="34" charset="-120"/>
-              </a:rPr>
-              <a:t>daṇḍāsana</a:t>
-            </a:r>
-            <a:pPr algn="l" indent="0" marL="0">
-              <a:lnSpc>
-                <a:spcPts val="1620"/>
-              </a:lnSpc>
-              <a:spcAft>
-                <a:spcPts val="300"/>
-              </a:spcAft>
-              <a:buNone/>
-            </a:pPr>
-            <a:r>
-              <a:rPr lang="en-US" sz="1200" dirty="0">
-                <a:solidFill>
-                  <a:srgbClr val="1C2833"/>
-                </a:solidFill>
-                <a:latin typeface="Arial" pitchFamily="34" charset="0"/>
-                <a:ea typeface="Arial" pitchFamily="34" charset="-122"/>
-                <a:cs typeface="Arial" pitchFamily="34" charset="-120"/>
-              </a:rPr>
-              <a:t> / </a:t>
-            </a:r>
-            <a:pPr algn="l" indent="0" marL="0">
-              <a:lnSpc>
-                <a:spcPts val="1620"/>
-              </a:lnSpc>
-              <a:spcAft>
-                <a:spcPts val="300"/>
-              </a:spcAft>
-              <a:buNone/>
-            </a:pPr>
-            <a:r>
-              <a:rPr lang="en-US" sz="1200" i="1" dirty="0">
-                <a:solidFill>
-                  <a:srgbClr val="1C2833"/>
-                </a:solidFill>
-                <a:latin typeface="Arial" pitchFamily="34" charset="0"/>
-                <a:ea typeface="Arial" pitchFamily="34" charset="-122"/>
-                <a:cs typeface="Arial" pitchFamily="34" charset="-120"/>
-              </a:rPr>
-              <a:t>catur-aṅga</a:t>
-            </a:r>
-            <a:pPr algn="l" indent="0" marL="0">
-              <a:lnSpc>
-                <a:spcPts val="1620"/>
-              </a:lnSpc>
-              <a:spcAft>
-                <a:spcPts val="300"/>
-              </a:spcAft>
-              <a:buNone/>
-            </a:pPr>
-            <a:r>
-              <a:rPr lang="en-US" sz="1200" dirty="0">
-                <a:solidFill>
-                  <a:srgbClr val="1C2833"/>
-                </a:solidFill>
-                <a:latin typeface="Arial" pitchFamily="34" charset="0"/>
-                <a:ea typeface="Arial" pitchFamily="34" charset="-122"/>
-                <a:cs typeface="Arial" pitchFamily="34" charset="-120"/>
-              </a:rPr>
-              <a:t> — plank / four-limbed staff</a:t>
-            </a:r>
-            <a:endParaRPr lang="en-US" sz="1200" dirty="0"/>
-          </a:p>
-          <a:p>
-            <a:pPr algn="l" marL="342900" indent="-342900">
-              <a:lnSpc>
-                <a:spcPts val="1620"/>
-              </a:lnSpc>
-              <a:spcAft>
-                <a:spcPts val="300"/>
-              </a:spcAft>
-              <a:buSzPct val="100000"/>
-              <a:buChar char="•"/>
-            </a:pPr>
-            <a:r>
-              <a:rPr lang="en-US" sz="1200" i="1" dirty="0">
-                <a:solidFill>
-                  <a:srgbClr val="1C2833"/>
-                </a:solidFill>
-                <a:latin typeface="Arial" pitchFamily="34" charset="0"/>
-                <a:ea typeface="Arial" pitchFamily="34" charset="-122"/>
-                <a:cs typeface="Arial" pitchFamily="34" charset="-120"/>
-              </a:rPr>
-              <a:t>aṣṭāṅga-namaskāra</a:t>
-            </a:r>
-            <a:pPr algn="l" indent="0" marL="0">
-              <a:lnSpc>
-                <a:spcPts val="1620"/>
-              </a:lnSpc>
-              <a:spcAft>
-                <a:spcPts val="300"/>
-              </a:spcAft>
-              <a:buNone/>
-            </a:pPr>
-            <a:r>
-              <a:rPr lang="en-US" sz="1200" dirty="0">
-                <a:solidFill>
-                  <a:srgbClr val="1C2833"/>
-                </a:solidFill>
-                <a:latin typeface="Arial" pitchFamily="34" charset="0"/>
-                <a:ea typeface="Arial" pitchFamily="34" charset="-122"/>
-                <a:cs typeface="Arial" pitchFamily="34" charset="-120"/>
-              </a:rPr>
-              <a:t> — eight-limbed salutation (knees-chest-chin)</a:t>
-            </a:r>
-            <a:endParaRPr lang="en-US" sz="1200" dirty="0"/>
-          </a:p>
-          <a:p>
-            <a:pPr algn="l" marL="342900" indent="-342900">
-              <a:lnSpc>
-                <a:spcPts val="1620"/>
-              </a:lnSpc>
-              <a:spcAft>
-                <a:spcPts val="300"/>
-              </a:spcAft>
-              <a:buSzPct val="100000"/>
-              <a:buChar char="•"/>
-            </a:pPr>
-            <a:r>
-              <a:rPr lang="en-US" sz="1200" i="1" dirty="0">
-                <a:solidFill>
-                  <a:srgbClr val="1C2833"/>
-                </a:solidFill>
-                <a:latin typeface="Arial" pitchFamily="34" charset="0"/>
-                <a:ea typeface="Arial" pitchFamily="34" charset="-122"/>
-                <a:cs typeface="Arial" pitchFamily="34" charset="-120"/>
-              </a:rPr>
-              <a:t>bhujaṅgāsana</a:t>
-            </a:r>
-            <a:pPr algn="l" indent="0" marL="0">
-              <a:lnSpc>
-                <a:spcPts val="1620"/>
-              </a:lnSpc>
-              <a:spcAft>
-                <a:spcPts val="300"/>
-              </a:spcAft>
-              <a:buNone/>
-            </a:pPr>
-            <a:r>
-              <a:rPr lang="en-US" sz="1200" dirty="0">
-                <a:solidFill>
-                  <a:srgbClr val="1C2833"/>
-                </a:solidFill>
-                <a:latin typeface="Arial" pitchFamily="34" charset="0"/>
-                <a:ea typeface="Arial" pitchFamily="34" charset="-122"/>
-                <a:cs typeface="Arial" pitchFamily="34" charset="-120"/>
-              </a:rPr>
-              <a:t> — cobra</a:t>
-            </a:r>
-            <a:endParaRPr lang="en-US" sz="1200" dirty="0"/>
-          </a:p>
-          <a:p>
-            <a:pPr algn="l" marL="342900" indent="-342900">
-              <a:lnSpc>
-                <a:spcPts val="1620"/>
-              </a:lnSpc>
-              <a:spcAft>
-                <a:spcPts val="300"/>
-              </a:spcAft>
-              <a:buSzPct val="100000"/>
-              <a:buChar char="•"/>
-            </a:pPr>
-            <a:r>
-              <a:rPr lang="en-US" sz="1200" i="1" dirty="0">
-                <a:solidFill>
-                  <a:srgbClr val="1C2833"/>
-                </a:solidFill>
-                <a:latin typeface="Arial" pitchFamily="34" charset="0"/>
-                <a:ea typeface="Arial" pitchFamily="34" charset="-122"/>
-                <a:cs typeface="Arial" pitchFamily="34" charset="-120"/>
-              </a:rPr>
-              <a:t>adho-mukha-śvānāsana</a:t>
-            </a:r>
-            <a:pPr algn="l" indent="0" marL="0">
-              <a:lnSpc>
-                <a:spcPts val="1620"/>
-              </a:lnSpc>
-              <a:spcAft>
-                <a:spcPts val="300"/>
-              </a:spcAft>
-              <a:buNone/>
-            </a:pPr>
-            <a:r>
-              <a:rPr lang="en-US" sz="1200" dirty="0">
-                <a:solidFill>
-                  <a:srgbClr val="1C2833"/>
-                </a:solidFill>
-                <a:latin typeface="Arial" pitchFamily="34" charset="0"/>
-                <a:ea typeface="Arial" pitchFamily="34" charset="-122"/>
-                <a:cs typeface="Arial" pitchFamily="34" charset="-120"/>
-              </a:rPr>
-              <a:t> — downward-facing dog</a:t>
+              <a:t>Stopwatch.</a:t>
             </a:r>
             <a:endParaRPr lang="en-US" sz="1200" dirty="0"/>
           </a:p>
@@ -3980,7 +6011,7 @@
                 <a:ea typeface="Georgia" pitchFamily="34" charset="-122"/>
                 <a:cs typeface="Georgia" pitchFamily="34" charset="-120"/>
               </a:rPr>
-              <a:t>Lesson flow</a:t>
+              <a:t>Vocabulary introduced today</a:t>
             </a:r>
             <a:endParaRPr lang="en-US" sz="1800" dirty="0"/>
           </a:p>
@@ -3989,6 +6020,464 @@
       <p:sp>
         <p:nvSpPr>
           <p:cNvPr id="4" name="Text 2"/>
+          <p:cNvSpPr/>
+          <p:nvPr/>
+        </p:nvSpPr>
+        <p:spPr>
+          <a:xfrm>
+            <a:off x="634901" y="883593"/>
+            <a:ext cx="8102798" cy="2232124"/>
+          </a:xfrm>
+          <a:prstGeom prst="rect">
+            <a:avLst/>
+          </a:prstGeom>
+          <a:noFill/>
+          <a:ln/>
+        </p:spPr>
+        <p:txBody>
+          <a:bodyPr wrap="square" lIns="0" tIns="0" rIns="0" bIns="0" rtlCol="0" anchor="t"/>
+          <a:lstStyle/>
+          <a:p>
+            <a:pPr algn="l" marL="342900" indent="-342900">
+              <a:lnSpc>
+                <a:spcPts val="1620"/>
+              </a:lnSpc>
+              <a:spcAft>
+                <a:spcPts val="300"/>
+              </a:spcAft>
+              <a:buSzPct val="100000"/>
+              <a:buChar char="•"/>
+            </a:pPr>
+            <a:r>
+              <a:rPr lang="en-US" sz="1200" i="1" dirty="0">
+                <a:solidFill>
+                  <a:srgbClr val="1C2833"/>
+                </a:solidFill>
+                <a:latin typeface="Arial" pitchFamily="34" charset="0"/>
+                <a:ea typeface="Arial" pitchFamily="34" charset="-122"/>
+                <a:cs typeface="Arial" pitchFamily="34" charset="-120"/>
+              </a:rPr>
+              <a:t>Sūrya Namaskāra</a:t>
+            </a:r>
+            <a:pPr algn="l" indent="0" marL="0">
+              <a:lnSpc>
+                <a:spcPts val="1620"/>
+              </a:lnSpc>
+              <a:spcAft>
+                <a:spcPts val="300"/>
+              </a:spcAft>
+              <a:buNone/>
+            </a:pPr>
+            <a:r>
+              <a:rPr lang="en-US" sz="1200" dirty="0">
+                <a:solidFill>
+                  <a:srgbClr val="1C2833"/>
+                </a:solidFill>
+                <a:latin typeface="Arial" pitchFamily="34" charset="0"/>
+                <a:ea typeface="Arial" pitchFamily="34" charset="-122"/>
+                <a:cs typeface="Arial" pitchFamily="34" charset="-120"/>
+              </a:rPr>
+              <a:t> (IAST: sūrya-namaskāra; lit. "salutation to the sun") — the 12-pose flowing sequence.</a:t>
+            </a:r>
+            <a:endParaRPr lang="en-US" sz="1200" dirty="0"/>
+          </a:p>
+          <a:p>
+            <a:pPr algn="l" marL="342900" indent="-342900">
+              <a:lnSpc>
+                <a:spcPts val="1620"/>
+              </a:lnSpc>
+              <a:spcAft>
+                <a:spcPts val="300"/>
+              </a:spcAft>
+              <a:buSzPct val="100000"/>
+              <a:buChar char="•"/>
+            </a:pPr>
+            <a:r>
+              <a:rPr lang="en-US" sz="1200" i="1" dirty="0">
+                <a:solidFill>
+                  <a:srgbClr val="1C2833"/>
+                </a:solidFill>
+                <a:latin typeface="Arial" pitchFamily="34" charset="0"/>
+                <a:ea typeface="Arial" pitchFamily="34" charset="-122"/>
+                <a:cs typeface="Arial" pitchFamily="34" charset="-120"/>
+              </a:rPr>
+              <a:t>praṇāmāsana</a:t>
+            </a:r>
+            <a:pPr algn="l" indent="0" marL="0">
+              <a:lnSpc>
+                <a:spcPts val="1620"/>
+              </a:lnSpc>
+              <a:spcAft>
+                <a:spcPts val="300"/>
+              </a:spcAft>
+              <a:buNone/>
+            </a:pPr>
+            <a:r>
+              <a:rPr lang="en-US" sz="1200" dirty="0">
+                <a:solidFill>
+                  <a:srgbClr val="1C2833"/>
+                </a:solidFill>
+                <a:latin typeface="Arial" pitchFamily="34" charset="0"/>
+                <a:ea typeface="Arial" pitchFamily="34" charset="-122"/>
+                <a:cs typeface="Arial" pitchFamily="34" charset="-120"/>
+              </a:rPr>
+              <a:t> — prayer pose</a:t>
+            </a:r>
+            <a:endParaRPr lang="en-US" sz="1200" dirty="0"/>
+          </a:p>
+          <a:p>
+            <a:pPr algn="l" marL="342900" indent="-342900">
+              <a:lnSpc>
+                <a:spcPts val="1620"/>
+              </a:lnSpc>
+              <a:spcAft>
+                <a:spcPts val="300"/>
+              </a:spcAft>
+              <a:buSzPct val="100000"/>
+              <a:buChar char="•"/>
+            </a:pPr>
+            <a:r>
+              <a:rPr lang="en-US" sz="1200" i="1" dirty="0">
+                <a:solidFill>
+                  <a:srgbClr val="1C2833"/>
+                </a:solidFill>
+                <a:latin typeface="Arial" pitchFamily="34" charset="0"/>
+                <a:ea typeface="Arial" pitchFamily="34" charset="-122"/>
+                <a:cs typeface="Arial" pitchFamily="34" charset="-120"/>
+              </a:rPr>
+              <a:t>hasta-uttānāsana</a:t>
+            </a:r>
+            <a:pPr algn="l" indent="0" marL="0">
+              <a:lnSpc>
+                <a:spcPts val="1620"/>
+              </a:lnSpc>
+              <a:spcAft>
+                <a:spcPts val="300"/>
+              </a:spcAft>
+              <a:buNone/>
+            </a:pPr>
+            <a:r>
+              <a:rPr lang="en-US" sz="1200" dirty="0">
+                <a:solidFill>
+                  <a:srgbClr val="1C2833"/>
+                </a:solidFill>
+                <a:latin typeface="Arial" pitchFamily="34" charset="0"/>
+                <a:ea typeface="Arial" pitchFamily="34" charset="-122"/>
+                <a:cs typeface="Arial" pitchFamily="34" charset="-120"/>
+              </a:rPr>
+              <a:t> — raised hands</a:t>
+            </a:r>
+            <a:endParaRPr lang="en-US" sz="1200" dirty="0"/>
+          </a:p>
+          <a:p>
+            <a:pPr algn="l" marL="342900" indent="-342900">
+              <a:lnSpc>
+                <a:spcPts val="1620"/>
+              </a:lnSpc>
+              <a:spcAft>
+                <a:spcPts val="300"/>
+              </a:spcAft>
+              <a:buSzPct val="100000"/>
+              <a:buChar char="•"/>
+            </a:pPr>
+            <a:r>
+              <a:rPr lang="en-US" sz="1200" i="1" dirty="0">
+                <a:solidFill>
+                  <a:srgbClr val="1C2833"/>
+                </a:solidFill>
+                <a:latin typeface="Arial" pitchFamily="34" charset="0"/>
+                <a:ea typeface="Arial" pitchFamily="34" charset="-122"/>
+                <a:cs typeface="Arial" pitchFamily="34" charset="-120"/>
+              </a:rPr>
+              <a:t>uttānāsana</a:t>
+            </a:r>
+            <a:pPr algn="l" indent="0" marL="0">
+              <a:lnSpc>
+                <a:spcPts val="1620"/>
+              </a:lnSpc>
+              <a:spcAft>
+                <a:spcPts val="300"/>
+              </a:spcAft>
+              <a:buNone/>
+            </a:pPr>
+            <a:r>
+              <a:rPr lang="en-US" sz="1200" dirty="0">
+                <a:solidFill>
+                  <a:srgbClr val="1C2833"/>
+                </a:solidFill>
+                <a:latin typeface="Arial" pitchFamily="34" charset="0"/>
+                <a:ea typeface="Arial" pitchFamily="34" charset="-122"/>
+                <a:cs typeface="Arial" pitchFamily="34" charset="-120"/>
+              </a:rPr>
+              <a:t> — standing forward fold</a:t>
+            </a:r>
+            <a:endParaRPr lang="en-US" sz="1200" dirty="0"/>
+          </a:p>
+          <a:p>
+            <a:pPr algn="l" marL="342900" indent="-342900">
+              <a:lnSpc>
+                <a:spcPts val="1620"/>
+              </a:lnSpc>
+              <a:spcAft>
+                <a:spcPts val="300"/>
+              </a:spcAft>
+              <a:buSzPct val="100000"/>
+              <a:buChar char="•"/>
+            </a:pPr>
+            <a:r>
+              <a:rPr lang="en-US" sz="1200" i="1" dirty="0">
+                <a:solidFill>
+                  <a:srgbClr val="1C2833"/>
+                </a:solidFill>
+                <a:latin typeface="Arial" pitchFamily="34" charset="0"/>
+                <a:ea typeface="Arial" pitchFamily="34" charset="-122"/>
+                <a:cs typeface="Arial" pitchFamily="34" charset="-120"/>
+              </a:rPr>
+              <a:t>aśva-sañcalanāsana</a:t>
+            </a:r>
+            <a:pPr algn="l" indent="0" marL="0">
+              <a:lnSpc>
+                <a:spcPts val="1620"/>
+              </a:lnSpc>
+              <a:spcAft>
+                <a:spcPts val="300"/>
+              </a:spcAft>
+              <a:buNone/>
+            </a:pPr>
+            <a:r>
+              <a:rPr lang="en-US" sz="1200" dirty="0">
+                <a:solidFill>
+                  <a:srgbClr val="1C2833"/>
+                </a:solidFill>
+                <a:latin typeface="Arial" pitchFamily="34" charset="0"/>
+                <a:ea typeface="Arial" pitchFamily="34" charset="-122"/>
+                <a:cs typeface="Arial" pitchFamily="34" charset="-120"/>
+              </a:rPr>
+              <a:t> — lunge (literally "horse-stride pose")</a:t>
+            </a:r>
+            <a:endParaRPr lang="en-US" sz="1200" dirty="0"/>
+          </a:p>
+          <a:p>
+            <a:pPr algn="l" marL="342900" indent="-342900">
+              <a:lnSpc>
+                <a:spcPts val="1620"/>
+              </a:lnSpc>
+              <a:spcAft>
+                <a:spcPts val="300"/>
+              </a:spcAft>
+              <a:buSzPct val="100000"/>
+              <a:buChar char="•"/>
+            </a:pPr>
+            <a:r>
+              <a:rPr lang="en-US" sz="1200" i="1" dirty="0">
+                <a:solidFill>
+                  <a:srgbClr val="1C2833"/>
+                </a:solidFill>
+                <a:latin typeface="Arial" pitchFamily="34" charset="0"/>
+                <a:ea typeface="Arial" pitchFamily="34" charset="-122"/>
+                <a:cs typeface="Arial" pitchFamily="34" charset="-120"/>
+              </a:rPr>
+              <a:t>daṇḍāsana</a:t>
+            </a:r>
+            <a:pPr algn="l" indent="0" marL="0">
+              <a:lnSpc>
+                <a:spcPts val="1620"/>
+              </a:lnSpc>
+              <a:spcAft>
+                <a:spcPts val="300"/>
+              </a:spcAft>
+              <a:buNone/>
+            </a:pPr>
+            <a:r>
+              <a:rPr lang="en-US" sz="1200" dirty="0">
+                <a:solidFill>
+                  <a:srgbClr val="1C2833"/>
+                </a:solidFill>
+                <a:latin typeface="Arial" pitchFamily="34" charset="0"/>
+                <a:ea typeface="Arial" pitchFamily="34" charset="-122"/>
+                <a:cs typeface="Arial" pitchFamily="34" charset="-120"/>
+              </a:rPr>
+              <a:t> / </a:t>
+            </a:r>
+            <a:pPr algn="l" indent="0" marL="0">
+              <a:lnSpc>
+                <a:spcPts val="1620"/>
+              </a:lnSpc>
+              <a:spcAft>
+                <a:spcPts val="300"/>
+              </a:spcAft>
+              <a:buNone/>
+            </a:pPr>
+            <a:r>
+              <a:rPr lang="en-US" sz="1200" i="1" dirty="0">
+                <a:solidFill>
+                  <a:srgbClr val="1C2833"/>
+                </a:solidFill>
+                <a:latin typeface="Arial" pitchFamily="34" charset="0"/>
+                <a:ea typeface="Arial" pitchFamily="34" charset="-122"/>
+                <a:cs typeface="Arial" pitchFamily="34" charset="-120"/>
+              </a:rPr>
+              <a:t>catur-aṅga</a:t>
+            </a:r>
+            <a:pPr algn="l" indent="0" marL="0">
+              <a:lnSpc>
+                <a:spcPts val="1620"/>
+              </a:lnSpc>
+              <a:spcAft>
+                <a:spcPts val="300"/>
+              </a:spcAft>
+              <a:buNone/>
+            </a:pPr>
+            <a:r>
+              <a:rPr lang="en-US" sz="1200" dirty="0">
+                <a:solidFill>
+                  <a:srgbClr val="1C2833"/>
+                </a:solidFill>
+                <a:latin typeface="Arial" pitchFamily="34" charset="0"/>
+                <a:ea typeface="Arial" pitchFamily="34" charset="-122"/>
+                <a:cs typeface="Arial" pitchFamily="34" charset="-120"/>
+              </a:rPr>
+              <a:t> — plank / four-limbed staff</a:t>
+            </a:r>
+            <a:endParaRPr lang="en-US" sz="1200" dirty="0"/>
+          </a:p>
+          <a:p>
+            <a:pPr algn="l" marL="342900" indent="-342900">
+              <a:lnSpc>
+                <a:spcPts val="1620"/>
+              </a:lnSpc>
+              <a:spcAft>
+                <a:spcPts val="300"/>
+              </a:spcAft>
+              <a:buSzPct val="100000"/>
+              <a:buChar char="•"/>
+            </a:pPr>
+            <a:r>
+              <a:rPr lang="en-US" sz="1200" i="1" dirty="0">
+                <a:solidFill>
+                  <a:srgbClr val="1C2833"/>
+                </a:solidFill>
+                <a:latin typeface="Arial" pitchFamily="34" charset="0"/>
+                <a:ea typeface="Arial" pitchFamily="34" charset="-122"/>
+                <a:cs typeface="Arial" pitchFamily="34" charset="-120"/>
+              </a:rPr>
+              <a:t>aṣṭāṅga-namaskāra</a:t>
+            </a:r>
+            <a:pPr algn="l" indent="0" marL="0">
+              <a:lnSpc>
+                <a:spcPts val="1620"/>
+              </a:lnSpc>
+              <a:spcAft>
+                <a:spcPts val="300"/>
+              </a:spcAft>
+              <a:buNone/>
+            </a:pPr>
+            <a:r>
+              <a:rPr lang="en-US" sz="1200" dirty="0">
+                <a:solidFill>
+                  <a:srgbClr val="1C2833"/>
+                </a:solidFill>
+                <a:latin typeface="Arial" pitchFamily="34" charset="0"/>
+                <a:ea typeface="Arial" pitchFamily="34" charset="-122"/>
+                <a:cs typeface="Arial" pitchFamily="34" charset="-120"/>
+              </a:rPr>
+              <a:t> — eight-limbed salutation (knees-chest-chin)</a:t>
+            </a:r>
+            <a:endParaRPr lang="en-US" sz="1200" dirty="0"/>
+          </a:p>
+          <a:p>
+            <a:pPr algn="l" marL="342900" indent="-342900">
+              <a:lnSpc>
+                <a:spcPts val="1620"/>
+              </a:lnSpc>
+              <a:spcAft>
+                <a:spcPts val="300"/>
+              </a:spcAft>
+              <a:buSzPct val="100000"/>
+              <a:buChar char="•"/>
+            </a:pPr>
+            <a:r>
+              <a:rPr lang="en-US" sz="1200" i="1" dirty="0">
+                <a:solidFill>
+                  <a:srgbClr val="1C2833"/>
+                </a:solidFill>
+                <a:latin typeface="Arial" pitchFamily="34" charset="0"/>
+                <a:ea typeface="Arial" pitchFamily="34" charset="-122"/>
+                <a:cs typeface="Arial" pitchFamily="34" charset="-120"/>
+              </a:rPr>
+              <a:t>bhujaṅgāsana</a:t>
+            </a:r>
+            <a:pPr algn="l" indent="0" marL="0">
+              <a:lnSpc>
+                <a:spcPts val="1620"/>
+              </a:lnSpc>
+              <a:spcAft>
+                <a:spcPts val="300"/>
+              </a:spcAft>
+              <a:buNone/>
+            </a:pPr>
+            <a:r>
+              <a:rPr lang="en-US" sz="1200" dirty="0">
+                <a:solidFill>
+                  <a:srgbClr val="1C2833"/>
+                </a:solidFill>
+                <a:latin typeface="Arial" pitchFamily="34" charset="0"/>
+                <a:ea typeface="Arial" pitchFamily="34" charset="-122"/>
+                <a:cs typeface="Arial" pitchFamily="34" charset="-120"/>
+              </a:rPr>
+              <a:t> — cobra</a:t>
+            </a:r>
+            <a:endParaRPr lang="en-US" sz="1200" dirty="0"/>
+          </a:p>
+          <a:p>
+            <a:pPr algn="l" marL="342900" indent="-342900">
+              <a:lnSpc>
+                <a:spcPts val="1620"/>
+              </a:lnSpc>
+              <a:spcAft>
+                <a:spcPts val="300"/>
+              </a:spcAft>
+              <a:buSzPct val="100000"/>
+              <a:buChar char="•"/>
+            </a:pPr>
+            <a:r>
+              <a:rPr lang="en-US" sz="1200" i="1" dirty="0">
+                <a:solidFill>
+                  <a:srgbClr val="1C2833"/>
+                </a:solidFill>
+                <a:latin typeface="Arial" pitchFamily="34" charset="0"/>
+                <a:ea typeface="Arial" pitchFamily="34" charset="-122"/>
+                <a:cs typeface="Arial" pitchFamily="34" charset="-120"/>
+              </a:rPr>
+              <a:t>adho-mukha-śvānāsana</a:t>
+            </a:r>
+            <a:pPr algn="l" indent="0" marL="0">
+              <a:lnSpc>
+                <a:spcPts val="1620"/>
+              </a:lnSpc>
+              <a:spcAft>
+                <a:spcPts val="300"/>
+              </a:spcAft>
+              <a:buNone/>
+            </a:pPr>
+            <a:r>
+              <a:rPr lang="en-US" sz="1200" dirty="0">
+                <a:solidFill>
+                  <a:srgbClr val="1C2833"/>
+                </a:solidFill>
+                <a:latin typeface="Arial" pitchFamily="34" charset="0"/>
+                <a:ea typeface="Arial" pitchFamily="34" charset="-122"/>
+                <a:cs typeface="Arial" pitchFamily="34" charset="-120"/>
+              </a:rPr>
+              <a:t> — downward-facing dog</a:t>
+            </a:r>
+            <a:endParaRPr lang="en-US" sz="1200" dirty="0"/>
+          </a:p>
+        </p:txBody>
+      </p:sp>
+      <p:sp>
+        <p:nvSpPr>
+          <p:cNvPr id="5" name="Text 3"/>
           <p:cNvSpPr/>
           <p:nvPr/>
         </p:nvSpPr>
@@ -4138,7 +6627,7 @@
                 <a:ea typeface="Georgia" pitchFamily="34" charset="-122"/>
                 <a:cs typeface="Georgia" pitchFamily="34" charset="-120"/>
               </a:rPr>
-              <a:t>Settle (2 min)</a:t>
+              <a:t>Lesson flow</a:t>
             </a:r>
             <a:endParaRPr lang="en-US" sz="1800" dirty="0"/>
           </a:p>
@@ -4147,54 +6636,6 @@
       <p:sp>
         <p:nvSpPr>
           <p:cNvPr id="4" name="Text 2"/>
-          <p:cNvSpPr/>
-          <p:nvPr/>
-        </p:nvSpPr>
-        <p:spPr>
-          <a:xfrm>
-            <a:off x="406301" y="870942"/>
-            <a:ext cx="8498026" cy="213271"/>
-          </a:xfrm>
-          <a:prstGeom prst="rect">
-            <a:avLst/>
-          </a:prstGeom>
-          <a:noFill/>
-          <a:ln/>
-        </p:spPr>
-        <p:txBody>
-          <a:bodyPr wrap="square" lIns="0" tIns="0" rIns="0" bIns="0" rtlCol="0" anchor="t"/>
-          <a:lstStyle/>
-          <a:p>
-            <a:pPr algn="l" indent="0" marL="0">
-              <a:lnSpc>
-                <a:spcPts val="1680"/>
-              </a:lnSpc>
-              <a:spcBef>
-                <a:spcPts val="300"/>
-              </a:spcBef>
-              <a:spcAft>
-                <a:spcPts val="300"/>
-              </a:spcAft>
-              <a:buNone/>
-            </a:pPr>
-            <a:r>
-              <a:rPr lang="en-US" sz="1200" dirty="0">
-                <a:solidFill>
-                  <a:srgbClr val="1C2833"/>
-                </a:solidFill>
-                <a:latin typeface="Arial" pitchFamily="34" charset="0"/>
-                <a:ea typeface="Arial" pitchFamily="34" charset="-122"/>
-                <a:cs typeface="Arial" pitchFamily="34" charset="-120"/>
-              </a:rPr>
-              <a:t>– Sukhāsana. 5 breaths.</a:t>
-            </a:r>
-            <a:endParaRPr lang="en-US" sz="1200" dirty="0"/>
-          </a:p>
-        </p:txBody>
-      </p:sp>
-      <p:sp>
-        <p:nvSpPr>
-          <p:cNvPr id="5" name="Text 3"/>
           <p:cNvSpPr/>
           <p:nvPr/>
         </p:nvSpPr>
@@ -4344,7 +6785,7 @@
                 <a:ea typeface="Georgia" pitchFamily="34" charset="-122"/>
                 <a:cs typeface="Georgia" pitchFamily="34" charset="-120"/>
               </a:rPr>
-              <a:t>Core (5 min) — Why Sūrya Namaskāra?</a:t>
+              <a:t>Settle (2 min)</a:t>
             </a:r>
             <a:endParaRPr lang="en-US" sz="1800" dirty="0"/>
           </a:p>
@@ -4358,8 +6799,8 @@
         </p:nvSpPr>
         <p:spPr>
           <a:xfrm>
-            <a:off x="406301" y="870942"/>
-            <a:ext cx="8498026" cy="639812"/>
+            <a:off x="634901" y="883593"/>
+            <a:ext cx="8102798" cy="281880"/>
           </a:xfrm>
           <a:prstGeom prst="rect">
             <a:avLst/>
@@ -4371,17 +6812,15 @@
           <a:bodyPr wrap="square" lIns="0" tIns="0" rIns="0" bIns="0" rtlCol="0" anchor="t"/>
           <a:lstStyle/>
           <a:p>
-            <a:pPr algn="l" indent="0" marL="0">
-              <a:lnSpc>
-                <a:spcPts val="1680"/>
-              </a:lnSpc>
-              <a:spcBef>
-                <a:spcPts val="300"/>
-              </a:spcBef>
-              <a:spcAft>
-                <a:spcPts val="300"/>
-              </a:spcAft>
-              <a:buNone/>
+            <a:pPr algn="l" marL="342900" indent="-342900">
+              <a:lnSpc>
+                <a:spcPts val="1620"/>
+              </a:lnSpc>
+              <a:spcAft>
+                <a:spcPts val="300"/>
+              </a:spcAft>
+              <a:buSzPct val="100000"/>
+              <a:buChar char="•"/>
             </a:pPr>
             <a:r>
               <a:rPr lang="en-US" sz="1200" dirty="0">
@@ -4392,145 +6831,7 @@
                 <a:ea typeface="Arial" pitchFamily="34" charset="-122"/>
                 <a:cs typeface="Arial" pitchFamily="34" charset="-120"/>
               </a:rPr>
-              <a:t>– Sūrya Namaskāra is a </a:t>
-            </a:r>
-            <a:pPr algn="l" indent="0" marL="0">
-              <a:lnSpc>
-                <a:spcPts val="1680"/>
-              </a:lnSpc>
-              <a:spcBef>
-                <a:spcPts val="300"/>
-              </a:spcBef>
-              <a:spcAft>
-                <a:spcPts val="300"/>
-              </a:spcAft>
-              <a:buNone/>
-            </a:pPr>
-            <a:r>
-              <a:rPr lang="en-US" sz="1200" i="1" dirty="0">
-                <a:solidFill>
-                  <a:srgbClr val="1C2833"/>
-                </a:solidFill>
-                <a:latin typeface="Arial" pitchFamily="34" charset="0"/>
-                <a:ea typeface="Arial" pitchFamily="34" charset="-122"/>
-                <a:cs typeface="Arial" pitchFamily="34" charset="-120"/>
-              </a:rPr>
-              <a:t>flow</a:t>
-            </a:r>
-            <a:pPr algn="l" indent="0" marL="0">
-              <a:lnSpc>
-                <a:spcPts val="1680"/>
-              </a:lnSpc>
-              <a:spcBef>
-                <a:spcPts val="300"/>
-              </a:spcBef>
-              <a:spcAft>
-                <a:spcPts val="300"/>
-              </a:spcAft>
-              <a:buNone/>
-            </a:pPr>
-            <a:r>
-              <a:rPr lang="en-US" sz="1200" dirty="0">
-                <a:solidFill>
-                  <a:srgbClr val="1C2833"/>
-                </a:solidFill>
-                <a:latin typeface="Arial" pitchFamily="34" charset="0"/>
-                <a:ea typeface="Arial" pitchFamily="34" charset="-122"/>
-                <a:cs typeface="Arial" pitchFamily="34" charset="-120"/>
-              </a:rPr>
-              <a:t> of 12 poses traditionally practised at sunrise, facing the rising sun. – Modern usage: a complete movement warm-up that activates major muscle groups, mobilises the spine, and synchronises breath with movement. – We'll learn it in two days: today we </a:t>
-            </a:r>
-            <a:pPr algn="l" indent="0" marL="0">
-              <a:lnSpc>
-                <a:spcPts val="1680"/>
-              </a:lnSpc>
-              <a:spcBef>
-                <a:spcPts val="300"/>
-              </a:spcBef>
-              <a:spcAft>
-                <a:spcPts val="300"/>
-              </a:spcAft>
-              <a:buNone/>
-            </a:pPr>
-            <a:r>
-              <a:rPr lang="en-US" sz="1200" b="1" dirty="0">
-                <a:solidFill>
-                  <a:srgbClr val="1C2833"/>
-                </a:solidFill>
-                <a:latin typeface="Arial" pitchFamily="34" charset="0"/>
-                <a:ea typeface="Arial" pitchFamily="34" charset="-122"/>
-                <a:cs typeface="Arial" pitchFamily="34" charset="-120"/>
-              </a:rPr>
-              <a:t>memorise the poses</a:t>
-            </a:r>
-            <a:pPr algn="l" indent="0" marL="0">
-              <a:lnSpc>
-                <a:spcPts val="1680"/>
-              </a:lnSpc>
-              <a:spcBef>
-                <a:spcPts val="300"/>
-              </a:spcBef>
-              <a:spcAft>
-                <a:spcPts val="300"/>
-              </a:spcAft>
-              <a:buNone/>
-            </a:pPr>
-            <a:r>
-              <a:rPr lang="en-US" sz="1200" dirty="0">
-                <a:solidFill>
-                  <a:srgbClr val="1C2833"/>
-                </a:solidFill>
-                <a:latin typeface="Arial" pitchFamily="34" charset="0"/>
-                <a:ea typeface="Arial" pitchFamily="34" charset="-122"/>
-                <a:cs typeface="Arial" pitchFamily="34" charset="-120"/>
-              </a:rPr>
-              <a:t>, tomorrow we </a:t>
-            </a:r>
-            <a:pPr algn="l" indent="0" marL="0">
-              <a:lnSpc>
-                <a:spcPts val="1680"/>
-              </a:lnSpc>
-              <a:spcBef>
-                <a:spcPts val="300"/>
-              </a:spcBef>
-              <a:spcAft>
-                <a:spcPts val="300"/>
-              </a:spcAft>
-              <a:buNone/>
-            </a:pPr>
-            <a:r>
-              <a:rPr lang="en-US" sz="1200" b="1" dirty="0">
-                <a:solidFill>
-                  <a:srgbClr val="1C2833"/>
-                </a:solidFill>
-                <a:latin typeface="Arial" pitchFamily="34" charset="0"/>
-                <a:ea typeface="Arial" pitchFamily="34" charset="-122"/>
-                <a:cs typeface="Arial" pitchFamily="34" charset="-120"/>
-              </a:rPr>
-              <a:t>add the breath flow</a:t>
-            </a:r>
-            <a:pPr algn="l" indent="0" marL="0">
-              <a:lnSpc>
-                <a:spcPts val="1680"/>
-              </a:lnSpc>
-              <a:spcBef>
-                <a:spcPts val="300"/>
-              </a:spcBef>
-              <a:spcAft>
-                <a:spcPts val="300"/>
-              </a:spcAft>
-              <a:buNone/>
-            </a:pPr>
-            <a:r>
-              <a:rPr lang="en-US" sz="1200" dirty="0">
-                <a:solidFill>
-                  <a:srgbClr val="1C2833"/>
-                </a:solidFill>
-                <a:latin typeface="Arial" pitchFamily="34" charset="0"/>
-                <a:ea typeface="Arial" pitchFamily="34" charset="-122"/>
-                <a:cs typeface="Arial" pitchFamily="34" charset="-120"/>
-              </a:rPr>
-              <a:t>.</a:t>
+              <a:t>Sukhāsana. 5 breaths.</a:t>
             </a:r>
             <a:endParaRPr lang="en-US" sz="1200" dirty="0"/>
           </a:p>
@@ -4688,7 +6989,7 @@
                 <a:ea typeface="Georgia" pitchFamily="34" charset="-122"/>
                 <a:cs typeface="Georgia" pitchFamily="34" charset="-120"/>
               </a:rPr>
-              <a:t>Wrap-up (3 min)</a:t>
+              <a:t>Core (5 min) — Why Sūrya Namaskāra?</a:t>
             </a:r>
             <a:endParaRPr lang="en-US" sz="1800" dirty="0"/>
           </a:p>
@@ -4702,8 +7003,8 @@
         </p:nvSpPr>
         <p:spPr>
           <a:xfrm>
-            <a:off x="406301" y="870942"/>
-            <a:ext cx="8498026" cy="426541"/>
+            <a:off x="634901" y="883593"/>
+            <a:ext cx="8102798" cy="975122"/>
           </a:xfrm>
           <a:prstGeom prst="rect">
             <a:avLst/>
@@ -4715,17 +7016,15 @@
           <a:bodyPr wrap="square" lIns="0" tIns="0" rIns="0" bIns="0" rtlCol="0" anchor="t"/>
           <a:lstStyle/>
           <a:p>
-            <a:pPr algn="l" indent="0" marL="0">
-              <a:lnSpc>
-                <a:spcPts val="1680"/>
-              </a:lnSpc>
-              <a:spcBef>
-                <a:spcPts val="300"/>
-              </a:spcBef>
-              <a:spcAft>
-                <a:spcPts val="300"/>
-              </a:spcAft>
-              <a:buNone/>
+            <a:pPr algn="l" marL="342900" indent="-342900">
+              <a:lnSpc>
+                <a:spcPts val="1620"/>
+              </a:lnSpc>
+              <a:spcAft>
+                <a:spcPts val="300"/>
+              </a:spcAft>
+              <a:buSzPct val="100000"/>
+              <a:buChar char="•"/>
             </a:pPr>
             <a:r>
               <a:rPr lang="en-US" sz="1200" dirty="0">
@@ -4736,15 +7035,12 @@
                 <a:ea typeface="Arial" pitchFamily="34" charset="-122"/>
                 <a:cs typeface="Arial" pitchFamily="34" charset="-120"/>
               </a:rPr>
-              <a:t>– Quick recap: students chorus the 12 pose names in order (with teacher prompting). – Preview Day 5: </a:t>
-            </a:r>
-            <a:pPr algn="l" indent="0" marL="0">
-              <a:lnSpc>
-                <a:spcPts val="1680"/>
-              </a:lnSpc>
-              <a:spcBef>
-                <a:spcPts val="300"/>
-              </a:spcBef>
+              <a:t>Sūrya Namaskāra is a </a:t>
+            </a:r>
+            <a:pPr algn="l" indent="0" marL="0">
+              <a:lnSpc>
+                <a:spcPts val="1620"/>
+              </a:lnSpc>
               <a:spcAft>
                 <a:spcPts val="300"/>
               </a:spcAft>
@@ -4759,7 +7055,155 @@
                 <a:ea typeface="Arial" pitchFamily="34" charset="-122"/>
                 <a:cs typeface="Arial" pitchFamily="34" charset="-120"/>
               </a:rPr>
-              <a:t>"Tomorrow we add the breath — each pose has an inhale or exhale assigned. That's where it becomes a real flow."</a:t>
+              <a:t>flow</a:t>
+            </a:r>
+            <a:pPr algn="l" indent="0" marL="0">
+              <a:lnSpc>
+                <a:spcPts val="1620"/>
+              </a:lnSpc>
+              <a:spcAft>
+                <a:spcPts val="300"/>
+              </a:spcAft>
+              <a:buNone/>
+            </a:pPr>
+            <a:r>
+              <a:rPr lang="en-US" sz="1200" dirty="0">
+                <a:solidFill>
+                  <a:srgbClr val="1C2833"/>
+                </a:solidFill>
+                <a:latin typeface="Arial" pitchFamily="34" charset="0"/>
+                <a:ea typeface="Arial" pitchFamily="34" charset="-122"/>
+                <a:cs typeface="Arial" pitchFamily="34" charset="-120"/>
+              </a:rPr>
+              <a:t> of 12 poses traditionally practised at sunrise, facing the rising sun.</a:t>
+            </a:r>
+            <a:endParaRPr lang="en-US" sz="1200" dirty="0"/>
+          </a:p>
+          <a:p>
+            <a:pPr algn="l" marL="342900" indent="-342900">
+              <a:lnSpc>
+                <a:spcPts val="1620"/>
+              </a:lnSpc>
+              <a:spcAft>
+                <a:spcPts val="300"/>
+              </a:spcAft>
+              <a:buSzPct val="100000"/>
+              <a:buChar char="•"/>
+            </a:pPr>
+            <a:r>
+              <a:rPr lang="en-US" sz="1200" dirty="0">
+                <a:solidFill>
+                  <a:srgbClr val="1C2833"/>
+                </a:solidFill>
+                <a:latin typeface="Arial" pitchFamily="34" charset="0"/>
+                <a:ea typeface="Arial" pitchFamily="34" charset="-122"/>
+                <a:cs typeface="Arial" pitchFamily="34" charset="-120"/>
+              </a:rPr>
+              <a:t>Modern usage: a complete movement warm-up that activates major muscle groups, mobilises the spine, and synchronises breath with movement.</a:t>
+            </a:r>
+            <a:endParaRPr lang="en-US" sz="1200" dirty="0"/>
+          </a:p>
+          <a:p>
+            <a:pPr algn="l" marL="342900" indent="-342900">
+              <a:lnSpc>
+                <a:spcPts val="1620"/>
+              </a:lnSpc>
+              <a:spcAft>
+                <a:spcPts val="300"/>
+              </a:spcAft>
+              <a:buSzPct val="100000"/>
+              <a:buChar char="•"/>
+            </a:pPr>
+            <a:r>
+              <a:rPr lang="en-US" sz="1200" dirty="0">
+                <a:solidFill>
+                  <a:srgbClr val="1C2833"/>
+                </a:solidFill>
+                <a:latin typeface="Arial" pitchFamily="34" charset="0"/>
+                <a:ea typeface="Arial" pitchFamily="34" charset="-122"/>
+                <a:cs typeface="Arial" pitchFamily="34" charset="-120"/>
+              </a:rPr>
+              <a:t>We'll learn it in two days: today we </a:t>
+            </a:r>
+            <a:pPr algn="l" indent="0" marL="0">
+              <a:lnSpc>
+                <a:spcPts val="1620"/>
+              </a:lnSpc>
+              <a:spcAft>
+                <a:spcPts val="300"/>
+              </a:spcAft>
+              <a:buNone/>
+            </a:pPr>
+            <a:r>
+              <a:rPr lang="en-US" sz="1200" b="1" dirty="0">
+                <a:solidFill>
+                  <a:srgbClr val="1C2833"/>
+                </a:solidFill>
+                <a:latin typeface="Arial" pitchFamily="34" charset="0"/>
+                <a:ea typeface="Arial" pitchFamily="34" charset="-122"/>
+                <a:cs typeface="Arial" pitchFamily="34" charset="-120"/>
+              </a:rPr>
+              <a:t>memorise the poses</a:t>
+            </a:r>
+            <a:pPr algn="l" indent="0" marL="0">
+              <a:lnSpc>
+                <a:spcPts val="1620"/>
+              </a:lnSpc>
+              <a:spcAft>
+                <a:spcPts val="300"/>
+              </a:spcAft>
+              <a:buNone/>
+            </a:pPr>
+            <a:r>
+              <a:rPr lang="en-US" sz="1200" dirty="0">
+                <a:solidFill>
+                  <a:srgbClr val="1C2833"/>
+                </a:solidFill>
+                <a:latin typeface="Arial" pitchFamily="34" charset="0"/>
+                <a:ea typeface="Arial" pitchFamily="34" charset="-122"/>
+                <a:cs typeface="Arial" pitchFamily="34" charset="-120"/>
+              </a:rPr>
+              <a:t>, tomorrow we </a:t>
+            </a:r>
+            <a:pPr algn="l" indent="0" marL="0">
+              <a:lnSpc>
+                <a:spcPts val="1620"/>
+              </a:lnSpc>
+              <a:spcAft>
+                <a:spcPts val="300"/>
+              </a:spcAft>
+              <a:buNone/>
+            </a:pPr>
+            <a:r>
+              <a:rPr lang="en-US" sz="1200" b="1" dirty="0">
+                <a:solidFill>
+                  <a:srgbClr val="1C2833"/>
+                </a:solidFill>
+                <a:latin typeface="Arial" pitchFamily="34" charset="0"/>
+                <a:ea typeface="Arial" pitchFamily="34" charset="-122"/>
+                <a:cs typeface="Arial" pitchFamily="34" charset="-120"/>
+              </a:rPr>
+              <a:t>add the breath flow</a:t>
+            </a:r>
+            <a:pPr algn="l" indent="0" marL="0">
+              <a:lnSpc>
+                <a:spcPts val="1620"/>
+              </a:lnSpc>
+              <a:spcAft>
+                <a:spcPts val="300"/>
+              </a:spcAft>
+              <a:buNone/>
+            </a:pPr>
+            <a:r>
+              <a:rPr lang="en-US" sz="1200" dirty="0">
+                <a:solidFill>
+                  <a:srgbClr val="1C2833"/>
+                </a:solidFill>
+                <a:latin typeface="Arial" pitchFamily="34" charset="0"/>
+                <a:ea typeface="Arial" pitchFamily="34" charset="-122"/>
+                <a:cs typeface="Arial" pitchFamily="34" charset="-120"/>
+              </a:rPr>
+              <a:t>.</a:t>
             </a:r>
             <a:endParaRPr lang="en-US" sz="1200" dirty="0"/>
           </a:p>
@@ -4917,7 +7361,7 @@
                 <a:ea typeface="Georgia" pitchFamily="34" charset="-122"/>
                 <a:cs typeface="Georgia" pitchFamily="34" charset="-120"/>
               </a:rPr>
-              <a:t>Student-facing content</a:t>
+              <a:t>Practice (30 min) — Walk through all 12 poses</a:t>
             </a:r>
             <a:endParaRPr lang="en-US" sz="1800" dirty="0"/>
           </a:p>
@@ -4931,61 +7375,8 @@
         </p:nvSpPr>
         <p:spPr>
           <a:xfrm>
-            <a:off x="406301" y="883593"/>
-            <a:ext cx="8331398" cy="2343150"/>
-          </a:xfrm>
-          <a:prstGeom prst="rect">
-            <a:avLst/>
-          </a:prstGeom>
-          <a:solidFill>
-            <a:srgbClr val="F4F8F9"/>
-          </a:solidFill>
-          <a:ln/>
-        </p:spPr>
-        <p:txBody>
-          <a:bodyPr wrap="square" rtlCol="0" anchor="ctr"/>
-          <a:lstStyle/>
-          <a:p>
-            <a:pPr indent="0" marL="0">
-              <a:buNone/>
-            </a:pPr>
-            <a:endParaRPr lang="en-US" dirty="0"/>
-          </a:p>
-        </p:txBody>
-      </p:sp>
-      <p:sp>
-        <p:nvSpPr>
-          <p:cNvPr id="5" name="Shape 3"/>
-          <p:cNvSpPr/>
-          <p:nvPr/>
-        </p:nvSpPr>
-        <p:spPr>
-          <a:xfrm>
-            <a:off x="434876" y="883593"/>
-            <a:ext cx="0" cy="2343150"/>
-          </a:xfrm>
-          <a:prstGeom prst="line">
-            <a:avLst/>
-          </a:prstGeom>
-          <a:noFill/>
-          <a:ln w="57150">
-            <a:solidFill>
-              <a:srgbClr val="FE4447"/>
-            </a:solidFill>
-            <a:prstDash val="solid"/>
-          </a:ln>
-        </p:spPr>
-      </p:sp>
-      <p:sp>
-        <p:nvSpPr>
-          <p:cNvPr id="6" name="Text 4"/>
-          <p:cNvSpPr/>
-          <p:nvPr/>
-        </p:nvSpPr>
-        <p:spPr>
-          <a:xfrm>
-            <a:off x="692051" y="1074093"/>
-            <a:ext cx="7973389" cy="230981"/>
+            <a:off x="406301" y="870942"/>
+            <a:ext cx="8498026" cy="213271"/>
           </a:xfrm>
           <a:prstGeom prst="rect">
             <a:avLst/>
@@ -4999,7 +7390,7 @@
           <a:p>
             <a:pPr algn="l" indent="0" marL="0">
               <a:lnSpc>
-                <a:spcPts val="1820"/>
+                <a:spcPts val="1680"/>
               </a:lnSpc>
               <a:spcBef>
                 <a:spcPts val="300"/>
@@ -5010,719 +7401,23 @@
               <a:buNone/>
             </a:pPr>
             <a:r>
-              <a:rPr lang="en-US" sz="1300" b="1" i="1" dirty="0">
-                <a:solidFill>
-                  <a:srgbClr val="1C2833"/>
-                </a:solidFill>
-                <a:latin typeface="Georgia" pitchFamily="34" charset="0"/>
-                <a:ea typeface="Georgia" pitchFamily="34" charset="-122"/>
-                <a:cs typeface="Georgia" pitchFamily="34" charset="-120"/>
-              </a:rPr>
-              <a:t>Sūrya Namaskāra — the 12 Poses</a:t>
-            </a:r>
-            <a:endParaRPr lang="en-US" sz="1300" dirty="0"/>
-          </a:p>
-        </p:txBody>
-      </p:sp>
-      <p:sp>
-        <p:nvSpPr>
-          <p:cNvPr id="7" name="Text 5"/>
-          <p:cNvSpPr/>
-          <p:nvPr/>
-        </p:nvSpPr>
-        <p:spPr>
-          <a:xfrm>
-            <a:off x="692051" y="1343174"/>
-            <a:ext cx="7973389" cy="230981"/>
-          </a:xfrm>
-          <a:prstGeom prst="rect">
-            <a:avLst/>
-          </a:prstGeom>
-          <a:noFill/>
-          <a:ln/>
-        </p:spPr>
-        <p:txBody>
-          <a:bodyPr wrap="square" lIns="0" tIns="0" rIns="0" bIns="0" rtlCol="0" anchor="t"/>
-          <a:lstStyle/>
-          <a:p>
-            <a:pPr algn="l" indent="0" marL="0">
-              <a:lnSpc>
-                <a:spcPts val="1820"/>
-              </a:lnSpc>
-              <a:spcBef>
-                <a:spcPts val="300"/>
-              </a:spcBef>
-              <a:spcAft>
-                <a:spcPts val="300"/>
-              </a:spcAft>
-              <a:buNone/>
-            </a:pPr>
-            <a:r>
-              <a:rPr lang="en-US" sz="1300" i="1" dirty="0">
-                <a:solidFill>
-                  <a:srgbClr val="1C2833"/>
-                </a:solidFill>
-                <a:latin typeface="Georgia" pitchFamily="34" charset="0"/>
-                <a:ea typeface="Georgia" pitchFamily="34" charset="-122"/>
-                <a:cs typeface="Georgia" pitchFamily="34" charset="-120"/>
-              </a:rPr>
-              <a:t>Memorise the order. We'll add the breath tomorrow.</a:t>
-            </a:r>
-            <a:endParaRPr lang="en-US" sz="1300" dirty="0"/>
-          </a:p>
-        </p:txBody>
-      </p:sp>
-      <p:sp>
-        <p:nvSpPr>
-          <p:cNvPr id="8" name="Text 6"/>
-          <p:cNvSpPr/>
-          <p:nvPr/>
-        </p:nvSpPr>
-        <p:spPr>
-          <a:xfrm>
-            <a:off x="692051" y="1612255"/>
-            <a:ext cx="7973389" cy="1154906"/>
-          </a:xfrm>
-          <a:prstGeom prst="rect">
-            <a:avLst/>
-          </a:prstGeom>
-          <a:noFill/>
-          <a:ln/>
-        </p:spPr>
-        <p:txBody>
-          <a:bodyPr wrap="square" lIns="0" tIns="0" rIns="0" bIns="0" rtlCol="0" anchor="t"/>
-          <a:lstStyle/>
-          <a:p>
-            <a:pPr algn="l" indent="0" marL="0">
-              <a:lnSpc>
-                <a:spcPts val="1820"/>
-              </a:lnSpc>
-              <a:spcBef>
-                <a:spcPts val="300"/>
-              </a:spcBef>
-              <a:spcAft>
-                <a:spcPts val="300"/>
-              </a:spcAft>
-              <a:buNone/>
-            </a:pPr>
-            <a:r>
-              <a:rPr lang="en-US" sz="1300" dirty="0">
-                <a:solidFill>
-                  <a:srgbClr val="1C2833"/>
-                </a:solidFill>
-                <a:latin typeface="Georgia" pitchFamily="34" charset="0"/>
-                <a:ea typeface="Georgia" pitchFamily="34" charset="-122"/>
-                <a:cs typeface="Georgia" pitchFamily="34" charset="-120"/>
-              </a:rPr>
-              <a:t>| # | Sanskrit | English | |---|----------|---------| | 1 | </a:t>
-            </a:r>
-            <a:pPr algn="l" indent="0" marL="0">
-              <a:lnSpc>
-                <a:spcPts val="1820"/>
-              </a:lnSpc>
-              <a:spcBef>
-                <a:spcPts val="300"/>
-              </a:spcBef>
-              <a:spcAft>
-                <a:spcPts val="300"/>
-              </a:spcAft>
-              <a:buNone/>
-            </a:pPr>
-            <a:r>
-              <a:rPr lang="en-US" sz="1300" i="1" dirty="0">
-                <a:solidFill>
-                  <a:srgbClr val="1C2833"/>
-                </a:solidFill>
-                <a:latin typeface="Georgia" pitchFamily="34" charset="0"/>
-                <a:ea typeface="Georgia" pitchFamily="34" charset="-122"/>
-                <a:cs typeface="Georgia" pitchFamily="34" charset="-120"/>
-              </a:rPr>
-              <a:t>praṇāmāsana</a:t>
-            </a:r>
-            <a:pPr algn="l" indent="0" marL="0">
-              <a:lnSpc>
-                <a:spcPts val="1820"/>
-              </a:lnSpc>
-              <a:spcBef>
-                <a:spcPts val="300"/>
-              </a:spcBef>
-              <a:spcAft>
-                <a:spcPts val="300"/>
-              </a:spcAft>
-              <a:buNone/>
-            </a:pPr>
-            <a:r>
-              <a:rPr lang="en-US" sz="1300" dirty="0">
-                <a:solidFill>
-                  <a:srgbClr val="1C2833"/>
-                </a:solidFill>
-                <a:latin typeface="Georgia" pitchFamily="34" charset="0"/>
-                <a:ea typeface="Georgia" pitchFamily="34" charset="-122"/>
-                <a:cs typeface="Georgia" pitchFamily="34" charset="-120"/>
-              </a:rPr>
-              <a:t> | prayer | | 2 | </a:t>
-            </a:r>
-            <a:pPr algn="l" indent="0" marL="0">
-              <a:lnSpc>
-                <a:spcPts val="1820"/>
-              </a:lnSpc>
-              <a:spcBef>
-                <a:spcPts val="300"/>
-              </a:spcBef>
-              <a:spcAft>
-                <a:spcPts val="300"/>
-              </a:spcAft>
-              <a:buNone/>
-            </a:pPr>
-            <a:r>
-              <a:rPr lang="en-US" sz="1300" i="1" dirty="0">
-                <a:solidFill>
-                  <a:srgbClr val="1C2833"/>
-                </a:solidFill>
-                <a:latin typeface="Georgia" pitchFamily="34" charset="0"/>
-                <a:ea typeface="Georgia" pitchFamily="34" charset="-122"/>
-                <a:cs typeface="Georgia" pitchFamily="34" charset="-120"/>
-              </a:rPr>
-              <a:t>hasta-uttānāsana</a:t>
-            </a:r>
-            <a:pPr algn="l" indent="0" marL="0">
-              <a:lnSpc>
-                <a:spcPts val="1820"/>
-              </a:lnSpc>
-              <a:spcBef>
-                <a:spcPts val="300"/>
-              </a:spcBef>
-              <a:spcAft>
-                <a:spcPts val="300"/>
-              </a:spcAft>
-              <a:buNone/>
-            </a:pPr>
-            <a:r>
-              <a:rPr lang="en-US" sz="1300" dirty="0">
-                <a:solidFill>
-                  <a:srgbClr val="1C2833"/>
-                </a:solidFill>
-                <a:latin typeface="Georgia" pitchFamily="34" charset="0"/>
-                <a:ea typeface="Georgia" pitchFamily="34" charset="-122"/>
-                <a:cs typeface="Georgia" pitchFamily="34" charset="-120"/>
-              </a:rPr>
-              <a:t> | raised hands | | 3 | </a:t>
-            </a:r>
-            <a:pPr algn="l" indent="0" marL="0">
-              <a:lnSpc>
-                <a:spcPts val="1820"/>
-              </a:lnSpc>
-              <a:spcBef>
-                <a:spcPts val="300"/>
-              </a:spcBef>
-              <a:spcAft>
-                <a:spcPts val="300"/>
-              </a:spcAft>
-              <a:buNone/>
-            </a:pPr>
-            <a:r>
-              <a:rPr lang="en-US" sz="1300" i="1" dirty="0">
-                <a:solidFill>
-                  <a:srgbClr val="1C2833"/>
-                </a:solidFill>
-                <a:latin typeface="Georgia" pitchFamily="34" charset="0"/>
-                <a:ea typeface="Georgia" pitchFamily="34" charset="-122"/>
-                <a:cs typeface="Georgia" pitchFamily="34" charset="-120"/>
-              </a:rPr>
-              <a:t>uttānāsana</a:t>
-            </a:r>
-            <a:pPr algn="l" indent="0" marL="0">
-              <a:lnSpc>
-                <a:spcPts val="1820"/>
-              </a:lnSpc>
-              <a:spcBef>
-                <a:spcPts val="300"/>
-              </a:spcBef>
-              <a:spcAft>
-                <a:spcPts val="300"/>
-              </a:spcAft>
-              <a:buNone/>
-            </a:pPr>
-            <a:r>
-              <a:rPr lang="en-US" sz="1300" dirty="0">
-                <a:solidFill>
-                  <a:srgbClr val="1C2833"/>
-                </a:solidFill>
-                <a:latin typeface="Georgia" pitchFamily="34" charset="0"/>
-                <a:ea typeface="Georgia" pitchFamily="34" charset="-122"/>
-                <a:cs typeface="Georgia" pitchFamily="34" charset="-120"/>
-              </a:rPr>
-              <a:t> | standing fold | | 4 | </a:t>
-            </a:r>
-            <a:pPr algn="l" indent="0" marL="0">
-              <a:lnSpc>
-                <a:spcPts val="1820"/>
-              </a:lnSpc>
-              <a:spcBef>
-                <a:spcPts val="300"/>
-              </a:spcBef>
-              <a:spcAft>
-                <a:spcPts val="300"/>
-              </a:spcAft>
-              <a:buNone/>
-            </a:pPr>
-            <a:r>
-              <a:rPr lang="en-US" sz="1300" i="1" dirty="0">
-                <a:solidFill>
-                  <a:srgbClr val="1C2833"/>
-                </a:solidFill>
-                <a:latin typeface="Georgia" pitchFamily="34" charset="0"/>
-                <a:ea typeface="Georgia" pitchFamily="34" charset="-122"/>
-                <a:cs typeface="Georgia" pitchFamily="34" charset="-120"/>
-              </a:rPr>
-              <a:t>aśva-sañcalanāsana</a:t>
-            </a:r>
-            <a:pPr algn="l" indent="0" marL="0">
-              <a:lnSpc>
-                <a:spcPts val="1820"/>
-              </a:lnSpc>
-              <a:spcBef>
-                <a:spcPts val="300"/>
-              </a:spcBef>
-              <a:spcAft>
-                <a:spcPts val="300"/>
-              </a:spcAft>
-              <a:buNone/>
-            </a:pPr>
-            <a:r>
-              <a:rPr lang="en-US" sz="1300" dirty="0">
-                <a:solidFill>
-                  <a:srgbClr val="1C2833"/>
-                </a:solidFill>
-                <a:latin typeface="Georgia" pitchFamily="34" charset="0"/>
-                <a:ea typeface="Georgia" pitchFamily="34" charset="-122"/>
-                <a:cs typeface="Georgia" pitchFamily="34" charset="-120"/>
-              </a:rPr>
-              <a:t> (right) | lunge | | 5 | </a:t>
-            </a:r>
-            <a:pPr algn="l" indent="0" marL="0">
-              <a:lnSpc>
-                <a:spcPts val="1820"/>
-              </a:lnSpc>
-              <a:spcBef>
-                <a:spcPts val="300"/>
-              </a:spcBef>
-              <a:spcAft>
-                <a:spcPts val="300"/>
-              </a:spcAft>
-              <a:buNone/>
-            </a:pPr>
-            <a:r>
-              <a:rPr lang="en-US" sz="1300" i="1" dirty="0">
-                <a:solidFill>
-                  <a:srgbClr val="1C2833"/>
-                </a:solidFill>
-                <a:latin typeface="Georgia" pitchFamily="34" charset="0"/>
-                <a:ea typeface="Georgia" pitchFamily="34" charset="-122"/>
-                <a:cs typeface="Georgia" pitchFamily="34" charset="-120"/>
-              </a:rPr>
-              <a:t>adho-mukha-śvānāsana</a:t>
-            </a:r>
-            <a:pPr algn="l" indent="0" marL="0">
-              <a:lnSpc>
-                <a:spcPts val="1820"/>
-              </a:lnSpc>
-              <a:spcBef>
-                <a:spcPts val="300"/>
-              </a:spcBef>
-              <a:spcAft>
-                <a:spcPts val="300"/>
-              </a:spcAft>
-              <a:buNone/>
-            </a:pPr>
-            <a:r>
-              <a:rPr lang="en-US" sz="1300" dirty="0">
-                <a:solidFill>
-                  <a:srgbClr val="1C2833"/>
-                </a:solidFill>
-                <a:latin typeface="Georgia" pitchFamily="34" charset="0"/>
-                <a:ea typeface="Georgia" pitchFamily="34" charset="-122"/>
-                <a:cs typeface="Georgia" pitchFamily="34" charset="-120"/>
-              </a:rPr>
-              <a:t> | downward dog | | 6 | </a:t>
-            </a:r>
-            <a:pPr algn="l" indent="0" marL="0">
-              <a:lnSpc>
-                <a:spcPts val="1820"/>
-              </a:lnSpc>
-              <a:spcBef>
-                <a:spcPts val="300"/>
-              </a:spcBef>
-              <a:spcAft>
-                <a:spcPts val="300"/>
-              </a:spcAft>
-              <a:buNone/>
-            </a:pPr>
-            <a:r>
-              <a:rPr lang="en-US" sz="1300" i="1" dirty="0">
-                <a:solidFill>
-                  <a:srgbClr val="1C2833"/>
-                </a:solidFill>
-                <a:latin typeface="Georgia" pitchFamily="34" charset="0"/>
-                <a:ea typeface="Georgia" pitchFamily="34" charset="-122"/>
-                <a:cs typeface="Georgia" pitchFamily="34" charset="-120"/>
-              </a:rPr>
-              <a:t>aṣṭāṅga-namaskāra</a:t>
-            </a:r>
-            <a:pPr algn="l" indent="0" marL="0">
-              <a:lnSpc>
-                <a:spcPts val="1820"/>
-              </a:lnSpc>
-              <a:spcBef>
-                <a:spcPts val="300"/>
-              </a:spcBef>
-              <a:spcAft>
-                <a:spcPts val="300"/>
-              </a:spcAft>
-              <a:buNone/>
-            </a:pPr>
-            <a:r>
-              <a:rPr lang="en-US" sz="1300" dirty="0">
-                <a:solidFill>
-                  <a:srgbClr val="1C2833"/>
-                </a:solidFill>
-                <a:latin typeface="Georgia" pitchFamily="34" charset="0"/>
-                <a:ea typeface="Georgia" pitchFamily="34" charset="-122"/>
-                <a:cs typeface="Georgia" pitchFamily="34" charset="-120"/>
-              </a:rPr>
-              <a:t> | knees-chest-chin | | 7 | </a:t>
-            </a:r>
-            <a:pPr algn="l" indent="0" marL="0">
-              <a:lnSpc>
-                <a:spcPts val="1820"/>
-              </a:lnSpc>
-              <a:spcBef>
-                <a:spcPts val="300"/>
-              </a:spcBef>
-              <a:spcAft>
-                <a:spcPts val="300"/>
-              </a:spcAft>
-              <a:buNone/>
-            </a:pPr>
-            <a:r>
-              <a:rPr lang="en-US" sz="1300" i="1" dirty="0">
-                <a:solidFill>
-                  <a:srgbClr val="1C2833"/>
-                </a:solidFill>
-                <a:latin typeface="Georgia" pitchFamily="34" charset="0"/>
-                <a:ea typeface="Georgia" pitchFamily="34" charset="-122"/>
-                <a:cs typeface="Georgia" pitchFamily="34" charset="-120"/>
-              </a:rPr>
-              <a:t>bhujaṅgāsana</a:t>
-            </a:r>
-            <a:pPr algn="l" indent="0" marL="0">
-              <a:lnSpc>
-                <a:spcPts val="1820"/>
-              </a:lnSpc>
-              <a:spcBef>
-                <a:spcPts val="300"/>
-              </a:spcBef>
-              <a:spcAft>
-                <a:spcPts val="300"/>
-              </a:spcAft>
-              <a:buNone/>
-            </a:pPr>
-            <a:r>
-              <a:rPr lang="en-US" sz="1300" dirty="0">
-                <a:solidFill>
-                  <a:srgbClr val="1C2833"/>
-                </a:solidFill>
-                <a:latin typeface="Georgia" pitchFamily="34" charset="0"/>
-                <a:ea typeface="Georgia" pitchFamily="34" charset="-122"/>
-                <a:cs typeface="Georgia" pitchFamily="34" charset="-120"/>
-              </a:rPr>
-              <a:t> | cobra | | 8 | </a:t>
-            </a:r>
-            <a:pPr algn="l" indent="0" marL="0">
-              <a:lnSpc>
-                <a:spcPts val="1820"/>
-              </a:lnSpc>
-              <a:spcBef>
-                <a:spcPts val="300"/>
-              </a:spcBef>
-              <a:spcAft>
-                <a:spcPts val="300"/>
-              </a:spcAft>
-              <a:buNone/>
-            </a:pPr>
-            <a:r>
-              <a:rPr lang="en-US" sz="1300" i="1" dirty="0">
-                <a:solidFill>
-                  <a:srgbClr val="1C2833"/>
-                </a:solidFill>
-                <a:latin typeface="Georgia" pitchFamily="34" charset="0"/>
-                <a:ea typeface="Georgia" pitchFamily="34" charset="-122"/>
-                <a:cs typeface="Georgia" pitchFamily="34" charset="-120"/>
-              </a:rPr>
-              <a:t>adho-mukha-śvānāsana</a:t>
-            </a:r>
-            <a:pPr algn="l" indent="0" marL="0">
-              <a:lnSpc>
-                <a:spcPts val="1820"/>
-              </a:lnSpc>
-              <a:spcBef>
-                <a:spcPts val="300"/>
-              </a:spcBef>
-              <a:spcAft>
-                <a:spcPts val="300"/>
-              </a:spcAft>
-              <a:buNone/>
-            </a:pPr>
-            <a:r>
-              <a:rPr lang="en-US" sz="1300" dirty="0">
-                <a:solidFill>
-                  <a:srgbClr val="1C2833"/>
-                </a:solidFill>
-                <a:latin typeface="Georgia" pitchFamily="34" charset="0"/>
-                <a:ea typeface="Georgia" pitchFamily="34" charset="-122"/>
-                <a:cs typeface="Georgia" pitchFamily="34" charset="-120"/>
-              </a:rPr>
-              <a:t> | downward dog | | 9 | </a:t>
-            </a:r>
-            <a:pPr algn="l" indent="0" marL="0">
-              <a:lnSpc>
-                <a:spcPts val="1820"/>
-              </a:lnSpc>
-              <a:spcBef>
-                <a:spcPts val="300"/>
-              </a:spcBef>
-              <a:spcAft>
-                <a:spcPts val="300"/>
-              </a:spcAft>
-              <a:buNone/>
-            </a:pPr>
-            <a:r>
-              <a:rPr lang="en-US" sz="1300" i="1" dirty="0">
-                <a:solidFill>
-                  <a:srgbClr val="1C2833"/>
-                </a:solidFill>
-                <a:latin typeface="Georgia" pitchFamily="34" charset="0"/>
-                <a:ea typeface="Georgia" pitchFamily="34" charset="-122"/>
-                <a:cs typeface="Georgia" pitchFamily="34" charset="-120"/>
-              </a:rPr>
-              <a:t>aśva-sañcalanāsana</a:t>
-            </a:r>
-            <a:pPr algn="l" indent="0" marL="0">
-              <a:lnSpc>
-                <a:spcPts val="1820"/>
-              </a:lnSpc>
-              <a:spcBef>
-                <a:spcPts val="300"/>
-              </a:spcBef>
-              <a:spcAft>
-                <a:spcPts val="300"/>
-              </a:spcAft>
-              <a:buNone/>
-            </a:pPr>
-            <a:r>
-              <a:rPr lang="en-US" sz="1300" dirty="0">
-                <a:solidFill>
-                  <a:srgbClr val="1C2833"/>
-                </a:solidFill>
-                <a:latin typeface="Georgia" pitchFamily="34" charset="0"/>
-                <a:ea typeface="Georgia" pitchFamily="34" charset="-122"/>
-                <a:cs typeface="Georgia" pitchFamily="34" charset="-120"/>
-              </a:rPr>
-              <a:t> (right forward) | lunge | | 10 | </a:t>
-            </a:r>
-            <a:pPr algn="l" indent="0" marL="0">
-              <a:lnSpc>
-                <a:spcPts val="1820"/>
-              </a:lnSpc>
-              <a:spcBef>
-                <a:spcPts val="300"/>
-              </a:spcBef>
-              <a:spcAft>
-                <a:spcPts val="300"/>
-              </a:spcAft>
-              <a:buNone/>
-            </a:pPr>
-            <a:r>
-              <a:rPr lang="en-US" sz="1300" i="1" dirty="0">
-                <a:solidFill>
-                  <a:srgbClr val="1C2833"/>
-                </a:solidFill>
-                <a:latin typeface="Georgia" pitchFamily="34" charset="0"/>
-                <a:ea typeface="Georgia" pitchFamily="34" charset="-122"/>
-                <a:cs typeface="Georgia" pitchFamily="34" charset="-120"/>
-              </a:rPr>
-              <a:t>uttānāsana</a:t>
-            </a:r>
-            <a:pPr algn="l" indent="0" marL="0">
-              <a:lnSpc>
-                <a:spcPts val="1820"/>
-              </a:lnSpc>
-              <a:spcBef>
-                <a:spcPts val="300"/>
-              </a:spcBef>
-              <a:spcAft>
-                <a:spcPts val="300"/>
-              </a:spcAft>
-              <a:buNone/>
-            </a:pPr>
-            <a:r>
-              <a:rPr lang="en-US" sz="1300" dirty="0">
-                <a:solidFill>
-                  <a:srgbClr val="1C2833"/>
-                </a:solidFill>
-                <a:latin typeface="Georgia" pitchFamily="34" charset="0"/>
-                <a:ea typeface="Georgia" pitchFamily="34" charset="-122"/>
-                <a:cs typeface="Georgia" pitchFamily="34" charset="-120"/>
-              </a:rPr>
-              <a:t> | standing fold | | 11 | </a:t>
-            </a:r>
-            <a:pPr algn="l" indent="0" marL="0">
-              <a:lnSpc>
-                <a:spcPts val="1820"/>
-              </a:lnSpc>
-              <a:spcBef>
-                <a:spcPts val="300"/>
-              </a:spcBef>
-              <a:spcAft>
-                <a:spcPts val="300"/>
-              </a:spcAft>
-              <a:buNone/>
-            </a:pPr>
-            <a:r>
-              <a:rPr lang="en-US" sz="1300" i="1" dirty="0">
-                <a:solidFill>
-                  <a:srgbClr val="1C2833"/>
-                </a:solidFill>
-                <a:latin typeface="Georgia" pitchFamily="34" charset="0"/>
-                <a:ea typeface="Georgia" pitchFamily="34" charset="-122"/>
-                <a:cs typeface="Georgia" pitchFamily="34" charset="-120"/>
-              </a:rPr>
-              <a:t>hasta-uttānāsana</a:t>
-            </a:r>
-            <a:pPr algn="l" indent="0" marL="0">
-              <a:lnSpc>
-                <a:spcPts val="1820"/>
-              </a:lnSpc>
-              <a:spcBef>
-                <a:spcPts val="300"/>
-              </a:spcBef>
-              <a:spcAft>
-                <a:spcPts val="300"/>
-              </a:spcAft>
-              <a:buNone/>
-            </a:pPr>
-            <a:r>
-              <a:rPr lang="en-US" sz="1300" dirty="0">
-                <a:solidFill>
-                  <a:srgbClr val="1C2833"/>
-                </a:solidFill>
-                <a:latin typeface="Georgia" pitchFamily="34" charset="0"/>
-                <a:ea typeface="Georgia" pitchFamily="34" charset="-122"/>
-                <a:cs typeface="Georgia" pitchFamily="34" charset="-120"/>
-              </a:rPr>
-              <a:t> | raised hands | | 12 | </a:t>
-            </a:r>
-            <a:pPr algn="l" indent="0" marL="0">
-              <a:lnSpc>
-                <a:spcPts val="1820"/>
-              </a:lnSpc>
-              <a:spcBef>
-                <a:spcPts val="300"/>
-              </a:spcBef>
-              <a:spcAft>
-                <a:spcPts val="300"/>
-              </a:spcAft>
-              <a:buNone/>
-            </a:pPr>
-            <a:r>
-              <a:rPr lang="en-US" sz="1300" i="1" dirty="0">
-                <a:solidFill>
-                  <a:srgbClr val="1C2833"/>
-                </a:solidFill>
-                <a:latin typeface="Georgia" pitchFamily="34" charset="0"/>
-                <a:ea typeface="Georgia" pitchFamily="34" charset="-122"/>
-                <a:cs typeface="Georgia" pitchFamily="34" charset="-120"/>
-              </a:rPr>
-              <a:t>praṇāmāsana</a:t>
-            </a:r>
-            <a:pPr algn="l" indent="0" marL="0">
-              <a:lnSpc>
-                <a:spcPts val="1820"/>
-              </a:lnSpc>
-              <a:spcBef>
-                <a:spcPts val="300"/>
-              </a:spcBef>
-              <a:spcAft>
-                <a:spcPts val="300"/>
-              </a:spcAft>
-              <a:buNone/>
-            </a:pPr>
-            <a:r>
-              <a:rPr lang="en-US" sz="1300" dirty="0">
-                <a:solidFill>
-                  <a:srgbClr val="1C2833"/>
-                </a:solidFill>
-                <a:latin typeface="Georgia" pitchFamily="34" charset="0"/>
-                <a:ea typeface="Georgia" pitchFamily="34" charset="-122"/>
-                <a:cs typeface="Georgia" pitchFamily="34" charset="-120"/>
-              </a:rPr>
-              <a:t> | prayer |</a:t>
-            </a:r>
-            <a:endParaRPr lang="en-US" sz="1300" dirty="0"/>
-          </a:p>
-        </p:txBody>
-      </p:sp>
-      <p:sp>
-        <p:nvSpPr>
-          <p:cNvPr id="9" name="Text 7"/>
-          <p:cNvSpPr/>
-          <p:nvPr/>
-        </p:nvSpPr>
-        <p:spPr>
-          <a:xfrm>
-            <a:off x="692051" y="2805261"/>
-            <a:ext cx="7973389" cy="230981"/>
-          </a:xfrm>
-          <a:prstGeom prst="rect">
-            <a:avLst/>
-          </a:prstGeom>
-          <a:noFill/>
-          <a:ln/>
-        </p:spPr>
-        <p:txBody>
-          <a:bodyPr wrap="square" lIns="0" tIns="0" rIns="0" bIns="0" rtlCol="0" anchor="t"/>
-          <a:lstStyle/>
-          <a:p>
-            <a:pPr algn="l" indent="0" marL="0">
-              <a:lnSpc>
-                <a:spcPts val="1820"/>
-              </a:lnSpc>
-              <a:spcBef>
-                <a:spcPts val="300"/>
-              </a:spcBef>
-              <a:spcAft>
-                <a:spcPts val="300"/>
-              </a:spcAft>
-              <a:buNone/>
-            </a:pPr>
-            <a:r>
-              <a:rPr lang="en-US" sz="1300" i="1" dirty="0">
-                <a:solidFill>
-                  <a:srgbClr val="1C2833"/>
-                </a:solidFill>
-                <a:latin typeface="Georgia" pitchFamily="34" charset="0"/>
-                <a:ea typeface="Georgia" pitchFamily="34" charset="-122"/>
-                <a:cs typeface="Georgia" pitchFamily="34" charset="-120"/>
-              </a:rPr>
-              <a:t>Notice the symmetry: poses 1–6 are mirrored by 12–7.</a:t>
-            </a:r>
-            <a:endParaRPr lang="en-US" sz="1300" dirty="0"/>
-          </a:p>
-        </p:txBody>
-      </p:sp>
-      <p:sp>
-        <p:nvSpPr>
-          <p:cNvPr id="10" name="Text 8"/>
+              <a:rPr lang="en-US" sz="1200" dirty="0">
+                <a:solidFill>
+                  <a:srgbClr val="1C2833"/>
+                </a:solidFill>
+                <a:latin typeface="Arial" pitchFamily="34" charset="0"/>
+                <a:ea typeface="Arial" pitchFamily="34" charset="-122"/>
+                <a:cs typeface="Arial" pitchFamily="34" charset="-120"/>
+              </a:rPr>
+              <a:t>The 12 poses (one round):</a:t>
+            </a:r>
+            <a:endParaRPr lang="en-US" sz="1200" dirty="0"/>
+          </a:p>
+        </p:txBody>
+      </p:sp>
+      <p:sp>
+        <p:nvSpPr>
+          <p:cNvPr id="5" name="Text 3"/>
           <p:cNvSpPr/>
           <p:nvPr/>
         </p:nvSpPr>
@@ -5872,7 +7567,7 @@
                 <a:ea typeface="Georgia" pitchFamily="34" charset="-122"/>
                 <a:cs typeface="Georgia" pitchFamily="34" charset="-120"/>
               </a:rPr>
-              <a:t>Homework</a:t>
+              <a:t>Practice (30 min) — Walk through all 12 poses (cont.)</a:t>
             </a:r>
             <a:endParaRPr lang="en-US" sz="1800" dirty="0"/>
           </a:p>
@@ -5886,8 +7581,8 @@
         </p:nvSpPr>
         <p:spPr>
           <a:xfrm>
-            <a:off x="406301" y="870942"/>
-            <a:ext cx="8498026" cy="213271"/>
+            <a:off x="634901" y="883593"/>
+            <a:ext cx="8102798" cy="2475905"/>
           </a:xfrm>
           <a:prstGeom prst="rect">
             <a:avLst/>
@@ -5899,13 +7594,31 @@
           <a:bodyPr wrap="square" lIns="0" tIns="0" rIns="0" bIns="0" rtlCol="0" anchor="t"/>
           <a:lstStyle/>
           <a:p>
-            <a:pPr algn="l" indent="0" marL="0">
-              <a:lnSpc>
-                <a:spcPts val="1680"/>
-              </a:lnSpc>
-              <a:spcBef>
-                <a:spcPts val="300"/>
-              </a:spcBef>
+            <a:pPr algn="l" marL="342900" indent="-342900">
+              <a:lnSpc>
+                <a:spcPts val="1620"/>
+              </a:lnSpc>
+              <a:spcAft>
+                <a:spcPts val="300"/>
+              </a:spcAft>
+              <a:buSzPct val="100000"/>
+              <a:buChar char="•"/>
+            </a:pPr>
+            <a:r>
+              <a:rPr lang="en-US" sz="1200" b="1" dirty="0">
+                <a:solidFill>
+                  <a:srgbClr val="1C2833"/>
+                </a:solidFill>
+                <a:latin typeface="Arial" pitchFamily="34" charset="0"/>
+                <a:ea typeface="Arial" pitchFamily="34" charset="-122"/>
+                <a:cs typeface="Arial" pitchFamily="34" charset="-120"/>
+              </a:rPr>
+              <a:t>Praṇāmāsana</a:t>
+            </a:r>
+            <a:pPr algn="l" indent="0" marL="0">
+              <a:lnSpc>
+                <a:spcPts val="1620"/>
+              </a:lnSpc>
               <a:spcAft>
                 <a:spcPts val="300"/>
               </a:spcAft>
@@ -5920,7 +7633,403 @@
                 <a:ea typeface="Arial" pitchFamily="34" charset="-122"/>
                 <a:cs typeface="Arial" pitchFamily="34" charset="-120"/>
               </a:rPr>
-              <a:t>– Practise the sequence at home — 1 round, slowly. Notice which transitions feel awkward.</a:t>
+              <a:t> — stand at top of mat, palms together at heart centre.</a:t>
+            </a:r>
+            <a:endParaRPr lang="en-US" sz="1200" dirty="0"/>
+          </a:p>
+          <a:p>
+            <a:pPr algn="l" marL="342900" indent="-342900">
+              <a:lnSpc>
+                <a:spcPts val="1620"/>
+              </a:lnSpc>
+              <a:spcAft>
+                <a:spcPts val="300"/>
+              </a:spcAft>
+              <a:buSzPct val="100000"/>
+              <a:buChar char="•"/>
+            </a:pPr>
+            <a:r>
+              <a:rPr lang="en-US" sz="1200" b="1" dirty="0">
+                <a:solidFill>
+                  <a:srgbClr val="1C2833"/>
+                </a:solidFill>
+                <a:latin typeface="Arial" pitchFamily="34" charset="0"/>
+                <a:ea typeface="Arial" pitchFamily="34" charset="-122"/>
+                <a:cs typeface="Arial" pitchFamily="34" charset="-120"/>
+              </a:rPr>
+              <a:t>Hasta-uttānāsana</a:t>
+            </a:r>
+            <a:pPr algn="l" indent="0" marL="0">
+              <a:lnSpc>
+                <a:spcPts val="1620"/>
+              </a:lnSpc>
+              <a:spcAft>
+                <a:spcPts val="300"/>
+              </a:spcAft>
+              <a:buNone/>
+            </a:pPr>
+            <a:r>
+              <a:rPr lang="en-US" sz="1200" dirty="0">
+                <a:solidFill>
+                  <a:srgbClr val="1C2833"/>
+                </a:solidFill>
+                <a:latin typeface="Arial" pitchFamily="34" charset="0"/>
+                <a:ea typeface="Arial" pitchFamily="34" charset="-122"/>
+                <a:cs typeface="Arial" pitchFamily="34" charset="-120"/>
+              </a:rPr>
+              <a:t> — sweep arms overhead, gentle back arch.</a:t>
+            </a:r>
+            <a:endParaRPr lang="en-US" sz="1200" dirty="0"/>
+          </a:p>
+          <a:p>
+            <a:pPr algn="l" marL="342900" indent="-342900">
+              <a:lnSpc>
+                <a:spcPts val="1620"/>
+              </a:lnSpc>
+              <a:spcAft>
+                <a:spcPts val="300"/>
+              </a:spcAft>
+              <a:buSzPct val="100000"/>
+              <a:buChar char="•"/>
+            </a:pPr>
+            <a:r>
+              <a:rPr lang="en-US" sz="1200" b="1" dirty="0">
+                <a:solidFill>
+                  <a:srgbClr val="1C2833"/>
+                </a:solidFill>
+                <a:latin typeface="Arial" pitchFamily="34" charset="0"/>
+                <a:ea typeface="Arial" pitchFamily="34" charset="-122"/>
+                <a:cs typeface="Arial" pitchFamily="34" charset="-120"/>
+              </a:rPr>
+              <a:t>Uttānāsana</a:t>
+            </a:r>
+            <a:pPr algn="l" indent="0" marL="0">
+              <a:lnSpc>
+                <a:spcPts val="1620"/>
+              </a:lnSpc>
+              <a:spcAft>
+                <a:spcPts val="300"/>
+              </a:spcAft>
+              <a:buNone/>
+            </a:pPr>
+            <a:r>
+              <a:rPr lang="en-US" sz="1200" dirty="0">
+                <a:solidFill>
+                  <a:srgbClr val="1C2833"/>
+                </a:solidFill>
+                <a:latin typeface="Arial" pitchFamily="34" charset="0"/>
+                <a:ea typeface="Arial" pitchFamily="34" charset="-122"/>
+                <a:cs typeface="Arial" pitchFamily="34" charset="-120"/>
+              </a:rPr>
+              <a:t> — fold forward, hands toward the floor.</a:t>
+            </a:r>
+            <a:endParaRPr lang="en-US" sz="1200" dirty="0"/>
+          </a:p>
+          <a:p>
+            <a:pPr algn="l" marL="342900" indent="-342900">
+              <a:lnSpc>
+                <a:spcPts val="1620"/>
+              </a:lnSpc>
+              <a:spcAft>
+                <a:spcPts val="300"/>
+              </a:spcAft>
+              <a:buSzPct val="100000"/>
+              <a:buChar char="•"/>
+            </a:pPr>
+            <a:r>
+              <a:rPr lang="en-US" sz="1200" b="1" dirty="0">
+                <a:solidFill>
+                  <a:srgbClr val="1C2833"/>
+                </a:solidFill>
+                <a:latin typeface="Arial" pitchFamily="34" charset="0"/>
+                <a:ea typeface="Arial" pitchFamily="34" charset="-122"/>
+                <a:cs typeface="Arial" pitchFamily="34" charset="-120"/>
+              </a:rPr>
+              <a:t>Aśva-sañcalanāsana (right)</a:t>
+            </a:r>
+            <a:pPr algn="l" indent="0" marL="0">
+              <a:lnSpc>
+                <a:spcPts val="1620"/>
+              </a:lnSpc>
+              <a:spcAft>
+                <a:spcPts val="300"/>
+              </a:spcAft>
+              <a:buNone/>
+            </a:pPr>
+            <a:r>
+              <a:rPr lang="en-US" sz="1200" dirty="0">
+                <a:solidFill>
+                  <a:srgbClr val="1C2833"/>
+                </a:solidFill>
+                <a:latin typeface="Arial" pitchFamily="34" charset="0"/>
+                <a:ea typeface="Arial" pitchFamily="34" charset="-122"/>
+                <a:cs typeface="Arial" pitchFamily="34" charset="-120"/>
+              </a:rPr>
+              <a:t> — step right foot back, lunge.</a:t>
+            </a:r>
+            <a:endParaRPr lang="en-US" sz="1200" dirty="0"/>
+          </a:p>
+          <a:p>
+            <a:pPr algn="l" marL="342900" indent="-342900">
+              <a:lnSpc>
+                <a:spcPts val="1620"/>
+              </a:lnSpc>
+              <a:spcAft>
+                <a:spcPts val="300"/>
+              </a:spcAft>
+              <a:buSzPct val="100000"/>
+              <a:buChar char="•"/>
+            </a:pPr>
+            <a:r>
+              <a:rPr lang="en-US" sz="1200" b="1" dirty="0">
+                <a:solidFill>
+                  <a:srgbClr val="1C2833"/>
+                </a:solidFill>
+                <a:latin typeface="Arial" pitchFamily="34" charset="0"/>
+                <a:ea typeface="Arial" pitchFamily="34" charset="-122"/>
+                <a:cs typeface="Arial" pitchFamily="34" charset="-120"/>
+              </a:rPr>
+              <a:t>Adho-mukha-śvānāsana</a:t>
+            </a:r>
+            <a:pPr algn="l" indent="0" marL="0">
+              <a:lnSpc>
+                <a:spcPts val="1620"/>
+              </a:lnSpc>
+              <a:spcAft>
+                <a:spcPts val="300"/>
+              </a:spcAft>
+              <a:buNone/>
+            </a:pPr>
+            <a:r>
+              <a:rPr lang="en-US" sz="1200" dirty="0">
+                <a:solidFill>
+                  <a:srgbClr val="1C2833"/>
+                </a:solidFill>
+                <a:latin typeface="Arial" pitchFamily="34" charset="0"/>
+                <a:ea typeface="Arial" pitchFamily="34" charset="-122"/>
+                <a:cs typeface="Arial" pitchFamily="34" charset="-120"/>
+              </a:rPr>
+              <a:t> — step left back, hips up, downward dog.</a:t>
+            </a:r>
+            <a:endParaRPr lang="en-US" sz="1200" dirty="0"/>
+          </a:p>
+          <a:p>
+            <a:pPr algn="l" marL="342900" indent="-342900">
+              <a:lnSpc>
+                <a:spcPts val="1620"/>
+              </a:lnSpc>
+              <a:spcAft>
+                <a:spcPts val="300"/>
+              </a:spcAft>
+              <a:buSzPct val="100000"/>
+              <a:buChar char="•"/>
+            </a:pPr>
+            <a:r>
+              <a:rPr lang="en-US" sz="1200" b="1" dirty="0">
+                <a:solidFill>
+                  <a:srgbClr val="1C2833"/>
+                </a:solidFill>
+                <a:latin typeface="Arial" pitchFamily="34" charset="0"/>
+                <a:ea typeface="Arial" pitchFamily="34" charset="-122"/>
+                <a:cs typeface="Arial" pitchFamily="34" charset="-120"/>
+              </a:rPr>
+              <a:t>Aṣṭāṅga-namaskāra</a:t>
+            </a:r>
+            <a:pPr algn="l" indent="0" marL="0">
+              <a:lnSpc>
+                <a:spcPts val="1620"/>
+              </a:lnSpc>
+              <a:spcAft>
+                <a:spcPts val="300"/>
+              </a:spcAft>
+              <a:buNone/>
+            </a:pPr>
+            <a:r>
+              <a:rPr lang="en-US" sz="1200" dirty="0">
+                <a:solidFill>
+                  <a:srgbClr val="1C2833"/>
+                </a:solidFill>
+                <a:latin typeface="Arial" pitchFamily="34" charset="0"/>
+                <a:ea typeface="Arial" pitchFamily="34" charset="-122"/>
+                <a:cs typeface="Arial" pitchFamily="34" charset="-120"/>
+              </a:rPr>
+              <a:t> — lower knees, chest, chin to mat (eight points down).</a:t>
+            </a:r>
+            <a:endParaRPr lang="en-US" sz="1200" dirty="0"/>
+          </a:p>
+          <a:p>
+            <a:pPr algn="l" marL="342900" indent="-342900">
+              <a:lnSpc>
+                <a:spcPts val="1620"/>
+              </a:lnSpc>
+              <a:spcAft>
+                <a:spcPts val="300"/>
+              </a:spcAft>
+              <a:buSzPct val="100000"/>
+              <a:buChar char="•"/>
+            </a:pPr>
+            <a:r>
+              <a:rPr lang="en-US" sz="1200" b="1" dirty="0">
+                <a:solidFill>
+                  <a:srgbClr val="1C2833"/>
+                </a:solidFill>
+                <a:latin typeface="Arial" pitchFamily="34" charset="0"/>
+                <a:ea typeface="Arial" pitchFamily="34" charset="-122"/>
+                <a:cs typeface="Arial" pitchFamily="34" charset="-120"/>
+              </a:rPr>
+              <a:t>Bhujaṅgāsana</a:t>
+            </a:r>
+            <a:pPr algn="l" indent="0" marL="0">
+              <a:lnSpc>
+                <a:spcPts val="1620"/>
+              </a:lnSpc>
+              <a:spcAft>
+                <a:spcPts val="300"/>
+              </a:spcAft>
+              <a:buNone/>
+            </a:pPr>
+            <a:r>
+              <a:rPr lang="en-US" sz="1200" dirty="0">
+                <a:solidFill>
+                  <a:srgbClr val="1C2833"/>
+                </a:solidFill>
+                <a:latin typeface="Arial" pitchFamily="34" charset="0"/>
+                <a:ea typeface="Arial" pitchFamily="34" charset="-122"/>
+                <a:cs typeface="Arial" pitchFamily="34" charset="-120"/>
+              </a:rPr>
+              <a:t> — slide forward, low cobra, chest up.</a:t>
+            </a:r>
+            <a:endParaRPr lang="en-US" sz="1200" dirty="0"/>
+          </a:p>
+          <a:p>
+            <a:pPr algn="l" marL="342900" indent="-342900">
+              <a:lnSpc>
+                <a:spcPts val="1620"/>
+              </a:lnSpc>
+              <a:spcAft>
+                <a:spcPts val="300"/>
+              </a:spcAft>
+              <a:buSzPct val="100000"/>
+              <a:buChar char="•"/>
+            </a:pPr>
+            <a:r>
+              <a:rPr lang="en-US" sz="1200" b="1" dirty="0">
+                <a:solidFill>
+                  <a:srgbClr val="1C2833"/>
+                </a:solidFill>
+                <a:latin typeface="Arial" pitchFamily="34" charset="0"/>
+                <a:ea typeface="Arial" pitchFamily="34" charset="-122"/>
+                <a:cs typeface="Arial" pitchFamily="34" charset="-120"/>
+              </a:rPr>
+              <a:t>Adho-mukha-śvānāsana</a:t>
+            </a:r>
+            <a:pPr algn="l" indent="0" marL="0">
+              <a:lnSpc>
+                <a:spcPts val="1620"/>
+              </a:lnSpc>
+              <a:spcAft>
+                <a:spcPts val="300"/>
+              </a:spcAft>
+              <a:buNone/>
+            </a:pPr>
+            <a:r>
+              <a:rPr lang="en-US" sz="1200" dirty="0">
+                <a:solidFill>
+                  <a:srgbClr val="1C2833"/>
+                </a:solidFill>
+                <a:latin typeface="Arial" pitchFamily="34" charset="0"/>
+                <a:ea typeface="Arial" pitchFamily="34" charset="-122"/>
+                <a:cs typeface="Arial" pitchFamily="34" charset="-120"/>
+              </a:rPr>
+              <a:t> — push back to downward dog.</a:t>
+            </a:r>
+            <a:endParaRPr lang="en-US" sz="1200" dirty="0"/>
+          </a:p>
+          <a:p>
+            <a:pPr algn="l" marL="342900" indent="-342900">
+              <a:lnSpc>
+                <a:spcPts val="1620"/>
+              </a:lnSpc>
+              <a:spcAft>
+                <a:spcPts val="300"/>
+              </a:spcAft>
+              <a:buSzPct val="100000"/>
+              <a:buChar char="•"/>
+            </a:pPr>
+            <a:r>
+              <a:rPr lang="en-US" sz="1200" b="1" dirty="0">
+                <a:solidFill>
+                  <a:srgbClr val="1C2833"/>
+                </a:solidFill>
+                <a:latin typeface="Arial" pitchFamily="34" charset="0"/>
+                <a:ea typeface="Arial" pitchFamily="34" charset="-122"/>
+                <a:cs typeface="Arial" pitchFamily="34" charset="-120"/>
+              </a:rPr>
+              <a:t>Aśva-sañcalanāsana (right)</a:t>
+            </a:r>
+            <a:pPr algn="l" indent="0" marL="0">
+              <a:lnSpc>
+                <a:spcPts val="1620"/>
+              </a:lnSpc>
+              <a:spcAft>
+                <a:spcPts val="300"/>
+              </a:spcAft>
+              <a:buNone/>
+            </a:pPr>
+            <a:r>
+              <a:rPr lang="en-US" sz="1200" dirty="0">
+                <a:solidFill>
+                  <a:srgbClr val="1C2833"/>
+                </a:solidFill>
+                <a:latin typeface="Arial" pitchFamily="34" charset="0"/>
+                <a:ea typeface="Arial" pitchFamily="34" charset="-122"/>
+                <a:cs typeface="Arial" pitchFamily="34" charset="-120"/>
+              </a:rPr>
+              <a:t> — step right foot forward, lunge.</a:t>
+            </a:r>
+            <a:endParaRPr lang="en-US" sz="1200" dirty="0"/>
+          </a:p>
+          <a:p>
+            <a:pPr algn="l" marL="342900" indent="-342900">
+              <a:lnSpc>
+                <a:spcPts val="1620"/>
+              </a:lnSpc>
+              <a:spcAft>
+                <a:spcPts val="300"/>
+              </a:spcAft>
+              <a:buSzPct val="100000"/>
+              <a:buChar char="•"/>
+            </a:pPr>
+            <a:r>
+              <a:rPr lang="en-US" sz="1200" b="1" dirty="0">
+                <a:solidFill>
+                  <a:srgbClr val="1C2833"/>
+                </a:solidFill>
+                <a:latin typeface="Arial" pitchFamily="34" charset="0"/>
+                <a:ea typeface="Arial" pitchFamily="34" charset="-122"/>
+                <a:cs typeface="Arial" pitchFamily="34" charset="-120"/>
+              </a:rPr>
+              <a:t>Uttānāsana</a:t>
+            </a:r>
+            <a:pPr algn="l" indent="0" marL="0">
+              <a:lnSpc>
+                <a:spcPts val="1620"/>
+              </a:lnSpc>
+              <a:spcAft>
+                <a:spcPts val="300"/>
+              </a:spcAft>
+              <a:buNone/>
+            </a:pPr>
+            <a:r>
+              <a:rPr lang="en-US" sz="1200" dirty="0">
+                <a:solidFill>
+                  <a:srgbClr val="1C2833"/>
+                </a:solidFill>
+                <a:latin typeface="Arial" pitchFamily="34" charset="0"/>
+                <a:ea typeface="Arial" pitchFamily="34" charset="-122"/>
+                <a:cs typeface="Arial" pitchFamily="34" charset="-120"/>
+              </a:rPr>
+              <a:t> — bring left foot forward, fold.</a:t>
             </a:r>
             <a:endParaRPr lang="en-US" sz="1200" dirty="0"/>
           </a:p>
